--- a/docs/pitch-deck/gigshield-pitch.pptx
+++ b/docs/pitch-deck/gigshield-pitch.pptx
@@ -3236,20 +3236,179 @@
           </a:p>
         </p:txBody>
       </p:sp>
-      <p:sp>
-        <p:nvSpPr>
-          <p:cNvPr id="5" name="Rounded Rectangle 4"/>
+      <p:pic>
+        <p:nvPicPr>
+          <p:cNvPr id="5" name="Picture 4" descr="gigshield-dark.png"/>
+          <p:cNvPicPr>
+            <a:picLocks noChangeAspect="1"/>
+          </p:cNvPicPr>
+          <p:nvPr/>
+        </p:nvPicPr>
+        <p:blipFill>
+          <a:blip r:embed="rId2"/>
+          <a:stretch>
+            <a:fillRect/>
+          </a:stretch>
+        </p:blipFill>
+        <p:spPr>
+          <a:xfrm>
+            <a:off x="731520" y="640080"/>
+            <a:ext cx="984738" cy="914400"/>
+          </a:xfrm>
+          <a:prstGeom prst="rect">
+            <a:avLst/>
+          </a:prstGeom>
+        </p:spPr>
+      </p:pic>
+      <p:sp>
+        <p:nvSpPr>
+          <p:cNvPr id="6" name="TextBox 5"/>
+          <p:cNvSpPr txBox="1"/>
+          <p:nvPr/>
+        </p:nvSpPr>
+        <p:spPr>
+          <a:xfrm>
+            <a:off x="1965960" y="960120"/>
+            <a:ext cx="9144000" cy="274320"/>
+          </a:xfrm>
+          <a:prstGeom prst="rect">
+            <a:avLst/>
+          </a:prstGeom>
+          <a:noFill/>
+        </p:spPr>
+        <p:txBody>
+          <a:bodyPr wrap="square" lIns="0" rIns="0" tIns="0" bIns="0" anchor="t">
+            <a:spAutoFit/>
+          </a:bodyPr>
+          <a:lstStyle/>
+          <a:p>
+            <a:pPr algn="l">
+              <a:lnSpc>
+                <a:spcPct val="115000"/>
+              </a:lnSpc>
+            </a:pPr>
+            <a:r>
+              <a:rPr sz="1000" b="1" i="0">
+                <a:solidFill>
+                  <a:srgbClr val="B0C0D8"/>
+                </a:solidFill>
+                <a:latin typeface="Inter"/>
+              </a:rPr>
+              <a:t>GUIDEWIRE DEVTRAILS 2026   ·   PHASE 3 FINAL</a:t>
+            </a:r>
+          </a:p>
+        </p:txBody>
+      </p:sp>
+      <p:sp>
+        <p:nvSpPr>
+          <p:cNvPr id="7" name="TextBox 6"/>
+          <p:cNvSpPr txBox="1"/>
+          <p:nvPr/>
+        </p:nvSpPr>
+        <p:spPr>
+          <a:xfrm>
+            <a:off x="731520" y="1920240"/>
+            <a:ext cx="10972800" cy="1645920"/>
+          </a:xfrm>
+          <a:prstGeom prst="rect">
+            <a:avLst/>
+          </a:prstGeom>
+          <a:noFill/>
+        </p:spPr>
+        <p:txBody>
+          <a:bodyPr wrap="square" lIns="0" rIns="0" tIns="0" bIns="0" anchor="t">
+            <a:spAutoFit/>
+          </a:bodyPr>
+          <a:lstStyle/>
+          <a:p>
+            <a:pPr algn="l">
+              <a:lnSpc>
+                <a:spcPct val="115000"/>
+              </a:lnSpc>
+            </a:pPr>
+            <a:r>
+              <a:rPr sz="7200" b="1" i="0">
+                <a:solidFill>
+                  <a:srgbClr val="FFFFFF"/>
+                </a:solidFill>
+                <a:latin typeface="Inter"/>
+              </a:rPr>
+              <a:t>Gig</a:t>
+            </a:r>
+            <a:r>
+              <a:rPr sz="7200" b="1" i="0">
+                <a:solidFill>
+                  <a:srgbClr val="F26522"/>
+                </a:solidFill>
+                <a:latin typeface="Inter"/>
+              </a:rPr>
+              <a:t>Shield</a:t>
+            </a:r>
+            <a:r>
+              <a:rPr sz="7200" b="1" i="0">
+                <a:solidFill>
+                  <a:srgbClr val="FFFFFF"/>
+                </a:solidFill>
+                <a:latin typeface="Inter"/>
+              </a:rPr>
+              <a:t>.</a:t>
+            </a:r>
+          </a:p>
+        </p:txBody>
+      </p:sp>
+      <p:sp>
+        <p:nvSpPr>
+          <p:cNvPr id="8" name="TextBox 7"/>
+          <p:cNvSpPr txBox="1"/>
+          <p:nvPr/>
+        </p:nvSpPr>
+        <p:spPr>
+          <a:xfrm>
+            <a:off x="731520" y="3108960"/>
+            <a:ext cx="10058400" cy="1097280"/>
+          </a:xfrm>
+          <a:prstGeom prst="rect">
+            <a:avLst/>
+          </a:prstGeom>
+          <a:noFill/>
+        </p:spPr>
+        <p:txBody>
+          <a:bodyPr wrap="square" lIns="0" rIns="0" tIns="0" bIns="0" anchor="t">
+            <a:spAutoFit/>
+          </a:bodyPr>
+          <a:lstStyle/>
+          <a:p>
+            <a:pPr algn="l">
+              <a:lnSpc>
+                <a:spcPct val="135000"/>
+              </a:lnSpc>
+            </a:pPr>
+            <a:r>
+              <a:rPr sz="1800" b="0" i="0">
+                <a:solidFill>
+                  <a:srgbClr val="E0E8F2"/>
+                </a:solidFill>
+                <a:latin typeface="Inter"/>
+              </a:rPr>
+              <a:t>AI-powered parametric income protection for India's 7.7 million gig workers — zero paperwork, sub-10-minute payout, real Razorpay integration.</a:t>
+            </a:r>
+          </a:p>
+        </p:txBody>
+      </p:sp>
+      <p:sp>
+        <p:nvSpPr>
+          <p:cNvPr id="9" name="Rounded Rectangle 8"/>
           <p:cNvSpPr/>
           <p:nvPr/>
         </p:nvSpPr>
         <p:spPr>
           <a:xfrm>
-            <a:off x="731520" y="731520"/>
-            <a:ext cx="548640" cy="548640"/>
+            <a:off x="731520" y="4572000"/>
+            <a:ext cx="1691640" cy="256032"/>
           </a:xfrm>
           <a:prstGeom prst="roundRect">
             <a:avLst>
-              <a:gd name="adj" fmla="val 20000"/>
+              <a:gd name="adj" fmla="val 50000"/>
             </a:avLst>
           </a:prstGeom>
           <a:solidFill>
@@ -3283,226 +3442,7 @@
       </p:sp>
       <p:sp>
         <p:nvSpPr>
-          <p:cNvPr id="6" name="TextBox 5"/>
-          <p:cNvSpPr txBox="1"/>
-          <p:nvPr/>
-        </p:nvSpPr>
-        <p:spPr>
-          <a:xfrm>
-            <a:off x="731520" y="804672"/>
-            <a:ext cx="548640" cy="457200"/>
-          </a:xfrm>
-          <a:prstGeom prst="rect">
-            <a:avLst/>
-          </a:prstGeom>
-          <a:noFill/>
-        </p:spPr>
-        <p:txBody>
-          <a:bodyPr wrap="square" lIns="0" rIns="0" tIns="0" bIns="0" anchor="t">
-            <a:spAutoFit/>
-          </a:bodyPr>
-          <a:lstStyle/>
-          <a:p>
-            <a:pPr algn="ctr">
-              <a:lnSpc>
-                <a:spcPct val="115000"/>
-              </a:lnSpc>
-            </a:pPr>
-            <a:r>
-              <a:rPr sz="2400" b="1" i="0">
-                <a:solidFill>
-                  <a:srgbClr val="FFFFFF"/>
-                </a:solidFill>
-                <a:latin typeface="Inter"/>
-              </a:rPr>
-              <a:t>G</a:t>
-            </a:r>
-          </a:p>
-        </p:txBody>
-      </p:sp>
-      <p:sp>
-        <p:nvSpPr>
-          <p:cNvPr id="7" name="TextBox 6"/>
-          <p:cNvSpPr txBox="1"/>
-          <p:nvPr/>
-        </p:nvSpPr>
-        <p:spPr>
-          <a:xfrm>
-            <a:off x="1417320" y="868680"/>
-            <a:ext cx="9144000" cy="274320"/>
-          </a:xfrm>
-          <a:prstGeom prst="rect">
-            <a:avLst/>
-          </a:prstGeom>
-          <a:noFill/>
-        </p:spPr>
-        <p:txBody>
-          <a:bodyPr wrap="square" lIns="0" rIns="0" tIns="0" bIns="0" anchor="t">
-            <a:spAutoFit/>
-          </a:bodyPr>
-          <a:lstStyle/>
-          <a:p>
-            <a:pPr algn="l">
-              <a:lnSpc>
-                <a:spcPct val="115000"/>
-              </a:lnSpc>
-            </a:pPr>
-            <a:r>
-              <a:rPr sz="1000" b="1" i="0">
-                <a:solidFill>
-                  <a:srgbClr val="B0C0D8"/>
-                </a:solidFill>
-                <a:latin typeface="Inter"/>
-              </a:rPr>
-              <a:t>GUIDEWIRE DEVTRAILS 2026   ·   PHASE 3 FINAL</a:t>
-            </a:r>
-          </a:p>
-        </p:txBody>
-      </p:sp>
-      <p:sp>
-        <p:nvSpPr>
-          <p:cNvPr id="8" name="TextBox 7"/>
-          <p:cNvSpPr txBox="1"/>
-          <p:nvPr/>
-        </p:nvSpPr>
-        <p:spPr>
-          <a:xfrm>
-            <a:off x="731520" y="1920240"/>
-            <a:ext cx="10972800" cy="1645920"/>
-          </a:xfrm>
-          <a:prstGeom prst="rect">
-            <a:avLst/>
-          </a:prstGeom>
-          <a:noFill/>
-        </p:spPr>
-        <p:txBody>
-          <a:bodyPr wrap="square" lIns="0" rIns="0" tIns="0" bIns="0" anchor="t">
-            <a:spAutoFit/>
-          </a:bodyPr>
-          <a:lstStyle/>
-          <a:p>
-            <a:pPr algn="l">
-              <a:lnSpc>
-                <a:spcPct val="115000"/>
-              </a:lnSpc>
-            </a:pPr>
-            <a:r>
-              <a:rPr sz="7200" b="1" i="0">
-                <a:solidFill>
-                  <a:srgbClr val="FFFFFF"/>
-                </a:solidFill>
-                <a:latin typeface="Inter"/>
-              </a:rPr>
-              <a:t>Gig</a:t>
-            </a:r>
-            <a:r>
-              <a:rPr sz="7200" b="1" i="0">
-                <a:solidFill>
-                  <a:srgbClr val="F26522"/>
-                </a:solidFill>
-                <a:latin typeface="Inter"/>
-              </a:rPr>
-              <a:t>Shield</a:t>
-            </a:r>
-            <a:r>
-              <a:rPr sz="7200" b="1" i="0">
-                <a:solidFill>
-                  <a:srgbClr val="FFFFFF"/>
-                </a:solidFill>
-                <a:latin typeface="Inter"/>
-              </a:rPr>
-              <a:t>.</a:t>
-            </a:r>
-          </a:p>
-        </p:txBody>
-      </p:sp>
-      <p:sp>
-        <p:nvSpPr>
-          <p:cNvPr id="9" name="TextBox 8"/>
-          <p:cNvSpPr txBox="1"/>
-          <p:nvPr/>
-        </p:nvSpPr>
-        <p:spPr>
-          <a:xfrm>
-            <a:off x="731520" y="3108960"/>
-            <a:ext cx="10058400" cy="1097280"/>
-          </a:xfrm>
-          <a:prstGeom prst="rect">
-            <a:avLst/>
-          </a:prstGeom>
-          <a:noFill/>
-        </p:spPr>
-        <p:txBody>
-          <a:bodyPr wrap="square" lIns="0" rIns="0" tIns="0" bIns="0" anchor="t">
-            <a:spAutoFit/>
-          </a:bodyPr>
-          <a:lstStyle/>
-          <a:p>
-            <a:pPr algn="l">
-              <a:lnSpc>
-                <a:spcPct val="135000"/>
-              </a:lnSpc>
-            </a:pPr>
-            <a:r>
-              <a:rPr sz="1800" b="0" i="0">
-                <a:solidFill>
-                  <a:srgbClr val="E0E8F2"/>
-                </a:solidFill>
-                <a:latin typeface="Inter"/>
-              </a:rPr>
-              <a:t>AI-powered parametric income protection for India's 7.7 million gig workers — zero paperwork, sub-10-minute payout, real Razorpay integration.</a:t>
-            </a:r>
-          </a:p>
-        </p:txBody>
-      </p:sp>
-      <p:sp>
-        <p:nvSpPr>
-          <p:cNvPr id="10" name="Rounded Rectangle 9"/>
-          <p:cNvSpPr/>
-          <p:nvPr/>
-        </p:nvSpPr>
-        <p:spPr>
-          <a:xfrm>
-            <a:off x="731520" y="4572000"/>
-            <a:ext cx="1691640" cy="256032"/>
-          </a:xfrm>
-          <a:prstGeom prst="roundRect">
-            <a:avLst>
-              <a:gd name="adj" fmla="val 50000"/>
-            </a:avLst>
-          </a:prstGeom>
-          <a:solidFill>
-            <a:srgbClr val="F26522"/>
-          </a:solidFill>
-          <a:ln>
-            <a:noFill/>
-          </a:ln>
-        </p:spPr>
-        <p:style>
-          <a:lnRef idx="1">
-            <a:schemeClr val="accent1"/>
-          </a:lnRef>
-          <a:fillRef idx="3">
-            <a:schemeClr val="accent1"/>
-          </a:fillRef>
-          <a:effectRef idx="2">
-            <a:schemeClr val="accent1"/>
-          </a:effectRef>
-          <a:fontRef idx="minor">
-            <a:schemeClr val="lt1"/>
-          </a:fontRef>
-        </p:style>
-        <p:txBody>
-          <a:bodyPr rtlCol="0" anchor="ctr"/>
-          <a:lstStyle/>
-          <a:p>
-            <a:pPr algn="ctr"/>
-          </a:p>
-        </p:txBody>
-      </p:sp>
-      <p:sp>
-        <p:nvSpPr>
-          <p:cNvPr id="11" name="TextBox 10"/>
+          <p:cNvPr id="10" name="TextBox 9"/>
           <p:cNvSpPr txBox="1"/>
           <p:nvPr/>
         </p:nvSpPr>
@@ -3541,7 +3481,7 @@
       </p:sp>
       <p:sp>
         <p:nvSpPr>
-          <p:cNvPr id="12" name="Rounded Rectangle 11"/>
+          <p:cNvPr id="11" name="Rounded Rectangle 10"/>
           <p:cNvSpPr/>
           <p:nvPr/>
         </p:nvSpPr>
@@ -3586,7 +3526,7 @@
       </p:sp>
       <p:sp>
         <p:nvSpPr>
-          <p:cNvPr id="13" name="TextBox 12"/>
+          <p:cNvPr id="12" name="TextBox 11"/>
           <p:cNvSpPr txBox="1"/>
           <p:nvPr/>
         </p:nvSpPr>
@@ -3625,7 +3565,7 @@
       </p:sp>
       <p:sp>
         <p:nvSpPr>
-          <p:cNvPr id="14" name="Rounded Rectangle 13"/>
+          <p:cNvPr id="13" name="Rounded Rectangle 12"/>
           <p:cNvSpPr/>
           <p:nvPr/>
         </p:nvSpPr>
@@ -3670,7 +3610,7 @@
       </p:sp>
       <p:sp>
         <p:nvSpPr>
-          <p:cNvPr id="15" name="TextBox 14"/>
+          <p:cNvPr id="14" name="TextBox 13"/>
           <p:cNvSpPr txBox="1"/>
           <p:nvPr/>
         </p:nvSpPr>
@@ -3709,7 +3649,7 @@
       </p:sp>
       <p:sp>
         <p:nvSpPr>
-          <p:cNvPr id="16" name="Rounded Rectangle 15"/>
+          <p:cNvPr id="15" name="Rounded Rectangle 14"/>
           <p:cNvSpPr/>
           <p:nvPr/>
         </p:nvSpPr>
@@ -3754,7 +3694,7 @@
       </p:sp>
       <p:sp>
         <p:nvSpPr>
-          <p:cNvPr id="17" name="TextBox 16"/>
+          <p:cNvPr id="16" name="TextBox 15"/>
           <p:cNvSpPr txBox="1"/>
           <p:nvPr/>
         </p:nvSpPr>
@@ -3793,7 +3733,7 @@
       </p:sp>
       <p:sp>
         <p:nvSpPr>
-          <p:cNvPr id="18" name="Rounded Rectangle 17"/>
+          <p:cNvPr id="17" name="Rounded Rectangle 16"/>
           <p:cNvSpPr/>
           <p:nvPr/>
         </p:nvSpPr>
@@ -3838,7 +3778,7 @@
       </p:sp>
       <p:sp>
         <p:nvSpPr>
-          <p:cNvPr id="19" name="TextBox 18"/>
+          <p:cNvPr id="18" name="TextBox 17"/>
           <p:cNvSpPr txBox="1"/>
           <p:nvPr/>
         </p:nvSpPr>
@@ -3877,7 +3817,7 @@
       </p:sp>
       <p:sp>
         <p:nvSpPr>
-          <p:cNvPr id="20" name="Rounded Rectangle 19"/>
+          <p:cNvPr id="19" name="Rounded Rectangle 18"/>
           <p:cNvSpPr/>
           <p:nvPr/>
         </p:nvSpPr>
@@ -3922,7 +3862,7 @@
       </p:sp>
       <p:sp>
         <p:nvSpPr>
-          <p:cNvPr id="21" name="TextBox 20"/>
+          <p:cNvPr id="20" name="TextBox 19"/>
           <p:cNvSpPr txBox="1"/>
           <p:nvPr/>
         </p:nvSpPr>
@@ -3961,7 +3901,7 @@
       </p:sp>
       <p:sp>
         <p:nvSpPr>
-          <p:cNvPr id="22" name="Rectangle 21"/>
+          <p:cNvPr id="21" name="Rectangle 20"/>
           <p:cNvSpPr/>
           <p:nvPr/>
         </p:nvSpPr>
@@ -4005,7 +3945,7 @@
       </p:sp>
       <p:sp>
         <p:nvSpPr>
-          <p:cNvPr id="23" name="TextBox 22"/>
+          <p:cNvPr id="22" name="TextBox 21"/>
           <p:cNvSpPr txBox="1"/>
           <p:nvPr/>
         </p:nvSpPr>
@@ -4121,7 +4061,7 @@
       </p:sp>
       <p:sp>
         <p:nvSpPr>
-          <p:cNvPr id="24" name="TextBox 23"/>
+          <p:cNvPr id="23" name="TextBox 22"/>
           <p:cNvSpPr txBox="1"/>
           <p:nvPr/>
         </p:nvSpPr>
@@ -4341,16 +4281,40 @@
           </a:p>
         </p:txBody>
       </p:sp>
-      <p:sp>
-        <p:nvSpPr>
-          <p:cNvPr id="4" name="Rectangle 3"/>
+      <p:pic>
+        <p:nvPicPr>
+          <p:cNvPr id="4" name="Picture 3" descr="gigshield-dark.png"/>
+          <p:cNvPicPr>
+            <a:picLocks noChangeAspect="1"/>
+          </p:cNvPicPr>
+          <p:nvPr/>
+        </p:nvPicPr>
+        <p:blipFill>
+          <a:blip r:embed="rId2"/>
+          <a:stretch>
+            <a:fillRect/>
+          </a:stretch>
+        </p:blipFill>
+        <p:spPr>
+          <a:xfrm>
+            <a:off x="320040" y="54864"/>
+            <a:ext cx="443132" cy="411480"/>
+          </a:xfrm>
+          <a:prstGeom prst="rect">
+            <a:avLst/>
+          </a:prstGeom>
+        </p:spPr>
+      </p:pic>
+      <p:sp>
+        <p:nvSpPr>
+          <p:cNvPr id="5" name="Rectangle 4"/>
           <p:cNvSpPr/>
           <p:nvPr/>
         </p:nvSpPr>
         <p:spPr>
           <a:xfrm>
-            <a:off x="411480" y="201168"/>
-            <a:ext cx="91440" cy="91440"/>
+            <a:off x="1691640" y="164592"/>
+            <a:ext cx="18288" cy="182880"/>
           </a:xfrm>
           <a:prstGeom prst="rect">
             <a:avLst/>
@@ -4361,6 +4325,7 @@
           <a:ln>
             <a:noFill/>
           </a:ln>
+          <a:effectLst/>
         </p:spPr>
         <p:style>
           <a:lnRef idx="1">
@@ -4386,13 +4351,13 @@
       </p:sp>
       <p:sp>
         <p:nvSpPr>
-          <p:cNvPr id="5" name="TextBox 4"/>
-          <p:cNvSpPr txBox="1"/>
-          <p:nvPr/>
-        </p:nvSpPr>
-        <p:spPr>
-          <a:xfrm>
-            <a:off x="594360" y="118872"/>
+          <p:cNvPr id="6" name="TextBox 5"/>
+          <p:cNvSpPr txBox="1"/>
+          <p:nvPr/>
+        </p:nvSpPr>
+        <p:spPr>
+          <a:xfrm>
+            <a:off x="1783080" y="118872"/>
             <a:ext cx="7315200" cy="274320"/>
           </a:xfrm>
           <a:prstGeom prst="rect">
@@ -4412,20 +4377,20 @@
               </a:lnSpc>
             </a:pPr>
             <a:r>
-              <a:rPr sz="1200" b="1" i="0">
-                <a:solidFill>
-                  <a:srgbClr val="FFFFFF"/>
-                </a:solidFill>
-                <a:latin typeface="Inter"/>
-              </a:rPr>
-              <a:t>GigShield   |   Phase 3 Final Submission</a:t>
-            </a:r>
-          </a:p>
-        </p:txBody>
-      </p:sp>
-      <p:sp>
-        <p:nvSpPr>
-          <p:cNvPr id="6" name="TextBox 5"/>
+              <a:rPr sz="1100" b="1" i="0">
+                <a:solidFill>
+                  <a:srgbClr val="D8E2F0"/>
+                </a:solidFill>
+                <a:latin typeface="Inter"/>
+              </a:rPr>
+              <a:t>Phase 3 Final Submission   ·   Guidewire DEVTrails 2026</a:t>
+            </a:r>
+          </a:p>
+        </p:txBody>
+      </p:sp>
+      <p:sp>
+        <p:nvSpPr>
+          <p:cNvPr id="7" name="TextBox 6"/>
           <p:cNvSpPr txBox="1"/>
           <p:nvPr/>
         </p:nvSpPr>
@@ -4464,7 +4429,7 @@
       </p:sp>
       <p:sp>
         <p:nvSpPr>
-          <p:cNvPr id="7" name="Rectangle 6"/>
+          <p:cNvPr id="8" name="Rectangle 7"/>
           <p:cNvSpPr/>
           <p:nvPr/>
         </p:nvSpPr>
@@ -4508,7 +4473,7 @@
       </p:sp>
       <p:sp>
         <p:nvSpPr>
-          <p:cNvPr id="8" name="TextBox 7"/>
+          <p:cNvPr id="9" name="TextBox 8"/>
           <p:cNvSpPr txBox="1"/>
           <p:nvPr/>
         </p:nvSpPr>
@@ -4547,7 +4512,7 @@
       </p:sp>
       <p:sp>
         <p:nvSpPr>
-          <p:cNvPr id="9" name="Rounded Rectangle 8"/>
+          <p:cNvPr id="10" name="Rounded Rectangle 9"/>
           <p:cNvSpPr/>
           <p:nvPr/>
         </p:nvSpPr>
@@ -4592,7 +4557,7 @@
       </p:sp>
       <p:sp>
         <p:nvSpPr>
-          <p:cNvPr id="10" name="TextBox 9"/>
+          <p:cNvPr id="11" name="TextBox 10"/>
           <p:cNvSpPr txBox="1"/>
           <p:nvPr/>
         </p:nvSpPr>
@@ -4631,7 +4596,7 @@
       </p:sp>
       <p:sp>
         <p:nvSpPr>
-          <p:cNvPr id="11" name="Rectangle 10"/>
+          <p:cNvPr id="12" name="Rectangle 11"/>
           <p:cNvSpPr/>
           <p:nvPr/>
         </p:nvSpPr>
@@ -4675,7 +4640,7 @@
       </p:sp>
       <p:sp>
         <p:nvSpPr>
-          <p:cNvPr id="12" name="TextBox 11"/>
+          <p:cNvPr id="13" name="TextBox 12"/>
           <p:cNvSpPr txBox="1"/>
           <p:nvPr/>
         </p:nvSpPr>
@@ -4714,7 +4679,7 @@
       </p:sp>
       <p:sp>
         <p:nvSpPr>
-          <p:cNvPr id="13" name="TextBox 12"/>
+          <p:cNvPr id="14" name="TextBox 13"/>
           <p:cNvSpPr txBox="1"/>
           <p:nvPr/>
         </p:nvSpPr>
@@ -4771,7 +4736,7 @@
       </p:sp>
       <p:sp>
         <p:nvSpPr>
-          <p:cNvPr id="14" name="TextBox 13"/>
+          <p:cNvPr id="15" name="TextBox 14"/>
           <p:cNvSpPr txBox="1"/>
           <p:nvPr/>
         </p:nvSpPr>
@@ -4810,7 +4775,7 @@
       </p:sp>
       <p:sp>
         <p:nvSpPr>
-          <p:cNvPr id="15" name="Rectangle 14"/>
+          <p:cNvPr id="16" name="Rectangle 15"/>
           <p:cNvSpPr/>
           <p:nvPr/>
         </p:nvSpPr>
@@ -4854,7 +4819,7 @@
       </p:sp>
       <p:sp>
         <p:nvSpPr>
-          <p:cNvPr id="16" name="Rectangle 15"/>
+          <p:cNvPr id="17" name="Rectangle 16"/>
           <p:cNvSpPr/>
           <p:nvPr/>
         </p:nvSpPr>
@@ -4900,7 +4865,7 @@
       </p:sp>
       <p:sp>
         <p:nvSpPr>
-          <p:cNvPr id="17" name="Rounded Rectangle 16"/>
+          <p:cNvPr id="18" name="Rounded Rectangle 17"/>
           <p:cNvSpPr/>
           <p:nvPr/>
         </p:nvSpPr>
@@ -4945,7 +4910,7 @@
       </p:sp>
       <p:sp>
         <p:nvSpPr>
-          <p:cNvPr id="18" name="TextBox 17"/>
+          <p:cNvPr id="19" name="TextBox 18"/>
           <p:cNvSpPr txBox="1"/>
           <p:nvPr/>
         </p:nvSpPr>
@@ -4984,7 +4949,7 @@
       </p:sp>
       <p:sp>
         <p:nvSpPr>
-          <p:cNvPr id="19" name="TextBox 18"/>
+          <p:cNvPr id="20" name="TextBox 19"/>
           <p:cNvSpPr txBox="1"/>
           <p:nvPr/>
         </p:nvSpPr>
@@ -5023,7 +4988,7 @@
       </p:sp>
       <p:sp>
         <p:nvSpPr>
-          <p:cNvPr id="20" name="TextBox 19"/>
+          <p:cNvPr id="21" name="TextBox 20"/>
           <p:cNvSpPr txBox="1"/>
           <p:nvPr/>
         </p:nvSpPr>
@@ -5062,7 +5027,7 @@
       </p:sp>
       <p:sp>
         <p:nvSpPr>
-          <p:cNvPr id="21" name="TextBox 20"/>
+          <p:cNvPr id="22" name="TextBox 21"/>
           <p:cNvSpPr txBox="1"/>
           <p:nvPr/>
         </p:nvSpPr>
@@ -5117,7 +5082,7 @@
       </p:sp>
       <p:sp>
         <p:nvSpPr>
-          <p:cNvPr id="22" name="Rectangle 21"/>
+          <p:cNvPr id="23" name="Rectangle 22"/>
           <p:cNvSpPr/>
           <p:nvPr/>
         </p:nvSpPr>
@@ -5161,7 +5126,7 @@
       </p:sp>
       <p:sp>
         <p:nvSpPr>
-          <p:cNvPr id="23" name="Rectangle 22"/>
+          <p:cNvPr id="24" name="Rectangle 23"/>
           <p:cNvSpPr/>
           <p:nvPr/>
         </p:nvSpPr>
@@ -5207,7 +5172,7 @@
       </p:sp>
       <p:sp>
         <p:nvSpPr>
-          <p:cNvPr id="24" name="Rounded Rectangle 23"/>
+          <p:cNvPr id="25" name="Rounded Rectangle 24"/>
           <p:cNvSpPr/>
           <p:nvPr/>
         </p:nvSpPr>
@@ -5252,7 +5217,7 @@
       </p:sp>
       <p:sp>
         <p:nvSpPr>
-          <p:cNvPr id="25" name="TextBox 24"/>
+          <p:cNvPr id="26" name="TextBox 25"/>
           <p:cNvSpPr txBox="1"/>
           <p:nvPr/>
         </p:nvSpPr>
@@ -5291,7 +5256,7 @@
       </p:sp>
       <p:sp>
         <p:nvSpPr>
-          <p:cNvPr id="26" name="TextBox 25"/>
+          <p:cNvPr id="27" name="TextBox 26"/>
           <p:cNvSpPr txBox="1"/>
           <p:nvPr/>
         </p:nvSpPr>
@@ -5330,7 +5295,7 @@
       </p:sp>
       <p:sp>
         <p:nvSpPr>
-          <p:cNvPr id="27" name="TextBox 26"/>
+          <p:cNvPr id="28" name="TextBox 27"/>
           <p:cNvSpPr txBox="1"/>
           <p:nvPr/>
         </p:nvSpPr>
@@ -5369,7 +5334,7 @@
       </p:sp>
       <p:sp>
         <p:nvSpPr>
-          <p:cNvPr id="28" name="TextBox 27"/>
+          <p:cNvPr id="29" name="TextBox 28"/>
           <p:cNvSpPr txBox="1"/>
           <p:nvPr/>
         </p:nvSpPr>
@@ -5424,7 +5389,7 @@
       </p:sp>
       <p:sp>
         <p:nvSpPr>
-          <p:cNvPr id="29" name="Rectangle 28"/>
+          <p:cNvPr id="30" name="Rectangle 29"/>
           <p:cNvSpPr/>
           <p:nvPr/>
         </p:nvSpPr>
@@ -5468,7 +5433,7 @@
       </p:sp>
       <p:sp>
         <p:nvSpPr>
-          <p:cNvPr id="30" name="Rectangle 29"/>
+          <p:cNvPr id="31" name="Rectangle 30"/>
           <p:cNvSpPr/>
           <p:nvPr/>
         </p:nvSpPr>
@@ -5514,7 +5479,7 @@
       </p:sp>
       <p:sp>
         <p:nvSpPr>
-          <p:cNvPr id="31" name="Rounded Rectangle 30"/>
+          <p:cNvPr id="32" name="Rounded Rectangle 31"/>
           <p:cNvSpPr/>
           <p:nvPr/>
         </p:nvSpPr>
@@ -5559,7 +5524,7 @@
       </p:sp>
       <p:sp>
         <p:nvSpPr>
-          <p:cNvPr id="32" name="TextBox 31"/>
+          <p:cNvPr id="33" name="TextBox 32"/>
           <p:cNvSpPr txBox="1"/>
           <p:nvPr/>
         </p:nvSpPr>
@@ -5598,7 +5563,7 @@
       </p:sp>
       <p:sp>
         <p:nvSpPr>
-          <p:cNvPr id="33" name="TextBox 32"/>
+          <p:cNvPr id="34" name="TextBox 33"/>
           <p:cNvSpPr txBox="1"/>
           <p:nvPr/>
         </p:nvSpPr>
@@ -5637,7 +5602,7 @@
       </p:sp>
       <p:sp>
         <p:nvSpPr>
-          <p:cNvPr id="34" name="TextBox 33"/>
+          <p:cNvPr id="35" name="TextBox 34"/>
           <p:cNvSpPr txBox="1"/>
           <p:nvPr/>
         </p:nvSpPr>
@@ -5676,7 +5641,7 @@
       </p:sp>
       <p:sp>
         <p:nvSpPr>
-          <p:cNvPr id="35" name="TextBox 34"/>
+          <p:cNvPr id="36" name="TextBox 35"/>
           <p:cNvSpPr txBox="1"/>
           <p:nvPr/>
         </p:nvSpPr>
@@ -5731,7 +5696,7 @@
       </p:sp>
       <p:sp>
         <p:nvSpPr>
-          <p:cNvPr id="36" name="Rectangle 35"/>
+          <p:cNvPr id="37" name="Rectangle 36"/>
           <p:cNvSpPr/>
           <p:nvPr/>
         </p:nvSpPr>
@@ -5775,7 +5740,7 @@
       </p:sp>
       <p:sp>
         <p:nvSpPr>
-          <p:cNvPr id="37" name="Rectangle 36"/>
+          <p:cNvPr id="38" name="Rectangle 37"/>
           <p:cNvSpPr/>
           <p:nvPr/>
         </p:nvSpPr>
@@ -5819,7 +5784,7 @@
       </p:sp>
       <p:sp>
         <p:nvSpPr>
-          <p:cNvPr id="38" name="TextBox 37"/>
+          <p:cNvPr id="39" name="TextBox 38"/>
           <p:cNvSpPr txBox="1"/>
           <p:nvPr/>
         </p:nvSpPr>
@@ -5858,7 +5823,7 @@
       </p:sp>
       <p:sp>
         <p:nvSpPr>
-          <p:cNvPr id="39" name="TextBox 38"/>
+          <p:cNvPr id="40" name="TextBox 39"/>
           <p:cNvSpPr txBox="1"/>
           <p:nvPr/>
         </p:nvSpPr>
@@ -6001,16 +5966,40 @@
           </a:p>
         </p:txBody>
       </p:sp>
-      <p:sp>
-        <p:nvSpPr>
-          <p:cNvPr id="4" name="Rectangle 3"/>
+      <p:pic>
+        <p:nvPicPr>
+          <p:cNvPr id="4" name="Picture 3" descr="gigshield-dark.png"/>
+          <p:cNvPicPr>
+            <a:picLocks noChangeAspect="1"/>
+          </p:cNvPicPr>
+          <p:nvPr/>
+        </p:nvPicPr>
+        <p:blipFill>
+          <a:blip r:embed="rId2"/>
+          <a:stretch>
+            <a:fillRect/>
+          </a:stretch>
+        </p:blipFill>
+        <p:spPr>
+          <a:xfrm>
+            <a:off x="320040" y="54864"/>
+            <a:ext cx="443132" cy="411480"/>
+          </a:xfrm>
+          <a:prstGeom prst="rect">
+            <a:avLst/>
+          </a:prstGeom>
+        </p:spPr>
+      </p:pic>
+      <p:sp>
+        <p:nvSpPr>
+          <p:cNvPr id="5" name="Rectangle 4"/>
           <p:cNvSpPr/>
           <p:nvPr/>
         </p:nvSpPr>
         <p:spPr>
           <a:xfrm>
-            <a:off x="411480" y="201168"/>
-            <a:ext cx="91440" cy="91440"/>
+            <a:off x="1691640" y="164592"/>
+            <a:ext cx="18288" cy="182880"/>
           </a:xfrm>
           <a:prstGeom prst="rect">
             <a:avLst/>
@@ -6021,6 +6010,7 @@
           <a:ln>
             <a:noFill/>
           </a:ln>
+          <a:effectLst/>
         </p:spPr>
         <p:style>
           <a:lnRef idx="1">
@@ -6046,13 +6036,13 @@
       </p:sp>
       <p:sp>
         <p:nvSpPr>
-          <p:cNvPr id="5" name="TextBox 4"/>
-          <p:cNvSpPr txBox="1"/>
-          <p:nvPr/>
-        </p:nvSpPr>
-        <p:spPr>
-          <a:xfrm>
-            <a:off x="594360" y="118872"/>
+          <p:cNvPr id="6" name="TextBox 5"/>
+          <p:cNvSpPr txBox="1"/>
+          <p:nvPr/>
+        </p:nvSpPr>
+        <p:spPr>
+          <a:xfrm>
+            <a:off x="1783080" y="118872"/>
             <a:ext cx="7315200" cy="274320"/>
           </a:xfrm>
           <a:prstGeom prst="rect">
@@ -6072,20 +6062,20 @@
               </a:lnSpc>
             </a:pPr>
             <a:r>
-              <a:rPr sz="1200" b="1" i="0">
-                <a:solidFill>
-                  <a:srgbClr val="FFFFFF"/>
-                </a:solidFill>
-                <a:latin typeface="Inter"/>
-              </a:rPr>
-              <a:t>GigShield   |   Phase 3 Final Submission</a:t>
-            </a:r>
-          </a:p>
-        </p:txBody>
-      </p:sp>
-      <p:sp>
-        <p:nvSpPr>
-          <p:cNvPr id="6" name="TextBox 5"/>
+              <a:rPr sz="1100" b="1" i="0">
+                <a:solidFill>
+                  <a:srgbClr val="D8E2F0"/>
+                </a:solidFill>
+                <a:latin typeface="Inter"/>
+              </a:rPr>
+              <a:t>Phase 3 Final Submission   ·   Guidewire DEVTrails 2026</a:t>
+            </a:r>
+          </a:p>
+        </p:txBody>
+      </p:sp>
+      <p:sp>
+        <p:nvSpPr>
+          <p:cNvPr id="7" name="TextBox 6"/>
           <p:cNvSpPr txBox="1"/>
           <p:nvPr/>
         </p:nvSpPr>
@@ -6124,7 +6114,7 @@
       </p:sp>
       <p:sp>
         <p:nvSpPr>
-          <p:cNvPr id="7" name="Rectangle 6"/>
+          <p:cNvPr id="8" name="Rectangle 7"/>
           <p:cNvSpPr/>
           <p:nvPr/>
         </p:nvSpPr>
@@ -6168,7 +6158,7 @@
       </p:sp>
       <p:sp>
         <p:nvSpPr>
-          <p:cNvPr id="8" name="TextBox 7"/>
+          <p:cNvPr id="9" name="TextBox 8"/>
           <p:cNvSpPr txBox="1"/>
           <p:nvPr/>
         </p:nvSpPr>
@@ -6207,7 +6197,7 @@
       </p:sp>
       <p:sp>
         <p:nvSpPr>
-          <p:cNvPr id="9" name="Rounded Rectangle 8"/>
+          <p:cNvPr id="10" name="Rounded Rectangle 9"/>
           <p:cNvSpPr/>
           <p:nvPr/>
         </p:nvSpPr>
@@ -6252,7 +6242,7 @@
       </p:sp>
       <p:sp>
         <p:nvSpPr>
-          <p:cNvPr id="10" name="TextBox 9"/>
+          <p:cNvPr id="11" name="TextBox 10"/>
           <p:cNvSpPr txBox="1"/>
           <p:nvPr/>
         </p:nvSpPr>
@@ -6291,7 +6281,7 @@
       </p:sp>
       <p:sp>
         <p:nvSpPr>
-          <p:cNvPr id="11" name="Rectangle 10"/>
+          <p:cNvPr id="12" name="Rectangle 11"/>
           <p:cNvSpPr/>
           <p:nvPr/>
         </p:nvSpPr>
@@ -6335,7 +6325,7 @@
       </p:sp>
       <p:sp>
         <p:nvSpPr>
-          <p:cNvPr id="12" name="TextBox 11"/>
+          <p:cNvPr id="13" name="TextBox 12"/>
           <p:cNvSpPr txBox="1"/>
           <p:nvPr/>
         </p:nvSpPr>
@@ -6374,7 +6364,7 @@
       </p:sp>
       <p:sp>
         <p:nvSpPr>
-          <p:cNvPr id="13" name="TextBox 12"/>
+          <p:cNvPr id="14" name="TextBox 13"/>
           <p:cNvSpPr txBox="1"/>
           <p:nvPr/>
         </p:nvSpPr>
@@ -6431,7 +6421,7 @@
       </p:sp>
       <p:sp>
         <p:nvSpPr>
-          <p:cNvPr id="14" name="TextBox 13"/>
+          <p:cNvPr id="15" name="TextBox 14"/>
           <p:cNvSpPr txBox="1"/>
           <p:nvPr/>
         </p:nvSpPr>
@@ -6470,7 +6460,7 @@
       </p:sp>
       <p:sp>
         <p:nvSpPr>
-          <p:cNvPr id="15" name="Rectangle 14"/>
+          <p:cNvPr id="16" name="Rectangle 15"/>
           <p:cNvSpPr/>
           <p:nvPr/>
         </p:nvSpPr>
@@ -6514,7 +6504,7 @@
       </p:sp>
       <p:sp>
         <p:nvSpPr>
-          <p:cNvPr id="16" name="Rectangle 15"/>
+          <p:cNvPr id="17" name="Rectangle 16"/>
           <p:cNvSpPr/>
           <p:nvPr/>
         </p:nvSpPr>
@@ -6560,7 +6550,7 @@
       </p:sp>
       <p:sp>
         <p:nvSpPr>
-          <p:cNvPr id="17" name="TextBox 16"/>
+          <p:cNvPr id="18" name="TextBox 17"/>
           <p:cNvSpPr txBox="1"/>
           <p:nvPr/>
         </p:nvSpPr>
@@ -6599,7 +6589,7 @@
       </p:sp>
       <p:sp>
         <p:nvSpPr>
-          <p:cNvPr id="18" name="TextBox 17"/>
+          <p:cNvPr id="19" name="TextBox 18"/>
           <p:cNvSpPr txBox="1"/>
           <p:nvPr/>
         </p:nvSpPr>
@@ -6638,7 +6628,7 @@
       </p:sp>
       <p:sp>
         <p:nvSpPr>
-          <p:cNvPr id="19" name="Rectangle 18"/>
+          <p:cNvPr id="20" name="Rectangle 19"/>
           <p:cNvSpPr/>
           <p:nvPr/>
         </p:nvSpPr>
@@ -6682,7 +6672,7 @@
       </p:sp>
       <p:sp>
         <p:nvSpPr>
-          <p:cNvPr id="20" name="Rectangle 19"/>
+          <p:cNvPr id="21" name="Rectangle 20"/>
           <p:cNvSpPr/>
           <p:nvPr/>
         </p:nvSpPr>
@@ -6728,7 +6718,7 @@
       </p:sp>
       <p:sp>
         <p:nvSpPr>
-          <p:cNvPr id="21" name="TextBox 20"/>
+          <p:cNvPr id="22" name="TextBox 21"/>
           <p:cNvSpPr txBox="1"/>
           <p:nvPr/>
         </p:nvSpPr>
@@ -6767,7 +6757,7 @@
       </p:sp>
       <p:sp>
         <p:nvSpPr>
-          <p:cNvPr id="22" name="TextBox 21"/>
+          <p:cNvPr id="23" name="TextBox 22"/>
           <p:cNvSpPr txBox="1"/>
           <p:nvPr/>
         </p:nvSpPr>
@@ -6806,7 +6796,7 @@
       </p:sp>
       <p:sp>
         <p:nvSpPr>
-          <p:cNvPr id="23" name="Rectangle 22"/>
+          <p:cNvPr id="24" name="Rectangle 23"/>
           <p:cNvSpPr/>
           <p:nvPr/>
         </p:nvSpPr>
@@ -6850,7 +6840,7 @@
       </p:sp>
       <p:sp>
         <p:nvSpPr>
-          <p:cNvPr id="24" name="Rectangle 23"/>
+          <p:cNvPr id="25" name="Rectangle 24"/>
           <p:cNvSpPr/>
           <p:nvPr/>
         </p:nvSpPr>
@@ -6896,7 +6886,7 @@
       </p:sp>
       <p:sp>
         <p:nvSpPr>
-          <p:cNvPr id="25" name="TextBox 24"/>
+          <p:cNvPr id="26" name="TextBox 25"/>
           <p:cNvSpPr txBox="1"/>
           <p:nvPr/>
         </p:nvSpPr>
@@ -6935,7 +6925,7 @@
       </p:sp>
       <p:sp>
         <p:nvSpPr>
-          <p:cNvPr id="26" name="TextBox 25"/>
+          <p:cNvPr id="27" name="TextBox 26"/>
           <p:cNvSpPr txBox="1"/>
           <p:nvPr/>
         </p:nvSpPr>
@@ -6974,7 +6964,7 @@
       </p:sp>
       <p:sp>
         <p:nvSpPr>
-          <p:cNvPr id="27" name="Rectangle 26"/>
+          <p:cNvPr id="28" name="Rectangle 27"/>
           <p:cNvSpPr/>
           <p:nvPr/>
         </p:nvSpPr>
@@ -7018,7 +7008,7 @@
       </p:sp>
       <p:sp>
         <p:nvSpPr>
-          <p:cNvPr id="28" name="Rectangle 27"/>
+          <p:cNvPr id="29" name="Rectangle 28"/>
           <p:cNvSpPr/>
           <p:nvPr/>
         </p:nvSpPr>
@@ -7064,7 +7054,7 @@
       </p:sp>
       <p:sp>
         <p:nvSpPr>
-          <p:cNvPr id="29" name="TextBox 28"/>
+          <p:cNvPr id="30" name="TextBox 29"/>
           <p:cNvSpPr txBox="1"/>
           <p:nvPr/>
         </p:nvSpPr>
@@ -7103,7 +7093,7 @@
       </p:sp>
       <p:sp>
         <p:nvSpPr>
-          <p:cNvPr id="30" name="TextBox 29"/>
+          <p:cNvPr id="31" name="TextBox 30"/>
           <p:cNvSpPr txBox="1"/>
           <p:nvPr/>
         </p:nvSpPr>
@@ -7142,7 +7132,7 @@
       </p:sp>
       <p:sp>
         <p:nvSpPr>
-          <p:cNvPr id="31" name="Rectangle 30"/>
+          <p:cNvPr id="32" name="Rectangle 31"/>
           <p:cNvSpPr/>
           <p:nvPr/>
         </p:nvSpPr>
@@ -7186,7 +7176,7 @@
       </p:sp>
       <p:sp>
         <p:nvSpPr>
-          <p:cNvPr id="32" name="Rectangle 31"/>
+          <p:cNvPr id="33" name="Rectangle 32"/>
           <p:cNvSpPr/>
           <p:nvPr/>
         </p:nvSpPr>
@@ -7232,7 +7222,7 @@
       </p:sp>
       <p:sp>
         <p:nvSpPr>
-          <p:cNvPr id="33" name="TextBox 32"/>
+          <p:cNvPr id="34" name="TextBox 33"/>
           <p:cNvSpPr txBox="1"/>
           <p:nvPr/>
         </p:nvSpPr>
@@ -7271,7 +7261,7 @@
       </p:sp>
       <p:sp>
         <p:nvSpPr>
-          <p:cNvPr id="34" name="TextBox 33"/>
+          <p:cNvPr id="35" name="TextBox 34"/>
           <p:cNvSpPr txBox="1"/>
           <p:nvPr/>
         </p:nvSpPr>
@@ -7310,7 +7300,7 @@
       </p:sp>
       <p:sp>
         <p:nvSpPr>
-          <p:cNvPr id="35" name="Rectangle 34"/>
+          <p:cNvPr id="36" name="Rectangle 35"/>
           <p:cNvSpPr/>
           <p:nvPr/>
         </p:nvSpPr>
@@ -7354,7 +7344,7 @@
       </p:sp>
       <p:sp>
         <p:nvSpPr>
-          <p:cNvPr id="36" name="Rectangle 35"/>
+          <p:cNvPr id="37" name="Rectangle 36"/>
           <p:cNvSpPr/>
           <p:nvPr/>
         </p:nvSpPr>
@@ -7400,7 +7390,7 @@
       </p:sp>
       <p:sp>
         <p:nvSpPr>
-          <p:cNvPr id="37" name="TextBox 36"/>
+          <p:cNvPr id="38" name="TextBox 37"/>
           <p:cNvSpPr txBox="1"/>
           <p:nvPr/>
         </p:nvSpPr>
@@ -7439,7 +7429,7 @@
       </p:sp>
       <p:sp>
         <p:nvSpPr>
-          <p:cNvPr id="38" name="TextBox 37"/>
+          <p:cNvPr id="39" name="TextBox 38"/>
           <p:cNvSpPr txBox="1"/>
           <p:nvPr/>
         </p:nvSpPr>
@@ -7478,7 +7468,7 @@
       </p:sp>
       <p:sp>
         <p:nvSpPr>
-          <p:cNvPr id="39" name="Rectangle 38"/>
+          <p:cNvPr id="40" name="Rectangle 39"/>
           <p:cNvSpPr/>
           <p:nvPr/>
         </p:nvSpPr>
@@ -7522,7 +7512,7 @@
       </p:sp>
       <p:sp>
         <p:nvSpPr>
-          <p:cNvPr id="40" name="Rectangle 39"/>
+          <p:cNvPr id="41" name="Rectangle 40"/>
           <p:cNvSpPr/>
           <p:nvPr/>
         </p:nvSpPr>
@@ -7568,7 +7558,7 @@
       </p:sp>
       <p:sp>
         <p:nvSpPr>
-          <p:cNvPr id="41" name="TextBox 40"/>
+          <p:cNvPr id="42" name="TextBox 41"/>
           <p:cNvSpPr txBox="1"/>
           <p:nvPr/>
         </p:nvSpPr>
@@ -7607,7 +7597,7 @@
       </p:sp>
       <p:sp>
         <p:nvSpPr>
-          <p:cNvPr id="42" name="TextBox 41"/>
+          <p:cNvPr id="43" name="TextBox 42"/>
           <p:cNvSpPr txBox="1"/>
           <p:nvPr/>
         </p:nvSpPr>
@@ -7646,7 +7636,7 @@
       </p:sp>
       <p:sp>
         <p:nvSpPr>
-          <p:cNvPr id="43" name="Rectangle 42"/>
+          <p:cNvPr id="44" name="Rectangle 43"/>
           <p:cNvSpPr/>
           <p:nvPr/>
         </p:nvSpPr>
@@ -7690,7 +7680,7 @@
       </p:sp>
       <p:sp>
         <p:nvSpPr>
-          <p:cNvPr id="44" name="Rectangle 43"/>
+          <p:cNvPr id="45" name="Rectangle 44"/>
           <p:cNvSpPr/>
           <p:nvPr/>
         </p:nvSpPr>
@@ -7736,7 +7726,7 @@
       </p:sp>
       <p:sp>
         <p:nvSpPr>
-          <p:cNvPr id="45" name="TextBox 44"/>
+          <p:cNvPr id="46" name="TextBox 45"/>
           <p:cNvSpPr txBox="1"/>
           <p:nvPr/>
         </p:nvSpPr>
@@ -7775,7 +7765,7 @@
       </p:sp>
       <p:sp>
         <p:nvSpPr>
-          <p:cNvPr id="46" name="TextBox 45"/>
+          <p:cNvPr id="47" name="TextBox 46"/>
           <p:cNvSpPr txBox="1"/>
           <p:nvPr/>
         </p:nvSpPr>
@@ -7814,7 +7804,7 @@
       </p:sp>
       <p:sp>
         <p:nvSpPr>
-          <p:cNvPr id="47" name="Rectangle 46"/>
+          <p:cNvPr id="48" name="Rectangle 47"/>
           <p:cNvSpPr/>
           <p:nvPr/>
         </p:nvSpPr>
@@ -7858,7 +7848,7 @@
       </p:sp>
       <p:sp>
         <p:nvSpPr>
-          <p:cNvPr id="48" name="Rectangle 47"/>
+          <p:cNvPr id="49" name="Rectangle 48"/>
           <p:cNvSpPr/>
           <p:nvPr/>
         </p:nvSpPr>
@@ -7904,7 +7894,7 @@
       </p:sp>
       <p:sp>
         <p:nvSpPr>
-          <p:cNvPr id="49" name="TextBox 48"/>
+          <p:cNvPr id="50" name="TextBox 49"/>
           <p:cNvSpPr txBox="1"/>
           <p:nvPr/>
         </p:nvSpPr>
@@ -7943,7 +7933,7 @@
       </p:sp>
       <p:sp>
         <p:nvSpPr>
-          <p:cNvPr id="50" name="TextBox 49"/>
+          <p:cNvPr id="51" name="TextBox 50"/>
           <p:cNvSpPr txBox="1"/>
           <p:nvPr/>
         </p:nvSpPr>
@@ -7982,7 +7972,7 @@
       </p:sp>
       <p:sp>
         <p:nvSpPr>
-          <p:cNvPr id="51" name="Rectangle 50"/>
+          <p:cNvPr id="52" name="Rectangle 51"/>
           <p:cNvSpPr/>
           <p:nvPr/>
         </p:nvSpPr>
@@ -8026,7 +8016,7 @@
       </p:sp>
       <p:sp>
         <p:nvSpPr>
-          <p:cNvPr id="52" name="Rectangle 51"/>
+          <p:cNvPr id="53" name="Rectangle 52"/>
           <p:cNvSpPr/>
           <p:nvPr/>
         </p:nvSpPr>
@@ -8072,7 +8062,7 @@
       </p:sp>
       <p:sp>
         <p:nvSpPr>
-          <p:cNvPr id="53" name="TextBox 52"/>
+          <p:cNvPr id="54" name="TextBox 53"/>
           <p:cNvSpPr txBox="1"/>
           <p:nvPr/>
         </p:nvSpPr>
@@ -8111,7 +8101,7 @@
       </p:sp>
       <p:sp>
         <p:nvSpPr>
-          <p:cNvPr id="54" name="TextBox 53"/>
+          <p:cNvPr id="55" name="TextBox 54"/>
           <p:cNvSpPr txBox="1"/>
           <p:nvPr/>
         </p:nvSpPr>
@@ -8150,7 +8140,7 @@
       </p:sp>
       <p:sp>
         <p:nvSpPr>
-          <p:cNvPr id="55" name="Rectangle 54"/>
+          <p:cNvPr id="56" name="Rectangle 55"/>
           <p:cNvSpPr/>
           <p:nvPr/>
         </p:nvSpPr>
@@ -8194,7 +8184,7 @@
       </p:sp>
       <p:sp>
         <p:nvSpPr>
-          <p:cNvPr id="56" name="Rectangle 55"/>
+          <p:cNvPr id="57" name="Rectangle 56"/>
           <p:cNvSpPr/>
           <p:nvPr/>
         </p:nvSpPr>
@@ -8240,7 +8230,7 @@
       </p:sp>
       <p:sp>
         <p:nvSpPr>
-          <p:cNvPr id="57" name="TextBox 56"/>
+          <p:cNvPr id="58" name="TextBox 57"/>
           <p:cNvSpPr txBox="1"/>
           <p:nvPr/>
         </p:nvSpPr>
@@ -8279,7 +8269,7 @@
       </p:sp>
       <p:sp>
         <p:nvSpPr>
-          <p:cNvPr id="58" name="TextBox 57"/>
+          <p:cNvPr id="59" name="TextBox 58"/>
           <p:cNvSpPr txBox="1"/>
           <p:nvPr/>
         </p:nvSpPr>
@@ -8318,7 +8308,7 @@
       </p:sp>
       <p:sp>
         <p:nvSpPr>
-          <p:cNvPr id="59" name="Rectangle 58"/>
+          <p:cNvPr id="60" name="Rectangle 59"/>
           <p:cNvSpPr/>
           <p:nvPr/>
         </p:nvSpPr>
@@ -8362,7 +8352,7 @@
       </p:sp>
       <p:sp>
         <p:nvSpPr>
-          <p:cNvPr id="60" name="Rectangle 59"/>
+          <p:cNvPr id="61" name="Rectangle 60"/>
           <p:cNvSpPr/>
           <p:nvPr/>
         </p:nvSpPr>
@@ -8406,7 +8396,7 @@
       </p:sp>
       <p:sp>
         <p:nvSpPr>
-          <p:cNvPr id="61" name="TextBox 60"/>
+          <p:cNvPr id="62" name="TextBox 61"/>
           <p:cNvSpPr txBox="1"/>
           <p:nvPr/>
         </p:nvSpPr>
@@ -8445,7 +8435,7 @@
       </p:sp>
       <p:sp>
         <p:nvSpPr>
-          <p:cNvPr id="62" name="TextBox 61"/>
+          <p:cNvPr id="63" name="TextBox 62"/>
           <p:cNvSpPr txBox="1"/>
           <p:nvPr/>
         </p:nvSpPr>
@@ -8516,7 +8506,7 @@
       </p:sp>
       <p:sp>
         <p:nvSpPr>
-          <p:cNvPr id="63" name="TextBox 62"/>
+          <p:cNvPr id="64" name="TextBox 63"/>
           <p:cNvSpPr txBox="1"/>
           <p:nvPr/>
         </p:nvSpPr>
@@ -8659,16 +8649,40 @@
           </a:p>
         </p:txBody>
       </p:sp>
-      <p:sp>
-        <p:nvSpPr>
-          <p:cNvPr id="4" name="Rectangle 3"/>
+      <p:pic>
+        <p:nvPicPr>
+          <p:cNvPr id="4" name="Picture 3" descr="gigshield-dark.png"/>
+          <p:cNvPicPr>
+            <a:picLocks noChangeAspect="1"/>
+          </p:cNvPicPr>
+          <p:nvPr/>
+        </p:nvPicPr>
+        <p:blipFill>
+          <a:blip r:embed="rId2"/>
+          <a:stretch>
+            <a:fillRect/>
+          </a:stretch>
+        </p:blipFill>
+        <p:spPr>
+          <a:xfrm>
+            <a:off x="320040" y="54864"/>
+            <a:ext cx="443132" cy="411480"/>
+          </a:xfrm>
+          <a:prstGeom prst="rect">
+            <a:avLst/>
+          </a:prstGeom>
+        </p:spPr>
+      </p:pic>
+      <p:sp>
+        <p:nvSpPr>
+          <p:cNvPr id="5" name="Rectangle 4"/>
           <p:cNvSpPr/>
           <p:nvPr/>
         </p:nvSpPr>
         <p:spPr>
           <a:xfrm>
-            <a:off x="411480" y="201168"/>
-            <a:ext cx="91440" cy="91440"/>
+            <a:off x="1691640" y="164592"/>
+            <a:ext cx="18288" cy="182880"/>
           </a:xfrm>
           <a:prstGeom prst="rect">
             <a:avLst/>
@@ -8679,6 +8693,7 @@
           <a:ln>
             <a:noFill/>
           </a:ln>
+          <a:effectLst/>
         </p:spPr>
         <p:style>
           <a:lnRef idx="1">
@@ -8704,13 +8719,13 @@
       </p:sp>
       <p:sp>
         <p:nvSpPr>
-          <p:cNvPr id="5" name="TextBox 4"/>
-          <p:cNvSpPr txBox="1"/>
-          <p:nvPr/>
-        </p:nvSpPr>
-        <p:spPr>
-          <a:xfrm>
-            <a:off x="594360" y="118872"/>
+          <p:cNvPr id="6" name="TextBox 5"/>
+          <p:cNvSpPr txBox="1"/>
+          <p:nvPr/>
+        </p:nvSpPr>
+        <p:spPr>
+          <a:xfrm>
+            <a:off x="1783080" y="118872"/>
             <a:ext cx="7315200" cy="274320"/>
           </a:xfrm>
           <a:prstGeom prst="rect">
@@ -8730,20 +8745,20 @@
               </a:lnSpc>
             </a:pPr>
             <a:r>
-              <a:rPr sz="1200" b="1" i="0">
-                <a:solidFill>
-                  <a:srgbClr val="FFFFFF"/>
-                </a:solidFill>
-                <a:latin typeface="Inter"/>
-              </a:rPr>
-              <a:t>GigShield   |   Phase 3 Final Submission</a:t>
-            </a:r>
-          </a:p>
-        </p:txBody>
-      </p:sp>
-      <p:sp>
-        <p:nvSpPr>
-          <p:cNvPr id="6" name="TextBox 5"/>
+              <a:rPr sz="1100" b="1" i="0">
+                <a:solidFill>
+                  <a:srgbClr val="D8E2F0"/>
+                </a:solidFill>
+                <a:latin typeface="Inter"/>
+              </a:rPr>
+              <a:t>Phase 3 Final Submission   ·   Guidewire DEVTrails 2026</a:t>
+            </a:r>
+          </a:p>
+        </p:txBody>
+      </p:sp>
+      <p:sp>
+        <p:nvSpPr>
+          <p:cNvPr id="7" name="TextBox 6"/>
           <p:cNvSpPr txBox="1"/>
           <p:nvPr/>
         </p:nvSpPr>
@@ -8782,7 +8797,7 @@
       </p:sp>
       <p:sp>
         <p:nvSpPr>
-          <p:cNvPr id="7" name="Rectangle 6"/>
+          <p:cNvPr id="8" name="Rectangle 7"/>
           <p:cNvSpPr/>
           <p:nvPr/>
         </p:nvSpPr>
@@ -8826,7 +8841,7 @@
       </p:sp>
       <p:sp>
         <p:nvSpPr>
-          <p:cNvPr id="8" name="TextBox 7"/>
+          <p:cNvPr id="9" name="TextBox 8"/>
           <p:cNvSpPr txBox="1"/>
           <p:nvPr/>
         </p:nvSpPr>
@@ -8865,7 +8880,7 @@
       </p:sp>
       <p:sp>
         <p:nvSpPr>
-          <p:cNvPr id="9" name="Rounded Rectangle 8"/>
+          <p:cNvPr id="10" name="Rounded Rectangle 9"/>
           <p:cNvSpPr/>
           <p:nvPr/>
         </p:nvSpPr>
@@ -8910,7 +8925,7 @@
       </p:sp>
       <p:sp>
         <p:nvSpPr>
-          <p:cNvPr id="10" name="TextBox 9"/>
+          <p:cNvPr id="11" name="TextBox 10"/>
           <p:cNvSpPr txBox="1"/>
           <p:nvPr/>
         </p:nvSpPr>
@@ -8949,7 +8964,7 @@
       </p:sp>
       <p:sp>
         <p:nvSpPr>
-          <p:cNvPr id="11" name="Rectangle 10"/>
+          <p:cNvPr id="12" name="Rectangle 11"/>
           <p:cNvSpPr/>
           <p:nvPr/>
         </p:nvSpPr>
@@ -8993,7 +9008,7 @@
       </p:sp>
       <p:sp>
         <p:nvSpPr>
-          <p:cNvPr id="12" name="TextBox 11"/>
+          <p:cNvPr id="13" name="TextBox 12"/>
           <p:cNvSpPr txBox="1"/>
           <p:nvPr/>
         </p:nvSpPr>
@@ -9032,7 +9047,7 @@
       </p:sp>
       <p:sp>
         <p:nvSpPr>
-          <p:cNvPr id="13" name="TextBox 12"/>
+          <p:cNvPr id="14" name="TextBox 13"/>
           <p:cNvSpPr txBox="1"/>
           <p:nvPr/>
         </p:nvSpPr>
@@ -9089,7 +9104,7 @@
       </p:sp>
       <p:sp>
         <p:nvSpPr>
-          <p:cNvPr id="14" name="TextBox 13"/>
+          <p:cNvPr id="15" name="TextBox 14"/>
           <p:cNvSpPr txBox="1"/>
           <p:nvPr/>
         </p:nvSpPr>
@@ -9128,7 +9143,7 @@
       </p:sp>
       <p:sp>
         <p:nvSpPr>
-          <p:cNvPr id="15" name="Rectangle 14"/>
+          <p:cNvPr id="16" name="Rectangle 15"/>
           <p:cNvSpPr/>
           <p:nvPr/>
         </p:nvSpPr>
@@ -9172,7 +9187,7 @@
       </p:sp>
       <p:sp>
         <p:nvSpPr>
-          <p:cNvPr id="16" name="Rounded Rectangle 15"/>
+          <p:cNvPr id="17" name="Rounded Rectangle 16"/>
           <p:cNvSpPr/>
           <p:nvPr/>
         </p:nvSpPr>
@@ -9217,7 +9232,7 @@
       </p:sp>
       <p:sp>
         <p:nvSpPr>
-          <p:cNvPr id="17" name="TextBox 16"/>
+          <p:cNvPr id="18" name="TextBox 17"/>
           <p:cNvSpPr txBox="1"/>
           <p:nvPr/>
         </p:nvSpPr>
@@ -9256,7 +9271,7 @@
       </p:sp>
       <p:sp>
         <p:nvSpPr>
-          <p:cNvPr id="18" name="TextBox 17"/>
+          <p:cNvPr id="19" name="TextBox 18"/>
           <p:cNvSpPr txBox="1"/>
           <p:nvPr/>
         </p:nvSpPr>
@@ -9304,7 +9319,7 @@
       </p:sp>
       <p:sp>
         <p:nvSpPr>
-          <p:cNvPr id="19" name="Rectangle 18"/>
+          <p:cNvPr id="20" name="Rectangle 19"/>
           <p:cNvSpPr/>
           <p:nvPr/>
         </p:nvSpPr>
@@ -9348,7 +9363,7 @@
       </p:sp>
       <p:sp>
         <p:nvSpPr>
-          <p:cNvPr id="20" name="Rounded Rectangle 19"/>
+          <p:cNvPr id="21" name="Rounded Rectangle 20"/>
           <p:cNvSpPr/>
           <p:nvPr/>
         </p:nvSpPr>
@@ -9393,7 +9408,7 @@
       </p:sp>
       <p:sp>
         <p:nvSpPr>
-          <p:cNvPr id="21" name="TextBox 20"/>
+          <p:cNvPr id="22" name="TextBox 21"/>
           <p:cNvSpPr txBox="1"/>
           <p:nvPr/>
         </p:nvSpPr>
@@ -9432,7 +9447,7 @@
       </p:sp>
       <p:sp>
         <p:nvSpPr>
-          <p:cNvPr id="22" name="TextBox 21"/>
+          <p:cNvPr id="23" name="TextBox 22"/>
           <p:cNvSpPr txBox="1"/>
           <p:nvPr/>
         </p:nvSpPr>
@@ -9480,7 +9495,7 @@
       </p:sp>
       <p:sp>
         <p:nvSpPr>
-          <p:cNvPr id="23" name="Rectangle 22"/>
+          <p:cNvPr id="24" name="Rectangle 23"/>
           <p:cNvSpPr/>
           <p:nvPr/>
         </p:nvSpPr>
@@ -9524,7 +9539,7 @@
       </p:sp>
       <p:sp>
         <p:nvSpPr>
-          <p:cNvPr id="24" name="Rounded Rectangle 23"/>
+          <p:cNvPr id="25" name="Rounded Rectangle 24"/>
           <p:cNvSpPr/>
           <p:nvPr/>
         </p:nvSpPr>
@@ -9569,7 +9584,7 @@
       </p:sp>
       <p:sp>
         <p:nvSpPr>
-          <p:cNvPr id="25" name="TextBox 24"/>
+          <p:cNvPr id="26" name="TextBox 25"/>
           <p:cNvSpPr txBox="1"/>
           <p:nvPr/>
         </p:nvSpPr>
@@ -9608,7 +9623,7 @@
       </p:sp>
       <p:sp>
         <p:nvSpPr>
-          <p:cNvPr id="26" name="TextBox 25"/>
+          <p:cNvPr id="27" name="TextBox 26"/>
           <p:cNvSpPr txBox="1"/>
           <p:nvPr/>
         </p:nvSpPr>
@@ -9656,7 +9671,7 @@
       </p:sp>
       <p:sp>
         <p:nvSpPr>
-          <p:cNvPr id="27" name="Rectangle 26"/>
+          <p:cNvPr id="28" name="Rectangle 27"/>
           <p:cNvSpPr/>
           <p:nvPr/>
         </p:nvSpPr>
@@ -9700,7 +9715,7 @@
       </p:sp>
       <p:sp>
         <p:nvSpPr>
-          <p:cNvPr id="28" name="Rounded Rectangle 27"/>
+          <p:cNvPr id="29" name="Rounded Rectangle 28"/>
           <p:cNvSpPr/>
           <p:nvPr/>
         </p:nvSpPr>
@@ -9745,7 +9760,7 @@
       </p:sp>
       <p:sp>
         <p:nvSpPr>
-          <p:cNvPr id="29" name="TextBox 28"/>
+          <p:cNvPr id="30" name="TextBox 29"/>
           <p:cNvSpPr txBox="1"/>
           <p:nvPr/>
         </p:nvSpPr>
@@ -9784,7 +9799,7 @@
       </p:sp>
       <p:sp>
         <p:nvSpPr>
-          <p:cNvPr id="30" name="TextBox 29"/>
+          <p:cNvPr id="31" name="TextBox 30"/>
           <p:cNvSpPr txBox="1"/>
           <p:nvPr/>
         </p:nvSpPr>
@@ -9832,7 +9847,7 @@
       </p:sp>
       <p:sp>
         <p:nvSpPr>
-          <p:cNvPr id="31" name="Rectangle 30"/>
+          <p:cNvPr id="32" name="Rectangle 31"/>
           <p:cNvSpPr/>
           <p:nvPr/>
         </p:nvSpPr>
@@ -9876,7 +9891,7 @@
       </p:sp>
       <p:sp>
         <p:nvSpPr>
-          <p:cNvPr id="32" name="Rounded Rectangle 31"/>
+          <p:cNvPr id="33" name="Rounded Rectangle 32"/>
           <p:cNvSpPr/>
           <p:nvPr/>
         </p:nvSpPr>
@@ -9921,7 +9936,7 @@
       </p:sp>
       <p:sp>
         <p:nvSpPr>
-          <p:cNvPr id="33" name="TextBox 32"/>
+          <p:cNvPr id="34" name="TextBox 33"/>
           <p:cNvSpPr txBox="1"/>
           <p:nvPr/>
         </p:nvSpPr>
@@ -9960,7 +9975,7 @@
       </p:sp>
       <p:sp>
         <p:nvSpPr>
-          <p:cNvPr id="34" name="TextBox 33"/>
+          <p:cNvPr id="35" name="TextBox 34"/>
           <p:cNvSpPr txBox="1"/>
           <p:nvPr/>
         </p:nvSpPr>
@@ -10008,7 +10023,7 @@
       </p:sp>
       <p:sp>
         <p:nvSpPr>
-          <p:cNvPr id="35" name="Rectangle 34"/>
+          <p:cNvPr id="36" name="Rectangle 35"/>
           <p:cNvSpPr/>
           <p:nvPr/>
         </p:nvSpPr>
@@ -10052,7 +10067,7 @@
       </p:sp>
       <p:sp>
         <p:nvSpPr>
-          <p:cNvPr id="36" name="Rounded Rectangle 35"/>
+          <p:cNvPr id="37" name="Rounded Rectangle 36"/>
           <p:cNvSpPr/>
           <p:nvPr/>
         </p:nvSpPr>
@@ -10097,7 +10112,7 @@
       </p:sp>
       <p:sp>
         <p:nvSpPr>
-          <p:cNvPr id="37" name="TextBox 36"/>
+          <p:cNvPr id="38" name="TextBox 37"/>
           <p:cNvSpPr txBox="1"/>
           <p:nvPr/>
         </p:nvSpPr>
@@ -10136,7 +10151,7 @@
       </p:sp>
       <p:sp>
         <p:nvSpPr>
-          <p:cNvPr id="38" name="TextBox 37"/>
+          <p:cNvPr id="39" name="TextBox 38"/>
           <p:cNvSpPr txBox="1"/>
           <p:nvPr/>
         </p:nvSpPr>
@@ -10184,7 +10199,7 @@
       </p:sp>
       <p:sp>
         <p:nvSpPr>
-          <p:cNvPr id="39" name="TextBox 38"/>
+          <p:cNvPr id="40" name="TextBox 39"/>
           <p:cNvSpPr txBox="1"/>
           <p:nvPr/>
         </p:nvSpPr>
@@ -10223,7 +10238,7 @@
       </p:sp>
       <p:sp>
         <p:nvSpPr>
-          <p:cNvPr id="40" name="Rectangle 39"/>
+          <p:cNvPr id="41" name="Rectangle 40"/>
           <p:cNvSpPr/>
           <p:nvPr/>
         </p:nvSpPr>
@@ -10267,7 +10282,7 @@
       </p:sp>
       <p:sp>
         <p:nvSpPr>
-          <p:cNvPr id="41" name="Rectangle 40"/>
+          <p:cNvPr id="42" name="Rectangle 41"/>
           <p:cNvSpPr/>
           <p:nvPr/>
         </p:nvSpPr>
@@ -10311,7 +10326,7 @@
       </p:sp>
       <p:sp>
         <p:nvSpPr>
-          <p:cNvPr id="42" name="TextBox 41"/>
+          <p:cNvPr id="43" name="TextBox 42"/>
           <p:cNvSpPr txBox="1"/>
           <p:nvPr/>
         </p:nvSpPr>
@@ -10606,7 +10621,7 @@
       </p:sp>
       <p:sp>
         <p:nvSpPr>
-          <p:cNvPr id="43" name="Rectangle 42"/>
+          <p:cNvPr id="44" name="Rectangle 43"/>
           <p:cNvSpPr/>
           <p:nvPr/>
         </p:nvSpPr>
@@ -10650,7 +10665,7 @@
       </p:sp>
       <p:sp>
         <p:nvSpPr>
-          <p:cNvPr id="44" name="Rectangle 43"/>
+          <p:cNvPr id="45" name="Rectangle 44"/>
           <p:cNvSpPr/>
           <p:nvPr/>
         </p:nvSpPr>
@@ -10696,7 +10711,7 @@
       </p:sp>
       <p:sp>
         <p:nvSpPr>
-          <p:cNvPr id="45" name="TextBox 44"/>
+          <p:cNvPr id="46" name="TextBox 45"/>
           <p:cNvSpPr txBox="1"/>
           <p:nvPr/>
         </p:nvSpPr>
@@ -10839,16 +10854,40 @@
           </a:p>
         </p:txBody>
       </p:sp>
-      <p:sp>
-        <p:nvSpPr>
-          <p:cNvPr id="4" name="Rectangle 3"/>
+      <p:pic>
+        <p:nvPicPr>
+          <p:cNvPr id="4" name="Picture 3" descr="gigshield-dark.png"/>
+          <p:cNvPicPr>
+            <a:picLocks noChangeAspect="1"/>
+          </p:cNvPicPr>
+          <p:nvPr/>
+        </p:nvPicPr>
+        <p:blipFill>
+          <a:blip r:embed="rId2"/>
+          <a:stretch>
+            <a:fillRect/>
+          </a:stretch>
+        </p:blipFill>
+        <p:spPr>
+          <a:xfrm>
+            <a:off x="320040" y="54864"/>
+            <a:ext cx="443132" cy="411480"/>
+          </a:xfrm>
+          <a:prstGeom prst="rect">
+            <a:avLst/>
+          </a:prstGeom>
+        </p:spPr>
+      </p:pic>
+      <p:sp>
+        <p:nvSpPr>
+          <p:cNvPr id="5" name="Rectangle 4"/>
           <p:cNvSpPr/>
           <p:nvPr/>
         </p:nvSpPr>
         <p:spPr>
           <a:xfrm>
-            <a:off x="411480" y="201168"/>
-            <a:ext cx="91440" cy="91440"/>
+            <a:off x="1691640" y="164592"/>
+            <a:ext cx="18288" cy="182880"/>
           </a:xfrm>
           <a:prstGeom prst="rect">
             <a:avLst/>
@@ -10859,6 +10898,7 @@
           <a:ln>
             <a:noFill/>
           </a:ln>
+          <a:effectLst/>
         </p:spPr>
         <p:style>
           <a:lnRef idx="1">
@@ -10884,13 +10924,13 @@
       </p:sp>
       <p:sp>
         <p:nvSpPr>
-          <p:cNvPr id="5" name="TextBox 4"/>
-          <p:cNvSpPr txBox="1"/>
-          <p:nvPr/>
-        </p:nvSpPr>
-        <p:spPr>
-          <a:xfrm>
-            <a:off x="594360" y="118872"/>
+          <p:cNvPr id="6" name="TextBox 5"/>
+          <p:cNvSpPr txBox="1"/>
+          <p:nvPr/>
+        </p:nvSpPr>
+        <p:spPr>
+          <a:xfrm>
+            <a:off x="1783080" y="118872"/>
             <a:ext cx="7315200" cy="274320"/>
           </a:xfrm>
           <a:prstGeom prst="rect">
@@ -10910,20 +10950,20 @@
               </a:lnSpc>
             </a:pPr>
             <a:r>
-              <a:rPr sz="1200" b="1" i="0">
-                <a:solidFill>
-                  <a:srgbClr val="FFFFFF"/>
-                </a:solidFill>
-                <a:latin typeface="Inter"/>
-              </a:rPr>
-              <a:t>GigShield   |   Phase 3 Final Submission</a:t>
-            </a:r>
-          </a:p>
-        </p:txBody>
-      </p:sp>
-      <p:sp>
-        <p:nvSpPr>
-          <p:cNvPr id="6" name="TextBox 5"/>
+              <a:rPr sz="1100" b="1" i="0">
+                <a:solidFill>
+                  <a:srgbClr val="D8E2F0"/>
+                </a:solidFill>
+                <a:latin typeface="Inter"/>
+              </a:rPr>
+              <a:t>Phase 3 Final Submission   ·   Guidewire DEVTrails 2026</a:t>
+            </a:r>
+          </a:p>
+        </p:txBody>
+      </p:sp>
+      <p:sp>
+        <p:nvSpPr>
+          <p:cNvPr id="7" name="TextBox 6"/>
           <p:cNvSpPr txBox="1"/>
           <p:nvPr/>
         </p:nvSpPr>
@@ -10962,7 +11002,7 @@
       </p:sp>
       <p:sp>
         <p:nvSpPr>
-          <p:cNvPr id="7" name="Rectangle 6"/>
+          <p:cNvPr id="8" name="Rectangle 7"/>
           <p:cNvSpPr/>
           <p:nvPr/>
         </p:nvSpPr>
@@ -11006,7 +11046,7 @@
       </p:sp>
       <p:sp>
         <p:nvSpPr>
-          <p:cNvPr id="8" name="TextBox 7"/>
+          <p:cNvPr id="9" name="TextBox 8"/>
           <p:cNvSpPr txBox="1"/>
           <p:nvPr/>
         </p:nvSpPr>
@@ -11045,7 +11085,7 @@
       </p:sp>
       <p:sp>
         <p:nvSpPr>
-          <p:cNvPr id="9" name="Rounded Rectangle 8"/>
+          <p:cNvPr id="10" name="Rounded Rectangle 9"/>
           <p:cNvSpPr/>
           <p:nvPr/>
         </p:nvSpPr>
@@ -11090,7 +11130,7 @@
       </p:sp>
       <p:sp>
         <p:nvSpPr>
-          <p:cNvPr id="10" name="TextBox 9"/>
+          <p:cNvPr id="11" name="TextBox 10"/>
           <p:cNvSpPr txBox="1"/>
           <p:nvPr/>
         </p:nvSpPr>
@@ -11129,7 +11169,7 @@
       </p:sp>
       <p:sp>
         <p:nvSpPr>
-          <p:cNvPr id="11" name="Rectangle 10"/>
+          <p:cNvPr id="12" name="Rectangle 11"/>
           <p:cNvSpPr/>
           <p:nvPr/>
         </p:nvSpPr>
@@ -11173,7 +11213,7 @@
       </p:sp>
       <p:sp>
         <p:nvSpPr>
-          <p:cNvPr id="12" name="TextBox 11"/>
+          <p:cNvPr id="13" name="TextBox 12"/>
           <p:cNvSpPr txBox="1"/>
           <p:nvPr/>
         </p:nvSpPr>
@@ -11212,7 +11252,7 @@
       </p:sp>
       <p:sp>
         <p:nvSpPr>
-          <p:cNvPr id="13" name="TextBox 12"/>
+          <p:cNvPr id="14" name="TextBox 13"/>
           <p:cNvSpPr txBox="1"/>
           <p:nvPr/>
         </p:nvSpPr>
@@ -11285,7 +11325,7 @@
       </p:sp>
       <p:sp>
         <p:nvSpPr>
-          <p:cNvPr id="14" name="TextBox 13"/>
+          <p:cNvPr id="15" name="TextBox 14"/>
           <p:cNvSpPr txBox="1"/>
           <p:nvPr/>
         </p:nvSpPr>
@@ -11324,7 +11364,7 @@
       </p:sp>
       <p:sp>
         <p:nvSpPr>
-          <p:cNvPr id="15" name="Rectangle 14"/>
+          <p:cNvPr id="16" name="Rectangle 15"/>
           <p:cNvSpPr/>
           <p:nvPr/>
         </p:nvSpPr>
@@ -11368,7 +11408,7 @@
       </p:sp>
       <p:sp>
         <p:nvSpPr>
-          <p:cNvPr id="16" name="Oval 15"/>
+          <p:cNvPr id="17" name="Oval 16"/>
           <p:cNvSpPr/>
           <p:nvPr/>
         </p:nvSpPr>
@@ -11411,7 +11451,7 @@
       </p:sp>
       <p:sp>
         <p:nvSpPr>
-          <p:cNvPr id="17" name="TextBox 16"/>
+          <p:cNvPr id="18" name="TextBox 17"/>
           <p:cNvSpPr txBox="1"/>
           <p:nvPr/>
         </p:nvSpPr>
@@ -11450,7 +11490,7 @@
       </p:sp>
       <p:sp>
         <p:nvSpPr>
-          <p:cNvPr id="18" name="TextBox 17"/>
+          <p:cNvPr id="19" name="TextBox 18"/>
           <p:cNvSpPr txBox="1"/>
           <p:nvPr/>
         </p:nvSpPr>
@@ -11489,7 +11529,7 @@
       </p:sp>
       <p:sp>
         <p:nvSpPr>
-          <p:cNvPr id="19" name="TextBox 18"/>
+          <p:cNvPr id="20" name="TextBox 19"/>
           <p:cNvSpPr txBox="1"/>
           <p:nvPr/>
         </p:nvSpPr>
@@ -11528,7 +11568,7 @@
       </p:sp>
       <p:sp>
         <p:nvSpPr>
-          <p:cNvPr id="20" name="Oval 19"/>
+          <p:cNvPr id="21" name="Oval 20"/>
           <p:cNvSpPr/>
           <p:nvPr/>
         </p:nvSpPr>
@@ -11571,7 +11611,7 @@
       </p:sp>
       <p:sp>
         <p:nvSpPr>
-          <p:cNvPr id="21" name="TextBox 20"/>
+          <p:cNvPr id="22" name="TextBox 21"/>
           <p:cNvSpPr txBox="1"/>
           <p:nvPr/>
         </p:nvSpPr>
@@ -11610,7 +11650,7 @@
       </p:sp>
       <p:sp>
         <p:nvSpPr>
-          <p:cNvPr id="22" name="TextBox 21"/>
+          <p:cNvPr id="23" name="TextBox 22"/>
           <p:cNvSpPr txBox="1"/>
           <p:nvPr/>
         </p:nvSpPr>
@@ -11649,7 +11689,7 @@
       </p:sp>
       <p:sp>
         <p:nvSpPr>
-          <p:cNvPr id="23" name="TextBox 22"/>
+          <p:cNvPr id="24" name="TextBox 23"/>
           <p:cNvSpPr txBox="1"/>
           <p:nvPr/>
         </p:nvSpPr>
@@ -11688,7 +11728,7 @@
       </p:sp>
       <p:sp>
         <p:nvSpPr>
-          <p:cNvPr id="24" name="Oval 23"/>
+          <p:cNvPr id="25" name="Oval 24"/>
           <p:cNvSpPr/>
           <p:nvPr/>
         </p:nvSpPr>
@@ -11731,7 +11771,7 @@
       </p:sp>
       <p:sp>
         <p:nvSpPr>
-          <p:cNvPr id="25" name="TextBox 24"/>
+          <p:cNvPr id="26" name="TextBox 25"/>
           <p:cNvSpPr txBox="1"/>
           <p:nvPr/>
         </p:nvSpPr>
@@ -11770,7 +11810,7 @@
       </p:sp>
       <p:sp>
         <p:nvSpPr>
-          <p:cNvPr id="26" name="TextBox 25"/>
+          <p:cNvPr id="27" name="TextBox 26"/>
           <p:cNvSpPr txBox="1"/>
           <p:nvPr/>
         </p:nvSpPr>
@@ -11809,7 +11849,7 @@
       </p:sp>
       <p:sp>
         <p:nvSpPr>
-          <p:cNvPr id="27" name="TextBox 26"/>
+          <p:cNvPr id="28" name="TextBox 27"/>
           <p:cNvSpPr txBox="1"/>
           <p:nvPr/>
         </p:nvSpPr>
@@ -11848,7 +11888,7 @@
       </p:sp>
       <p:sp>
         <p:nvSpPr>
-          <p:cNvPr id="28" name="Oval 27"/>
+          <p:cNvPr id="29" name="Oval 28"/>
           <p:cNvSpPr/>
           <p:nvPr/>
         </p:nvSpPr>
@@ -11891,7 +11931,7 @@
       </p:sp>
       <p:sp>
         <p:nvSpPr>
-          <p:cNvPr id="29" name="TextBox 28"/>
+          <p:cNvPr id="30" name="TextBox 29"/>
           <p:cNvSpPr txBox="1"/>
           <p:nvPr/>
         </p:nvSpPr>
@@ -11930,7 +11970,7 @@
       </p:sp>
       <p:sp>
         <p:nvSpPr>
-          <p:cNvPr id="30" name="TextBox 29"/>
+          <p:cNvPr id="31" name="TextBox 30"/>
           <p:cNvSpPr txBox="1"/>
           <p:nvPr/>
         </p:nvSpPr>
@@ -11969,7 +12009,7 @@
       </p:sp>
       <p:sp>
         <p:nvSpPr>
-          <p:cNvPr id="31" name="TextBox 30"/>
+          <p:cNvPr id="32" name="TextBox 31"/>
           <p:cNvSpPr txBox="1"/>
           <p:nvPr/>
         </p:nvSpPr>
@@ -12008,7 +12048,7 @@
       </p:sp>
       <p:sp>
         <p:nvSpPr>
-          <p:cNvPr id="32" name="Rectangle 31"/>
+          <p:cNvPr id="33" name="Rectangle 32"/>
           <p:cNvSpPr/>
           <p:nvPr/>
         </p:nvSpPr>
@@ -12052,7 +12092,7 @@
       </p:sp>
       <p:sp>
         <p:nvSpPr>
-          <p:cNvPr id="33" name="Rectangle 32"/>
+          <p:cNvPr id="34" name="Rectangle 33"/>
           <p:cNvSpPr/>
           <p:nvPr/>
         </p:nvSpPr>
@@ -12096,7 +12136,7 @@
       </p:sp>
       <p:sp>
         <p:nvSpPr>
-          <p:cNvPr id="34" name="Rounded Rectangle 33"/>
+          <p:cNvPr id="35" name="Rounded Rectangle 34"/>
           <p:cNvSpPr/>
           <p:nvPr/>
         </p:nvSpPr>
@@ -12141,7 +12181,7 @@
       </p:sp>
       <p:sp>
         <p:nvSpPr>
-          <p:cNvPr id="35" name="TextBox 34"/>
+          <p:cNvPr id="36" name="TextBox 35"/>
           <p:cNvSpPr txBox="1"/>
           <p:nvPr/>
         </p:nvSpPr>
@@ -12180,7 +12220,7 @@
       </p:sp>
       <p:sp>
         <p:nvSpPr>
-          <p:cNvPr id="36" name="TextBox 35"/>
+          <p:cNvPr id="37" name="TextBox 36"/>
           <p:cNvSpPr txBox="1"/>
           <p:nvPr/>
         </p:nvSpPr>
@@ -12219,7 +12259,7 @@
       </p:sp>
       <p:sp>
         <p:nvSpPr>
-          <p:cNvPr id="37" name="TextBox 36"/>
+          <p:cNvPr id="38" name="TextBox 37"/>
           <p:cNvSpPr txBox="1"/>
           <p:nvPr/>
         </p:nvSpPr>
@@ -12258,7 +12298,7 @@
       </p:sp>
       <p:sp>
         <p:nvSpPr>
-          <p:cNvPr id="38" name="TextBox 37"/>
+          <p:cNvPr id="39" name="TextBox 38"/>
           <p:cNvSpPr txBox="1"/>
           <p:nvPr/>
         </p:nvSpPr>
@@ -12297,7 +12337,7 @@
       </p:sp>
       <p:sp>
         <p:nvSpPr>
-          <p:cNvPr id="39" name="Rectangle 38"/>
+          <p:cNvPr id="40" name="Rectangle 39"/>
           <p:cNvSpPr/>
           <p:nvPr/>
         </p:nvSpPr>
@@ -12341,7 +12381,7 @@
       </p:sp>
       <p:sp>
         <p:nvSpPr>
-          <p:cNvPr id="40" name="TextBox 39"/>
+          <p:cNvPr id="41" name="TextBox 40"/>
           <p:cNvSpPr txBox="1"/>
           <p:nvPr/>
         </p:nvSpPr>
@@ -12380,7 +12420,7 @@
       </p:sp>
       <p:sp>
         <p:nvSpPr>
-          <p:cNvPr id="41" name="TextBox 40"/>
+          <p:cNvPr id="42" name="TextBox 41"/>
           <p:cNvSpPr txBox="1"/>
           <p:nvPr/>
         </p:nvSpPr>
@@ -12419,7 +12459,7 @@
       </p:sp>
       <p:sp>
         <p:nvSpPr>
-          <p:cNvPr id="42" name="TextBox 41"/>
+          <p:cNvPr id="43" name="TextBox 42"/>
           <p:cNvSpPr txBox="1"/>
           <p:nvPr/>
         </p:nvSpPr>
@@ -12458,7 +12498,7 @@
       </p:sp>
       <p:sp>
         <p:nvSpPr>
-          <p:cNvPr id="43" name="TextBox 42"/>
+          <p:cNvPr id="44" name="TextBox 43"/>
           <p:cNvSpPr txBox="1"/>
           <p:nvPr/>
         </p:nvSpPr>
@@ -12497,7 +12537,7 @@
       </p:sp>
       <p:sp>
         <p:nvSpPr>
-          <p:cNvPr id="44" name="Rectangle 43"/>
+          <p:cNvPr id="45" name="Rectangle 44"/>
           <p:cNvSpPr/>
           <p:nvPr/>
         </p:nvSpPr>
@@ -12541,7 +12581,7 @@
       </p:sp>
       <p:sp>
         <p:nvSpPr>
-          <p:cNvPr id="45" name="TextBox 44"/>
+          <p:cNvPr id="46" name="TextBox 45"/>
           <p:cNvSpPr txBox="1"/>
           <p:nvPr/>
         </p:nvSpPr>
@@ -12580,7 +12620,7 @@
       </p:sp>
       <p:sp>
         <p:nvSpPr>
-          <p:cNvPr id="46" name="TextBox 45"/>
+          <p:cNvPr id="47" name="TextBox 46"/>
           <p:cNvSpPr txBox="1"/>
           <p:nvPr/>
         </p:nvSpPr>
@@ -12619,7 +12659,7 @@
       </p:sp>
       <p:sp>
         <p:nvSpPr>
-          <p:cNvPr id="47" name="TextBox 46"/>
+          <p:cNvPr id="48" name="TextBox 47"/>
           <p:cNvSpPr txBox="1"/>
           <p:nvPr/>
         </p:nvSpPr>
@@ -12658,7 +12698,7 @@
       </p:sp>
       <p:sp>
         <p:nvSpPr>
-          <p:cNvPr id="48" name="TextBox 47"/>
+          <p:cNvPr id="49" name="TextBox 48"/>
           <p:cNvSpPr txBox="1"/>
           <p:nvPr/>
         </p:nvSpPr>
@@ -12801,16 +12841,40 @@
           </a:p>
         </p:txBody>
       </p:sp>
-      <p:sp>
-        <p:nvSpPr>
-          <p:cNvPr id="4" name="Rectangle 3"/>
+      <p:pic>
+        <p:nvPicPr>
+          <p:cNvPr id="4" name="Picture 3" descr="gigshield-dark.png"/>
+          <p:cNvPicPr>
+            <a:picLocks noChangeAspect="1"/>
+          </p:cNvPicPr>
+          <p:nvPr/>
+        </p:nvPicPr>
+        <p:blipFill>
+          <a:blip r:embed="rId2"/>
+          <a:stretch>
+            <a:fillRect/>
+          </a:stretch>
+        </p:blipFill>
+        <p:spPr>
+          <a:xfrm>
+            <a:off x="320040" y="54864"/>
+            <a:ext cx="443132" cy="411480"/>
+          </a:xfrm>
+          <a:prstGeom prst="rect">
+            <a:avLst/>
+          </a:prstGeom>
+        </p:spPr>
+      </p:pic>
+      <p:sp>
+        <p:nvSpPr>
+          <p:cNvPr id="5" name="Rectangle 4"/>
           <p:cNvSpPr/>
           <p:nvPr/>
         </p:nvSpPr>
         <p:spPr>
           <a:xfrm>
-            <a:off x="411480" y="201168"/>
-            <a:ext cx="91440" cy="91440"/>
+            <a:off x="1691640" y="164592"/>
+            <a:ext cx="18288" cy="182880"/>
           </a:xfrm>
           <a:prstGeom prst="rect">
             <a:avLst/>
@@ -12821,6 +12885,7 @@
           <a:ln>
             <a:noFill/>
           </a:ln>
+          <a:effectLst/>
         </p:spPr>
         <p:style>
           <a:lnRef idx="1">
@@ -12846,13 +12911,13 @@
       </p:sp>
       <p:sp>
         <p:nvSpPr>
-          <p:cNvPr id="5" name="TextBox 4"/>
-          <p:cNvSpPr txBox="1"/>
-          <p:nvPr/>
-        </p:nvSpPr>
-        <p:spPr>
-          <a:xfrm>
-            <a:off x="594360" y="118872"/>
+          <p:cNvPr id="6" name="TextBox 5"/>
+          <p:cNvSpPr txBox="1"/>
+          <p:nvPr/>
+        </p:nvSpPr>
+        <p:spPr>
+          <a:xfrm>
+            <a:off x="1783080" y="118872"/>
             <a:ext cx="7315200" cy="274320"/>
           </a:xfrm>
           <a:prstGeom prst="rect">
@@ -12872,20 +12937,20 @@
               </a:lnSpc>
             </a:pPr>
             <a:r>
-              <a:rPr sz="1200" b="1" i="0">
-                <a:solidFill>
-                  <a:srgbClr val="FFFFFF"/>
-                </a:solidFill>
-                <a:latin typeface="Inter"/>
-              </a:rPr>
-              <a:t>GigShield   |   Phase 3 Final Submission</a:t>
-            </a:r>
-          </a:p>
-        </p:txBody>
-      </p:sp>
-      <p:sp>
-        <p:nvSpPr>
-          <p:cNvPr id="6" name="TextBox 5"/>
+              <a:rPr sz="1100" b="1" i="0">
+                <a:solidFill>
+                  <a:srgbClr val="D8E2F0"/>
+                </a:solidFill>
+                <a:latin typeface="Inter"/>
+              </a:rPr>
+              <a:t>Phase 3 Final Submission   ·   Guidewire DEVTrails 2026</a:t>
+            </a:r>
+          </a:p>
+        </p:txBody>
+      </p:sp>
+      <p:sp>
+        <p:nvSpPr>
+          <p:cNvPr id="7" name="TextBox 6"/>
           <p:cNvSpPr txBox="1"/>
           <p:nvPr/>
         </p:nvSpPr>
@@ -12924,7 +12989,7 @@
       </p:sp>
       <p:sp>
         <p:nvSpPr>
-          <p:cNvPr id="7" name="Rectangle 6"/>
+          <p:cNvPr id="8" name="Rectangle 7"/>
           <p:cNvSpPr/>
           <p:nvPr/>
         </p:nvSpPr>
@@ -12968,7 +13033,7 @@
       </p:sp>
       <p:sp>
         <p:nvSpPr>
-          <p:cNvPr id="8" name="TextBox 7"/>
+          <p:cNvPr id="9" name="TextBox 8"/>
           <p:cNvSpPr txBox="1"/>
           <p:nvPr/>
         </p:nvSpPr>
@@ -13007,7 +13072,7 @@
       </p:sp>
       <p:sp>
         <p:nvSpPr>
-          <p:cNvPr id="9" name="Rounded Rectangle 8"/>
+          <p:cNvPr id="10" name="Rounded Rectangle 9"/>
           <p:cNvSpPr/>
           <p:nvPr/>
         </p:nvSpPr>
@@ -13052,7 +13117,7 @@
       </p:sp>
       <p:sp>
         <p:nvSpPr>
-          <p:cNvPr id="10" name="TextBox 9"/>
+          <p:cNvPr id="11" name="TextBox 10"/>
           <p:cNvSpPr txBox="1"/>
           <p:nvPr/>
         </p:nvSpPr>
@@ -13091,7 +13156,7 @@
       </p:sp>
       <p:sp>
         <p:nvSpPr>
-          <p:cNvPr id="11" name="Rectangle 10"/>
+          <p:cNvPr id="12" name="Rectangle 11"/>
           <p:cNvSpPr/>
           <p:nvPr/>
         </p:nvSpPr>
@@ -13135,7 +13200,7 @@
       </p:sp>
       <p:sp>
         <p:nvSpPr>
-          <p:cNvPr id="12" name="TextBox 11"/>
+          <p:cNvPr id="13" name="TextBox 12"/>
           <p:cNvSpPr txBox="1"/>
           <p:nvPr/>
         </p:nvSpPr>
@@ -13174,7 +13239,7 @@
       </p:sp>
       <p:sp>
         <p:nvSpPr>
-          <p:cNvPr id="13" name="TextBox 12"/>
+          <p:cNvPr id="14" name="TextBox 13"/>
           <p:cNvSpPr txBox="1"/>
           <p:nvPr/>
         </p:nvSpPr>
@@ -13231,7 +13296,7 @@
       </p:sp>
       <p:sp>
         <p:nvSpPr>
-          <p:cNvPr id="14" name="Rectangle 13"/>
+          <p:cNvPr id="15" name="Rectangle 14"/>
           <p:cNvSpPr/>
           <p:nvPr/>
         </p:nvSpPr>
@@ -13275,7 +13340,7 @@
       </p:sp>
       <p:sp>
         <p:nvSpPr>
-          <p:cNvPr id="15" name="TextBox 14"/>
+          <p:cNvPr id="16" name="TextBox 15"/>
           <p:cNvSpPr txBox="1"/>
           <p:nvPr/>
         </p:nvSpPr>
@@ -13314,7 +13379,7 @@
       </p:sp>
       <p:sp>
         <p:nvSpPr>
-          <p:cNvPr id="16" name="TextBox 15"/>
+          <p:cNvPr id="17" name="TextBox 16"/>
           <p:cNvSpPr txBox="1"/>
           <p:nvPr/>
         </p:nvSpPr>
@@ -13353,7 +13418,7 @@
       </p:sp>
       <p:sp>
         <p:nvSpPr>
-          <p:cNvPr id="17" name="TextBox 16"/>
+          <p:cNvPr id="18" name="TextBox 17"/>
           <p:cNvSpPr txBox="1"/>
           <p:nvPr/>
         </p:nvSpPr>
@@ -13392,7 +13457,7 @@
       </p:sp>
       <p:sp>
         <p:nvSpPr>
-          <p:cNvPr id="18" name="TextBox 17"/>
+          <p:cNvPr id="19" name="TextBox 18"/>
           <p:cNvSpPr txBox="1"/>
           <p:nvPr/>
         </p:nvSpPr>
@@ -13431,7 +13496,7 @@
       </p:sp>
       <p:sp>
         <p:nvSpPr>
-          <p:cNvPr id="19" name="TextBox 18"/>
+          <p:cNvPr id="20" name="TextBox 19"/>
           <p:cNvSpPr txBox="1"/>
           <p:nvPr/>
         </p:nvSpPr>
@@ -13470,7 +13535,7 @@
       </p:sp>
       <p:sp>
         <p:nvSpPr>
-          <p:cNvPr id="20" name="TextBox 19"/>
+          <p:cNvPr id="21" name="TextBox 20"/>
           <p:cNvSpPr txBox="1"/>
           <p:nvPr/>
         </p:nvSpPr>
@@ -13509,7 +13574,7 @@
       </p:sp>
       <p:sp>
         <p:nvSpPr>
-          <p:cNvPr id="21" name="Rectangle 20"/>
+          <p:cNvPr id="22" name="Rectangle 21"/>
           <p:cNvSpPr/>
           <p:nvPr/>
         </p:nvSpPr>
@@ -13553,7 +13618,7 @@
       </p:sp>
       <p:sp>
         <p:nvSpPr>
-          <p:cNvPr id="22" name="Rounded Rectangle 21"/>
+          <p:cNvPr id="23" name="Rounded Rectangle 22"/>
           <p:cNvSpPr/>
           <p:nvPr/>
         </p:nvSpPr>
@@ -13598,7 +13663,7 @@
       </p:sp>
       <p:sp>
         <p:nvSpPr>
-          <p:cNvPr id="23" name="TextBox 22"/>
+          <p:cNvPr id="24" name="TextBox 23"/>
           <p:cNvSpPr txBox="1"/>
           <p:nvPr/>
         </p:nvSpPr>
@@ -13637,7 +13702,7 @@
       </p:sp>
       <p:sp>
         <p:nvSpPr>
-          <p:cNvPr id="24" name="TextBox 23"/>
+          <p:cNvPr id="25" name="TextBox 24"/>
           <p:cNvSpPr txBox="1"/>
           <p:nvPr/>
         </p:nvSpPr>
@@ -13676,7 +13741,7 @@
       </p:sp>
       <p:sp>
         <p:nvSpPr>
-          <p:cNvPr id="25" name="TextBox 24"/>
+          <p:cNvPr id="26" name="TextBox 25"/>
           <p:cNvSpPr txBox="1"/>
           <p:nvPr/>
         </p:nvSpPr>
@@ -13715,7 +13780,7 @@
       </p:sp>
       <p:sp>
         <p:nvSpPr>
-          <p:cNvPr id="26" name="TextBox 25"/>
+          <p:cNvPr id="27" name="TextBox 26"/>
           <p:cNvSpPr txBox="1"/>
           <p:nvPr/>
         </p:nvSpPr>
@@ -13754,7 +13819,7 @@
       </p:sp>
       <p:sp>
         <p:nvSpPr>
-          <p:cNvPr id="27" name="TextBox 26"/>
+          <p:cNvPr id="28" name="TextBox 27"/>
           <p:cNvSpPr txBox="1"/>
           <p:nvPr/>
         </p:nvSpPr>
@@ -13793,7 +13858,7 @@
       </p:sp>
       <p:sp>
         <p:nvSpPr>
-          <p:cNvPr id="28" name="TextBox 27"/>
+          <p:cNvPr id="29" name="TextBox 28"/>
           <p:cNvSpPr txBox="1"/>
           <p:nvPr/>
         </p:nvSpPr>
@@ -13832,7 +13897,7 @@
       </p:sp>
       <p:sp>
         <p:nvSpPr>
-          <p:cNvPr id="29" name="Rounded Rectangle 28"/>
+          <p:cNvPr id="30" name="Rounded Rectangle 29"/>
           <p:cNvSpPr/>
           <p:nvPr/>
         </p:nvSpPr>
@@ -13877,7 +13942,7 @@
       </p:sp>
       <p:sp>
         <p:nvSpPr>
-          <p:cNvPr id="30" name="TextBox 29"/>
+          <p:cNvPr id="31" name="TextBox 30"/>
           <p:cNvSpPr txBox="1"/>
           <p:nvPr/>
         </p:nvSpPr>
@@ -13916,7 +13981,7 @@
       </p:sp>
       <p:sp>
         <p:nvSpPr>
-          <p:cNvPr id="31" name="TextBox 30"/>
+          <p:cNvPr id="32" name="TextBox 31"/>
           <p:cNvSpPr txBox="1"/>
           <p:nvPr/>
         </p:nvSpPr>
@@ -13955,7 +14020,7 @@
       </p:sp>
       <p:sp>
         <p:nvSpPr>
-          <p:cNvPr id="32" name="TextBox 31"/>
+          <p:cNvPr id="33" name="TextBox 32"/>
           <p:cNvSpPr txBox="1"/>
           <p:nvPr/>
         </p:nvSpPr>
@@ -13994,7 +14059,7 @@
       </p:sp>
       <p:sp>
         <p:nvSpPr>
-          <p:cNvPr id="33" name="TextBox 32"/>
+          <p:cNvPr id="34" name="TextBox 33"/>
           <p:cNvSpPr txBox="1"/>
           <p:nvPr/>
         </p:nvSpPr>
@@ -14033,7 +14098,7 @@
       </p:sp>
       <p:sp>
         <p:nvSpPr>
-          <p:cNvPr id="34" name="TextBox 33"/>
+          <p:cNvPr id="35" name="TextBox 34"/>
           <p:cNvSpPr txBox="1"/>
           <p:nvPr/>
         </p:nvSpPr>
@@ -14072,7 +14137,7 @@
       </p:sp>
       <p:sp>
         <p:nvSpPr>
-          <p:cNvPr id="35" name="TextBox 34"/>
+          <p:cNvPr id="36" name="TextBox 35"/>
           <p:cNvSpPr txBox="1"/>
           <p:nvPr/>
         </p:nvSpPr>
@@ -14111,7 +14176,7 @@
       </p:sp>
       <p:sp>
         <p:nvSpPr>
-          <p:cNvPr id="36" name="Rectangle 35"/>
+          <p:cNvPr id="37" name="Rectangle 36"/>
           <p:cNvSpPr/>
           <p:nvPr/>
         </p:nvSpPr>
@@ -14155,7 +14220,7 @@
       </p:sp>
       <p:sp>
         <p:nvSpPr>
-          <p:cNvPr id="37" name="Rounded Rectangle 36"/>
+          <p:cNvPr id="38" name="Rounded Rectangle 37"/>
           <p:cNvSpPr/>
           <p:nvPr/>
         </p:nvSpPr>
@@ -14200,7 +14265,7 @@
       </p:sp>
       <p:sp>
         <p:nvSpPr>
-          <p:cNvPr id="38" name="TextBox 37"/>
+          <p:cNvPr id="39" name="TextBox 38"/>
           <p:cNvSpPr txBox="1"/>
           <p:nvPr/>
         </p:nvSpPr>
@@ -14239,7 +14304,7 @@
       </p:sp>
       <p:sp>
         <p:nvSpPr>
-          <p:cNvPr id="39" name="TextBox 38"/>
+          <p:cNvPr id="40" name="TextBox 39"/>
           <p:cNvSpPr txBox="1"/>
           <p:nvPr/>
         </p:nvSpPr>
@@ -14278,7 +14343,7 @@
       </p:sp>
       <p:sp>
         <p:nvSpPr>
-          <p:cNvPr id="40" name="TextBox 39"/>
+          <p:cNvPr id="41" name="TextBox 40"/>
           <p:cNvSpPr txBox="1"/>
           <p:nvPr/>
         </p:nvSpPr>
@@ -14317,7 +14382,7 @@
       </p:sp>
       <p:sp>
         <p:nvSpPr>
-          <p:cNvPr id="41" name="TextBox 40"/>
+          <p:cNvPr id="42" name="TextBox 41"/>
           <p:cNvSpPr txBox="1"/>
           <p:nvPr/>
         </p:nvSpPr>
@@ -14356,7 +14421,7 @@
       </p:sp>
       <p:sp>
         <p:nvSpPr>
-          <p:cNvPr id="42" name="TextBox 41"/>
+          <p:cNvPr id="43" name="TextBox 42"/>
           <p:cNvSpPr txBox="1"/>
           <p:nvPr/>
         </p:nvSpPr>
@@ -14395,7 +14460,7 @@
       </p:sp>
       <p:sp>
         <p:nvSpPr>
-          <p:cNvPr id="43" name="TextBox 42"/>
+          <p:cNvPr id="44" name="TextBox 43"/>
           <p:cNvSpPr txBox="1"/>
           <p:nvPr/>
         </p:nvSpPr>
@@ -14434,7 +14499,7 @@
       </p:sp>
       <p:sp>
         <p:nvSpPr>
-          <p:cNvPr id="44" name="Rectangle 43"/>
+          <p:cNvPr id="45" name="Rectangle 44"/>
           <p:cNvSpPr/>
           <p:nvPr/>
         </p:nvSpPr>
@@ -14478,7 +14543,7 @@
       </p:sp>
       <p:sp>
         <p:nvSpPr>
-          <p:cNvPr id="45" name="Rectangle 44"/>
+          <p:cNvPr id="46" name="Rectangle 45"/>
           <p:cNvSpPr/>
           <p:nvPr/>
         </p:nvSpPr>
@@ -14524,7 +14589,7 @@
       </p:sp>
       <p:sp>
         <p:nvSpPr>
-          <p:cNvPr id="46" name="TextBox 45"/>
+          <p:cNvPr id="47" name="TextBox 46"/>
           <p:cNvSpPr txBox="1"/>
           <p:nvPr/>
         </p:nvSpPr>
@@ -14572,7 +14637,7 @@
       </p:sp>
       <p:sp>
         <p:nvSpPr>
-          <p:cNvPr id="47" name="TextBox 46"/>
+          <p:cNvPr id="48" name="TextBox 47"/>
           <p:cNvSpPr txBox="1"/>
           <p:nvPr/>
         </p:nvSpPr>
@@ -14611,7 +14676,7 @@
       </p:sp>
       <p:sp>
         <p:nvSpPr>
-          <p:cNvPr id="48" name="TextBox 47"/>
+          <p:cNvPr id="49" name="TextBox 48"/>
           <p:cNvSpPr txBox="1"/>
           <p:nvPr/>
         </p:nvSpPr>
@@ -14650,7 +14715,7 @@
       </p:sp>
       <p:sp>
         <p:nvSpPr>
-          <p:cNvPr id="49" name="Rectangle 48"/>
+          <p:cNvPr id="50" name="Rectangle 49"/>
           <p:cNvSpPr/>
           <p:nvPr/>
         </p:nvSpPr>
@@ -14694,7 +14759,7 @@
       </p:sp>
       <p:sp>
         <p:nvSpPr>
-          <p:cNvPr id="50" name="Rectangle 49"/>
+          <p:cNvPr id="51" name="Rectangle 50"/>
           <p:cNvSpPr/>
           <p:nvPr/>
         </p:nvSpPr>
@@ -14740,7 +14805,7 @@
       </p:sp>
       <p:sp>
         <p:nvSpPr>
-          <p:cNvPr id="51" name="TextBox 50"/>
+          <p:cNvPr id="52" name="TextBox 51"/>
           <p:cNvSpPr txBox="1"/>
           <p:nvPr/>
         </p:nvSpPr>
@@ -14788,7 +14853,7 @@
       </p:sp>
       <p:sp>
         <p:nvSpPr>
-          <p:cNvPr id="52" name="TextBox 51"/>
+          <p:cNvPr id="53" name="TextBox 52"/>
           <p:cNvSpPr txBox="1"/>
           <p:nvPr/>
         </p:nvSpPr>
@@ -14827,7 +14892,7 @@
       </p:sp>
       <p:sp>
         <p:nvSpPr>
-          <p:cNvPr id="53" name="TextBox 52"/>
+          <p:cNvPr id="54" name="TextBox 53"/>
           <p:cNvSpPr txBox="1"/>
           <p:nvPr/>
         </p:nvSpPr>
@@ -14866,7 +14931,7 @@
       </p:sp>
       <p:sp>
         <p:nvSpPr>
-          <p:cNvPr id="54" name="Rectangle 53"/>
+          <p:cNvPr id="55" name="Rectangle 54"/>
           <p:cNvSpPr/>
           <p:nvPr/>
         </p:nvSpPr>
@@ -14910,7 +14975,7 @@
       </p:sp>
       <p:sp>
         <p:nvSpPr>
-          <p:cNvPr id="55" name="Rectangle 54"/>
+          <p:cNvPr id="56" name="Rectangle 55"/>
           <p:cNvSpPr/>
           <p:nvPr/>
         </p:nvSpPr>
@@ -14956,7 +15021,7 @@
       </p:sp>
       <p:sp>
         <p:nvSpPr>
-          <p:cNvPr id="56" name="TextBox 55"/>
+          <p:cNvPr id="57" name="TextBox 56"/>
           <p:cNvSpPr txBox="1"/>
           <p:nvPr/>
         </p:nvSpPr>
@@ -15004,7 +15069,7 @@
       </p:sp>
       <p:sp>
         <p:nvSpPr>
-          <p:cNvPr id="57" name="TextBox 56"/>
+          <p:cNvPr id="58" name="TextBox 57"/>
           <p:cNvSpPr txBox="1"/>
           <p:nvPr/>
         </p:nvSpPr>
@@ -15043,7 +15108,7 @@
       </p:sp>
       <p:sp>
         <p:nvSpPr>
-          <p:cNvPr id="58" name="TextBox 57"/>
+          <p:cNvPr id="59" name="TextBox 58"/>
           <p:cNvSpPr txBox="1"/>
           <p:nvPr/>
         </p:nvSpPr>
@@ -15082,7 +15147,7 @@
       </p:sp>
       <p:sp>
         <p:nvSpPr>
-          <p:cNvPr id="59" name="Rectangle 58"/>
+          <p:cNvPr id="60" name="Rectangle 59"/>
           <p:cNvSpPr/>
           <p:nvPr/>
         </p:nvSpPr>
@@ -15126,7 +15191,7 @@
       </p:sp>
       <p:sp>
         <p:nvSpPr>
-          <p:cNvPr id="60" name="Rectangle 59"/>
+          <p:cNvPr id="61" name="Rectangle 60"/>
           <p:cNvSpPr/>
           <p:nvPr/>
         </p:nvSpPr>
@@ -15172,7 +15237,7 @@
       </p:sp>
       <p:sp>
         <p:nvSpPr>
-          <p:cNvPr id="61" name="TextBox 60"/>
+          <p:cNvPr id="62" name="TextBox 61"/>
           <p:cNvSpPr txBox="1"/>
           <p:nvPr/>
         </p:nvSpPr>
@@ -15220,7 +15285,7 @@
       </p:sp>
       <p:sp>
         <p:nvSpPr>
-          <p:cNvPr id="62" name="TextBox 61"/>
+          <p:cNvPr id="63" name="TextBox 62"/>
           <p:cNvSpPr txBox="1"/>
           <p:nvPr/>
         </p:nvSpPr>
@@ -15259,7 +15324,7 @@
       </p:sp>
       <p:sp>
         <p:nvSpPr>
-          <p:cNvPr id="63" name="TextBox 62"/>
+          <p:cNvPr id="64" name="TextBox 63"/>
           <p:cNvSpPr txBox="1"/>
           <p:nvPr/>
         </p:nvSpPr>
@@ -15402,16 +15467,40 @@
           </a:p>
         </p:txBody>
       </p:sp>
-      <p:sp>
-        <p:nvSpPr>
-          <p:cNvPr id="4" name="Rectangle 3"/>
+      <p:pic>
+        <p:nvPicPr>
+          <p:cNvPr id="4" name="Picture 3" descr="gigshield-dark.png"/>
+          <p:cNvPicPr>
+            <a:picLocks noChangeAspect="1"/>
+          </p:cNvPicPr>
+          <p:nvPr/>
+        </p:nvPicPr>
+        <p:blipFill>
+          <a:blip r:embed="rId2"/>
+          <a:stretch>
+            <a:fillRect/>
+          </a:stretch>
+        </p:blipFill>
+        <p:spPr>
+          <a:xfrm>
+            <a:off x="320040" y="54864"/>
+            <a:ext cx="443132" cy="411480"/>
+          </a:xfrm>
+          <a:prstGeom prst="rect">
+            <a:avLst/>
+          </a:prstGeom>
+        </p:spPr>
+      </p:pic>
+      <p:sp>
+        <p:nvSpPr>
+          <p:cNvPr id="5" name="Rectangle 4"/>
           <p:cNvSpPr/>
           <p:nvPr/>
         </p:nvSpPr>
         <p:spPr>
           <a:xfrm>
-            <a:off x="411480" y="201168"/>
-            <a:ext cx="91440" cy="91440"/>
+            <a:off x="1691640" y="164592"/>
+            <a:ext cx="18288" cy="182880"/>
           </a:xfrm>
           <a:prstGeom prst="rect">
             <a:avLst/>
@@ -15422,6 +15511,7 @@
           <a:ln>
             <a:noFill/>
           </a:ln>
+          <a:effectLst/>
         </p:spPr>
         <p:style>
           <a:lnRef idx="1">
@@ -15447,13 +15537,13 @@
       </p:sp>
       <p:sp>
         <p:nvSpPr>
-          <p:cNvPr id="5" name="TextBox 4"/>
-          <p:cNvSpPr txBox="1"/>
-          <p:nvPr/>
-        </p:nvSpPr>
-        <p:spPr>
-          <a:xfrm>
-            <a:off x="594360" y="118872"/>
+          <p:cNvPr id="6" name="TextBox 5"/>
+          <p:cNvSpPr txBox="1"/>
+          <p:nvPr/>
+        </p:nvSpPr>
+        <p:spPr>
+          <a:xfrm>
+            <a:off x="1783080" y="118872"/>
             <a:ext cx="7315200" cy="274320"/>
           </a:xfrm>
           <a:prstGeom prst="rect">
@@ -15473,20 +15563,20 @@
               </a:lnSpc>
             </a:pPr>
             <a:r>
-              <a:rPr sz="1200" b="1" i="0">
-                <a:solidFill>
-                  <a:srgbClr val="FFFFFF"/>
-                </a:solidFill>
-                <a:latin typeface="Inter"/>
-              </a:rPr>
-              <a:t>GigShield   |   Phase 3 Final Submission</a:t>
-            </a:r>
-          </a:p>
-        </p:txBody>
-      </p:sp>
-      <p:sp>
-        <p:nvSpPr>
-          <p:cNvPr id="6" name="TextBox 5"/>
+              <a:rPr sz="1100" b="1" i="0">
+                <a:solidFill>
+                  <a:srgbClr val="D8E2F0"/>
+                </a:solidFill>
+                <a:latin typeface="Inter"/>
+              </a:rPr>
+              <a:t>Phase 3 Final Submission   ·   Guidewire DEVTrails 2026</a:t>
+            </a:r>
+          </a:p>
+        </p:txBody>
+      </p:sp>
+      <p:sp>
+        <p:nvSpPr>
+          <p:cNvPr id="7" name="TextBox 6"/>
           <p:cNvSpPr txBox="1"/>
           <p:nvPr/>
         </p:nvSpPr>
@@ -15525,7 +15615,7 @@
       </p:sp>
       <p:sp>
         <p:nvSpPr>
-          <p:cNvPr id="7" name="Rectangle 6"/>
+          <p:cNvPr id="8" name="Rectangle 7"/>
           <p:cNvSpPr/>
           <p:nvPr/>
         </p:nvSpPr>
@@ -15569,7 +15659,7 @@
       </p:sp>
       <p:sp>
         <p:nvSpPr>
-          <p:cNvPr id="8" name="TextBox 7"/>
+          <p:cNvPr id="9" name="TextBox 8"/>
           <p:cNvSpPr txBox="1"/>
           <p:nvPr/>
         </p:nvSpPr>
@@ -15608,7 +15698,7 @@
       </p:sp>
       <p:sp>
         <p:nvSpPr>
-          <p:cNvPr id="9" name="Rounded Rectangle 8"/>
+          <p:cNvPr id="10" name="Rounded Rectangle 9"/>
           <p:cNvSpPr/>
           <p:nvPr/>
         </p:nvSpPr>
@@ -15653,7 +15743,7 @@
       </p:sp>
       <p:sp>
         <p:nvSpPr>
-          <p:cNvPr id="10" name="TextBox 9"/>
+          <p:cNvPr id="11" name="TextBox 10"/>
           <p:cNvSpPr txBox="1"/>
           <p:nvPr/>
         </p:nvSpPr>
@@ -15692,7 +15782,7 @@
       </p:sp>
       <p:sp>
         <p:nvSpPr>
-          <p:cNvPr id="11" name="Rectangle 10"/>
+          <p:cNvPr id="12" name="Rectangle 11"/>
           <p:cNvSpPr/>
           <p:nvPr/>
         </p:nvSpPr>
@@ -15736,7 +15826,7 @@
       </p:sp>
       <p:sp>
         <p:nvSpPr>
-          <p:cNvPr id="12" name="TextBox 11"/>
+          <p:cNvPr id="13" name="TextBox 12"/>
           <p:cNvSpPr txBox="1"/>
           <p:nvPr/>
         </p:nvSpPr>
@@ -15775,7 +15865,7 @@
       </p:sp>
       <p:sp>
         <p:nvSpPr>
-          <p:cNvPr id="13" name="TextBox 12"/>
+          <p:cNvPr id="14" name="TextBox 13"/>
           <p:cNvSpPr txBox="1"/>
           <p:nvPr/>
         </p:nvSpPr>
@@ -15832,7 +15922,7 @@
       </p:sp>
       <p:sp>
         <p:nvSpPr>
-          <p:cNvPr id="14" name="Rectangle 13"/>
+          <p:cNvPr id="15" name="Rectangle 14"/>
           <p:cNvSpPr/>
           <p:nvPr/>
         </p:nvSpPr>
@@ -15876,7 +15966,7 @@
       </p:sp>
       <p:sp>
         <p:nvSpPr>
-          <p:cNvPr id="15" name="Rectangle 14"/>
+          <p:cNvPr id="16" name="Rectangle 15"/>
           <p:cNvSpPr/>
           <p:nvPr/>
         </p:nvSpPr>
@@ -15922,7 +16012,7 @@
       </p:sp>
       <p:sp>
         <p:nvSpPr>
-          <p:cNvPr id="16" name="TextBox 15"/>
+          <p:cNvPr id="17" name="TextBox 16"/>
           <p:cNvSpPr txBox="1"/>
           <p:nvPr/>
         </p:nvSpPr>
@@ -15961,7 +16051,7 @@
       </p:sp>
       <p:sp>
         <p:nvSpPr>
-          <p:cNvPr id="17" name="TextBox 16"/>
+          <p:cNvPr id="18" name="TextBox 17"/>
           <p:cNvSpPr txBox="1"/>
           <p:nvPr/>
         </p:nvSpPr>
@@ -16177,7 +16267,7 @@
       </p:sp>
       <p:sp>
         <p:nvSpPr>
-          <p:cNvPr id="18" name="Rectangle 17"/>
+          <p:cNvPr id="19" name="Rectangle 18"/>
           <p:cNvSpPr/>
           <p:nvPr/>
         </p:nvSpPr>
@@ -16221,7 +16311,7 @@
       </p:sp>
       <p:sp>
         <p:nvSpPr>
-          <p:cNvPr id="19" name="Rectangle 18"/>
+          <p:cNvPr id="20" name="Rectangle 19"/>
           <p:cNvSpPr/>
           <p:nvPr/>
         </p:nvSpPr>
@@ -16267,7 +16357,7 @@
       </p:sp>
       <p:sp>
         <p:nvSpPr>
-          <p:cNvPr id="20" name="TextBox 19"/>
+          <p:cNvPr id="21" name="TextBox 20"/>
           <p:cNvSpPr txBox="1"/>
           <p:nvPr/>
         </p:nvSpPr>
@@ -16306,7 +16396,7 @@
       </p:sp>
       <p:sp>
         <p:nvSpPr>
-          <p:cNvPr id="21" name="TextBox 20"/>
+          <p:cNvPr id="22" name="TextBox 21"/>
           <p:cNvSpPr txBox="1"/>
           <p:nvPr/>
         </p:nvSpPr>
@@ -16522,7 +16612,7 @@
       </p:sp>
       <p:sp>
         <p:nvSpPr>
-          <p:cNvPr id="22" name="Rectangle 21"/>
+          <p:cNvPr id="23" name="Rectangle 22"/>
           <p:cNvSpPr/>
           <p:nvPr/>
         </p:nvSpPr>
@@ -16566,7 +16656,7 @@
       </p:sp>
       <p:sp>
         <p:nvSpPr>
-          <p:cNvPr id="23" name="Rectangle 22"/>
+          <p:cNvPr id="24" name="Rectangle 23"/>
           <p:cNvSpPr/>
           <p:nvPr/>
         </p:nvSpPr>
@@ -16612,7 +16702,7 @@
       </p:sp>
       <p:sp>
         <p:nvSpPr>
-          <p:cNvPr id="24" name="TextBox 23"/>
+          <p:cNvPr id="25" name="TextBox 24"/>
           <p:cNvSpPr txBox="1"/>
           <p:nvPr/>
         </p:nvSpPr>
@@ -16651,7 +16741,7 @@
       </p:sp>
       <p:sp>
         <p:nvSpPr>
-          <p:cNvPr id="25" name="TextBox 24"/>
+          <p:cNvPr id="26" name="TextBox 25"/>
           <p:cNvSpPr txBox="1"/>
           <p:nvPr/>
         </p:nvSpPr>
@@ -16839,7 +16929,7 @@
       </p:sp>
       <p:sp>
         <p:nvSpPr>
-          <p:cNvPr id="26" name="Rectangle 25"/>
+          <p:cNvPr id="27" name="Rectangle 26"/>
           <p:cNvSpPr/>
           <p:nvPr/>
         </p:nvSpPr>
@@ -16883,7 +16973,7 @@
       </p:sp>
       <p:sp>
         <p:nvSpPr>
-          <p:cNvPr id="27" name="Rectangle 26"/>
+          <p:cNvPr id="28" name="Rectangle 27"/>
           <p:cNvSpPr/>
           <p:nvPr/>
         </p:nvSpPr>
@@ -16929,7 +17019,7 @@
       </p:sp>
       <p:sp>
         <p:nvSpPr>
-          <p:cNvPr id="28" name="TextBox 27"/>
+          <p:cNvPr id="29" name="TextBox 28"/>
           <p:cNvSpPr txBox="1"/>
           <p:nvPr/>
         </p:nvSpPr>
@@ -16968,7 +17058,7 @@
       </p:sp>
       <p:sp>
         <p:nvSpPr>
-          <p:cNvPr id="29" name="TextBox 28"/>
+          <p:cNvPr id="30" name="TextBox 29"/>
           <p:cNvSpPr txBox="1"/>
           <p:nvPr/>
         </p:nvSpPr>
@@ -17156,7 +17246,7 @@
       </p:sp>
       <p:sp>
         <p:nvSpPr>
-          <p:cNvPr id="30" name="Rectangle 29"/>
+          <p:cNvPr id="31" name="Rectangle 30"/>
           <p:cNvSpPr/>
           <p:nvPr/>
         </p:nvSpPr>
@@ -17200,7 +17290,7 @@
       </p:sp>
       <p:sp>
         <p:nvSpPr>
-          <p:cNvPr id="31" name="Rectangle 30"/>
+          <p:cNvPr id="32" name="Rectangle 31"/>
           <p:cNvSpPr/>
           <p:nvPr/>
         </p:nvSpPr>
@@ -17246,7 +17336,7 @@
       </p:sp>
       <p:sp>
         <p:nvSpPr>
-          <p:cNvPr id="32" name="TextBox 31"/>
+          <p:cNvPr id="33" name="TextBox 32"/>
           <p:cNvSpPr txBox="1"/>
           <p:nvPr/>
         </p:nvSpPr>
@@ -17285,7 +17375,7 @@
       </p:sp>
       <p:sp>
         <p:nvSpPr>
-          <p:cNvPr id="33" name="TextBox 32"/>
+          <p:cNvPr id="34" name="TextBox 33"/>
           <p:cNvSpPr txBox="1"/>
           <p:nvPr/>
         </p:nvSpPr>
@@ -17473,7 +17563,7 @@
       </p:sp>
       <p:sp>
         <p:nvSpPr>
-          <p:cNvPr id="34" name="Rectangle 33"/>
+          <p:cNvPr id="35" name="Rectangle 34"/>
           <p:cNvSpPr/>
           <p:nvPr/>
         </p:nvSpPr>
@@ -17517,7 +17607,7 @@
       </p:sp>
       <p:sp>
         <p:nvSpPr>
-          <p:cNvPr id="35" name="Rectangle 34"/>
+          <p:cNvPr id="36" name="Rectangle 35"/>
           <p:cNvSpPr/>
           <p:nvPr/>
         </p:nvSpPr>
@@ -17563,7 +17653,7 @@
       </p:sp>
       <p:sp>
         <p:nvSpPr>
-          <p:cNvPr id="36" name="TextBox 35"/>
+          <p:cNvPr id="37" name="TextBox 36"/>
           <p:cNvSpPr txBox="1"/>
           <p:nvPr/>
         </p:nvSpPr>
@@ -17602,7 +17692,7 @@
       </p:sp>
       <p:sp>
         <p:nvSpPr>
-          <p:cNvPr id="37" name="TextBox 36"/>
+          <p:cNvPr id="38" name="TextBox 37"/>
           <p:cNvSpPr txBox="1"/>
           <p:nvPr/>
         </p:nvSpPr>
@@ -17894,16 +17984,40 @@
           </a:p>
         </p:txBody>
       </p:sp>
-      <p:sp>
-        <p:nvSpPr>
-          <p:cNvPr id="4" name="Rectangle 3"/>
+      <p:pic>
+        <p:nvPicPr>
+          <p:cNvPr id="4" name="Picture 3" descr="gigshield-dark.png"/>
+          <p:cNvPicPr>
+            <a:picLocks noChangeAspect="1"/>
+          </p:cNvPicPr>
+          <p:nvPr/>
+        </p:nvPicPr>
+        <p:blipFill>
+          <a:blip r:embed="rId2"/>
+          <a:stretch>
+            <a:fillRect/>
+          </a:stretch>
+        </p:blipFill>
+        <p:spPr>
+          <a:xfrm>
+            <a:off x="320040" y="54864"/>
+            <a:ext cx="443132" cy="411480"/>
+          </a:xfrm>
+          <a:prstGeom prst="rect">
+            <a:avLst/>
+          </a:prstGeom>
+        </p:spPr>
+      </p:pic>
+      <p:sp>
+        <p:nvSpPr>
+          <p:cNvPr id="5" name="Rectangle 4"/>
           <p:cNvSpPr/>
           <p:nvPr/>
         </p:nvSpPr>
         <p:spPr>
           <a:xfrm>
-            <a:off x="411480" y="201168"/>
-            <a:ext cx="91440" cy="91440"/>
+            <a:off x="1691640" y="164592"/>
+            <a:ext cx="18288" cy="182880"/>
           </a:xfrm>
           <a:prstGeom prst="rect">
             <a:avLst/>
@@ -17914,6 +18028,7 @@
           <a:ln>
             <a:noFill/>
           </a:ln>
+          <a:effectLst/>
         </p:spPr>
         <p:style>
           <a:lnRef idx="1">
@@ -17939,13 +18054,13 @@
       </p:sp>
       <p:sp>
         <p:nvSpPr>
-          <p:cNvPr id="5" name="TextBox 4"/>
-          <p:cNvSpPr txBox="1"/>
-          <p:nvPr/>
-        </p:nvSpPr>
-        <p:spPr>
-          <a:xfrm>
-            <a:off x="594360" y="118872"/>
+          <p:cNvPr id="6" name="TextBox 5"/>
+          <p:cNvSpPr txBox="1"/>
+          <p:nvPr/>
+        </p:nvSpPr>
+        <p:spPr>
+          <a:xfrm>
+            <a:off x="1783080" y="118872"/>
             <a:ext cx="7315200" cy="274320"/>
           </a:xfrm>
           <a:prstGeom prst="rect">
@@ -17965,20 +18080,20 @@
               </a:lnSpc>
             </a:pPr>
             <a:r>
-              <a:rPr sz="1200" b="1" i="0">
-                <a:solidFill>
-                  <a:srgbClr val="FFFFFF"/>
-                </a:solidFill>
-                <a:latin typeface="Inter"/>
-              </a:rPr>
-              <a:t>GigShield   |   Phase 3 Final Submission</a:t>
-            </a:r>
-          </a:p>
-        </p:txBody>
-      </p:sp>
-      <p:sp>
-        <p:nvSpPr>
-          <p:cNvPr id="6" name="TextBox 5"/>
+              <a:rPr sz="1100" b="1" i="0">
+                <a:solidFill>
+                  <a:srgbClr val="D8E2F0"/>
+                </a:solidFill>
+                <a:latin typeface="Inter"/>
+              </a:rPr>
+              <a:t>Phase 3 Final Submission   ·   Guidewire DEVTrails 2026</a:t>
+            </a:r>
+          </a:p>
+        </p:txBody>
+      </p:sp>
+      <p:sp>
+        <p:nvSpPr>
+          <p:cNvPr id="7" name="TextBox 6"/>
           <p:cNvSpPr txBox="1"/>
           <p:nvPr/>
         </p:nvSpPr>
@@ -18017,7 +18132,7 @@
       </p:sp>
       <p:sp>
         <p:nvSpPr>
-          <p:cNvPr id="7" name="Rectangle 6"/>
+          <p:cNvPr id="8" name="Rectangle 7"/>
           <p:cNvSpPr/>
           <p:nvPr/>
         </p:nvSpPr>
@@ -18061,7 +18176,7 @@
       </p:sp>
       <p:sp>
         <p:nvSpPr>
-          <p:cNvPr id="8" name="TextBox 7"/>
+          <p:cNvPr id="9" name="TextBox 8"/>
           <p:cNvSpPr txBox="1"/>
           <p:nvPr/>
         </p:nvSpPr>
@@ -18100,7 +18215,7 @@
       </p:sp>
       <p:sp>
         <p:nvSpPr>
-          <p:cNvPr id="9" name="Rounded Rectangle 8"/>
+          <p:cNvPr id="10" name="Rounded Rectangle 9"/>
           <p:cNvSpPr/>
           <p:nvPr/>
         </p:nvSpPr>
@@ -18145,7 +18260,7 @@
       </p:sp>
       <p:sp>
         <p:nvSpPr>
-          <p:cNvPr id="10" name="TextBox 9"/>
+          <p:cNvPr id="11" name="TextBox 10"/>
           <p:cNvSpPr txBox="1"/>
           <p:nvPr/>
         </p:nvSpPr>
@@ -18184,7 +18299,7 @@
       </p:sp>
       <p:sp>
         <p:nvSpPr>
-          <p:cNvPr id="11" name="Rectangle 10"/>
+          <p:cNvPr id="12" name="Rectangle 11"/>
           <p:cNvSpPr/>
           <p:nvPr/>
         </p:nvSpPr>
@@ -18228,7 +18343,7 @@
       </p:sp>
       <p:sp>
         <p:nvSpPr>
-          <p:cNvPr id="12" name="TextBox 11"/>
+          <p:cNvPr id="13" name="TextBox 12"/>
           <p:cNvSpPr txBox="1"/>
           <p:nvPr/>
         </p:nvSpPr>
@@ -18267,7 +18382,7 @@
       </p:sp>
       <p:sp>
         <p:nvSpPr>
-          <p:cNvPr id="13" name="TextBox 12"/>
+          <p:cNvPr id="14" name="TextBox 13"/>
           <p:cNvSpPr txBox="1"/>
           <p:nvPr/>
         </p:nvSpPr>
@@ -18324,7 +18439,7 @@
       </p:sp>
       <p:sp>
         <p:nvSpPr>
-          <p:cNvPr id="14" name="Rectangle 13"/>
+          <p:cNvPr id="15" name="Rectangle 14"/>
           <p:cNvSpPr/>
           <p:nvPr/>
         </p:nvSpPr>
@@ -18368,7 +18483,7 @@
       </p:sp>
       <p:sp>
         <p:nvSpPr>
-          <p:cNvPr id="15" name="Rectangle 14"/>
+          <p:cNvPr id="16" name="Rectangle 15"/>
           <p:cNvSpPr/>
           <p:nvPr/>
         </p:nvSpPr>
@@ -18414,7 +18529,7 @@
       </p:sp>
       <p:sp>
         <p:nvSpPr>
-          <p:cNvPr id="16" name="TextBox 15"/>
+          <p:cNvPr id="17" name="TextBox 16"/>
           <p:cNvSpPr txBox="1"/>
           <p:nvPr/>
         </p:nvSpPr>
@@ -18462,7 +18577,7 @@
       </p:sp>
       <p:sp>
         <p:nvSpPr>
-          <p:cNvPr id="17" name="TextBox 16"/>
+          <p:cNvPr id="18" name="TextBox 17"/>
           <p:cNvSpPr txBox="1"/>
           <p:nvPr/>
         </p:nvSpPr>
@@ -18501,7 +18616,7 @@
       </p:sp>
       <p:sp>
         <p:nvSpPr>
-          <p:cNvPr id="18" name="Rectangle 17"/>
+          <p:cNvPr id="19" name="Rectangle 18"/>
           <p:cNvSpPr/>
           <p:nvPr/>
         </p:nvSpPr>
@@ -18545,7 +18660,7 @@
       </p:sp>
       <p:sp>
         <p:nvSpPr>
-          <p:cNvPr id="19" name="Rectangle 18"/>
+          <p:cNvPr id="20" name="Rectangle 19"/>
           <p:cNvSpPr/>
           <p:nvPr/>
         </p:nvSpPr>
@@ -18591,7 +18706,7 @@
       </p:sp>
       <p:sp>
         <p:nvSpPr>
-          <p:cNvPr id="20" name="TextBox 19"/>
+          <p:cNvPr id="21" name="TextBox 20"/>
           <p:cNvSpPr txBox="1"/>
           <p:nvPr/>
         </p:nvSpPr>
@@ -18630,7 +18745,7 @@
       </p:sp>
       <p:sp>
         <p:nvSpPr>
-          <p:cNvPr id="21" name="TextBox 20"/>
+          <p:cNvPr id="22" name="TextBox 21"/>
           <p:cNvSpPr txBox="1"/>
           <p:nvPr/>
         </p:nvSpPr>
@@ -18669,7 +18784,7 @@
       </p:sp>
       <p:sp>
         <p:nvSpPr>
-          <p:cNvPr id="22" name="Rectangle 21"/>
+          <p:cNvPr id="23" name="Rectangle 22"/>
           <p:cNvSpPr/>
           <p:nvPr/>
         </p:nvSpPr>
@@ -18713,7 +18828,7 @@
       </p:sp>
       <p:sp>
         <p:nvSpPr>
-          <p:cNvPr id="23" name="Rectangle 22"/>
+          <p:cNvPr id="24" name="Rectangle 23"/>
           <p:cNvSpPr/>
           <p:nvPr/>
         </p:nvSpPr>
@@ -18759,7 +18874,7 @@
       </p:sp>
       <p:sp>
         <p:nvSpPr>
-          <p:cNvPr id="24" name="TextBox 23"/>
+          <p:cNvPr id="25" name="TextBox 24"/>
           <p:cNvSpPr txBox="1"/>
           <p:nvPr/>
         </p:nvSpPr>
@@ -18807,7 +18922,7 @@
       </p:sp>
       <p:sp>
         <p:nvSpPr>
-          <p:cNvPr id="25" name="TextBox 24"/>
+          <p:cNvPr id="26" name="TextBox 25"/>
           <p:cNvSpPr txBox="1"/>
           <p:nvPr/>
         </p:nvSpPr>
@@ -18846,7 +18961,7 @@
       </p:sp>
       <p:sp>
         <p:nvSpPr>
-          <p:cNvPr id="26" name="Rectangle 25"/>
+          <p:cNvPr id="27" name="Rectangle 26"/>
           <p:cNvSpPr/>
           <p:nvPr/>
         </p:nvSpPr>
@@ -18890,7 +19005,7 @@
       </p:sp>
       <p:sp>
         <p:nvSpPr>
-          <p:cNvPr id="27" name="Rectangle 26"/>
+          <p:cNvPr id="28" name="Rectangle 27"/>
           <p:cNvSpPr/>
           <p:nvPr/>
         </p:nvSpPr>
@@ -18936,7 +19051,7 @@
       </p:sp>
       <p:sp>
         <p:nvSpPr>
-          <p:cNvPr id="28" name="TextBox 27"/>
+          <p:cNvPr id="29" name="TextBox 28"/>
           <p:cNvSpPr txBox="1"/>
           <p:nvPr/>
         </p:nvSpPr>
@@ -18984,7 +19099,7 @@
       </p:sp>
       <p:sp>
         <p:nvSpPr>
-          <p:cNvPr id="29" name="TextBox 28"/>
+          <p:cNvPr id="30" name="TextBox 29"/>
           <p:cNvSpPr txBox="1"/>
           <p:nvPr/>
         </p:nvSpPr>
@@ -19023,7 +19138,7 @@
       </p:sp>
       <p:sp>
         <p:nvSpPr>
-          <p:cNvPr id="30" name="TextBox 29"/>
+          <p:cNvPr id="31" name="TextBox 30"/>
           <p:cNvSpPr txBox="1"/>
           <p:nvPr/>
         </p:nvSpPr>
@@ -19062,7 +19177,7 @@
       </p:sp>
       <p:sp>
         <p:nvSpPr>
-          <p:cNvPr id="31" name="Rectangle 30"/>
+          <p:cNvPr id="32" name="Rectangle 31"/>
           <p:cNvSpPr/>
           <p:nvPr/>
         </p:nvSpPr>
@@ -19106,7 +19221,7 @@
       </p:sp>
       <p:sp>
         <p:nvSpPr>
-          <p:cNvPr id="32" name="TextBox 31"/>
+          <p:cNvPr id="33" name="TextBox 32"/>
           <p:cNvSpPr txBox="1"/>
           <p:nvPr/>
         </p:nvSpPr>
@@ -19145,7 +19260,7 @@
       </p:sp>
       <p:sp>
         <p:nvSpPr>
-          <p:cNvPr id="33" name="TextBox 32"/>
+          <p:cNvPr id="34" name="TextBox 33"/>
           <p:cNvSpPr txBox="1"/>
           <p:nvPr/>
         </p:nvSpPr>
@@ -19184,7 +19299,7 @@
       </p:sp>
       <p:sp>
         <p:nvSpPr>
-          <p:cNvPr id="34" name="TextBox 33"/>
+          <p:cNvPr id="35" name="TextBox 34"/>
           <p:cNvSpPr txBox="1"/>
           <p:nvPr/>
         </p:nvSpPr>
@@ -19223,7 +19338,7 @@
       </p:sp>
       <p:sp>
         <p:nvSpPr>
-          <p:cNvPr id="35" name="TextBox 34"/>
+          <p:cNvPr id="36" name="TextBox 35"/>
           <p:cNvSpPr txBox="1"/>
           <p:nvPr/>
         </p:nvSpPr>
@@ -19262,7 +19377,7 @@
       </p:sp>
       <p:sp>
         <p:nvSpPr>
-          <p:cNvPr id="36" name="Rectangle 35"/>
+          <p:cNvPr id="37" name="Rectangle 36"/>
           <p:cNvSpPr/>
           <p:nvPr/>
         </p:nvSpPr>
@@ -19306,7 +19421,7 @@
       </p:sp>
       <p:sp>
         <p:nvSpPr>
-          <p:cNvPr id="37" name="TextBox 36"/>
+          <p:cNvPr id="38" name="TextBox 37"/>
           <p:cNvSpPr txBox="1"/>
           <p:nvPr/>
         </p:nvSpPr>
@@ -19345,7 +19460,7 @@
       </p:sp>
       <p:sp>
         <p:nvSpPr>
-          <p:cNvPr id="38" name="TextBox 37"/>
+          <p:cNvPr id="39" name="TextBox 38"/>
           <p:cNvSpPr txBox="1"/>
           <p:nvPr/>
         </p:nvSpPr>
@@ -19384,7 +19499,7 @@
       </p:sp>
       <p:sp>
         <p:nvSpPr>
-          <p:cNvPr id="39" name="TextBox 38"/>
+          <p:cNvPr id="40" name="TextBox 39"/>
           <p:cNvSpPr txBox="1"/>
           <p:nvPr/>
         </p:nvSpPr>
@@ -19423,7 +19538,7 @@
       </p:sp>
       <p:sp>
         <p:nvSpPr>
-          <p:cNvPr id="40" name="Rounded Rectangle 39"/>
+          <p:cNvPr id="41" name="Rounded Rectangle 40"/>
           <p:cNvSpPr/>
           <p:nvPr/>
         </p:nvSpPr>
@@ -19468,7 +19583,7 @@
       </p:sp>
       <p:sp>
         <p:nvSpPr>
-          <p:cNvPr id="41" name="TextBox 40"/>
+          <p:cNvPr id="42" name="TextBox 41"/>
           <p:cNvSpPr txBox="1"/>
           <p:nvPr/>
         </p:nvSpPr>
@@ -19507,7 +19622,7 @@
       </p:sp>
       <p:sp>
         <p:nvSpPr>
-          <p:cNvPr id="42" name="TextBox 41"/>
+          <p:cNvPr id="43" name="TextBox 42"/>
           <p:cNvSpPr txBox="1"/>
           <p:nvPr/>
         </p:nvSpPr>
@@ -19546,7 +19661,7 @@
       </p:sp>
       <p:sp>
         <p:nvSpPr>
-          <p:cNvPr id="43" name="TextBox 42"/>
+          <p:cNvPr id="44" name="TextBox 43"/>
           <p:cNvSpPr txBox="1"/>
           <p:nvPr/>
         </p:nvSpPr>
@@ -19585,7 +19700,7 @@
       </p:sp>
       <p:sp>
         <p:nvSpPr>
-          <p:cNvPr id="44" name="TextBox 43"/>
+          <p:cNvPr id="45" name="TextBox 44"/>
           <p:cNvSpPr txBox="1"/>
           <p:nvPr/>
         </p:nvSpPr>
@@ -19624,7 +19739,7 @@
       </p:sp>
       <p:sp>
         <p:nvSpPr>
-          <p:cNvPr id="45" name="Rounded Rectangle 44"/>
+          <p:cNvPr id="46" name="Rounded Rectangle 45"/>
           <p:cNvSpPr/>
           <p:nvPr/>
         </p:nvSpPr>
@@ -19669,7 +19784,7 @@
       </p:sp>
       <p:sp>
         <p:nvSpPr>
-          <p:cNvPr id="46" name="TextBox 45"/>
+          <p:cNvPr id="47" name="TextBox 46"/>
           <p:cNvSpPr txBox="1"/>
           <p:nvPr/>
         </p:nvSpPr>
@@ -19708,7 +19823,7 @@
       </p:sp>
       <p:sp>
         <p:nvSpPr>
-          <p:cNvPr id="47" name="Rectangle 46"/>
+          <p:cNvPr id="48" name="Rectangle 47"/>
           <p:cNvSpPr/>
           <p:nvPr/>
         </p:nvSpPr>
@@ -19752,7 +19867,7 @@
       </p:sp>
       <p:sp>
         <p:nvSpPr>
-          <p:cNvPr id="48" name="TextBox 47"/>
+          <p:cNvPr id="49" name="TextBox 48"/>
           <p:cNvSpPr txBox="1"/>
           <p:nvPr/>
         </p:nvSpPr>
@@ -19791,7 +19906,7 @@
       </p:sp>
       <p:sp>
         <p:nvSpPr>
-          <p:cNvPr id="49" name="TextBox 48"/>
+          <p:cNvPr id="50" name="TextBox 49"/>
           <p:cNvSpPr txBox="1"/>
           <p:nvPr/>
         </p:nvSpPr>
@@ -19830,7 +19945,7 @@
       </p:sp>
       <p:sp>
         <p:nvSpPr>
-          <p:cNvPr id="50" name="TextBox 49"/>
+          <p:cNvPr id="51" name="TextBox 50"/>
           <p:cNvSpPr txBox="1"/>
           <p:nvPr/>
         </p:nvSpPr>
@@ -19869,7 +19984,7 @@
       </p:sp>
       <p:sp>
         <p:nvSpPr>
-          <p:cNvPr id="51" name="Rounded Rectangle 50"/>
+          <p:cNvPr id="52" name="Rounded Rectangle 51"/>
           <p:cNvSpPr/>
           <p:nvPr/>
         </p:nvSpPr>
@@ -19914,7 +20029,7 @@
       </p:sp>
       <p:sp>
         <p:nvSpPr>
-          <p:cNvPr id="52" name="TextBox 51"/>
+          <p:cNvPr id="53" name="TextBox 52"/>
           <p:cNvSpPr txBox="1"/>
           <p:nvPr/>
         </p:nvSpPr>
@@ -19953,7 +20068,7 @@
       </p:sp>
       <p:sp>
         <p:nvSpPr>
-          <p:cNvPr id="53" name="TextBox 52"/>
+          <p:cNvPr id="54" name="TextBox 53"/>
           <p:cNvSpPr txBox="1"/>
           <p:nvPr/>
         </p:nvSpPr>
@@ -19992,7 +20107,7 @@
       </p:sp>
       <p:sp>
         <p:nvSpPr>
-          <p:cNvPr id="54" name="TextBox 53"/>
+          <p:cNvPr id="55" name="TextBox 54"/>
           <p:cNvSpPr txBox="1"/>
           <p:nvPr/>
         </p:nvSpPr>
@@ -20031,7 +20146,7 @@
       </p:sp>
       <p:sp>
         <p:nvSpPr>
-          <p:cNvPr id="55" name="TextBox 54"/>
+          <p:cNvPr id="56" name="TextBox 55"/>
           <p:cNvSpPr txBox="1"/>
           <p:nvPr/>
         </p:nvSpPr>
@@ -20070,7 +20185,7 @@
       </p:sp>
       <p:sp>
         <p:nvSpPr>
-          <p:cNvPr id="56" name="Rounded Rectangle 55"/>
+          <p:cNvPr id="57" name="Rounded Rectangle 56"/>
           <p:cNvSpPr/>
           <p:nvPr/>
         </p:nvSpPr>
@@ -20115,7 +20230,7 @@
       </p:sp>
       <p:sp>
         <p:nvSpPr>
-          <p:cNvPr id="57" name="TextBox 56"/>
+          <p:cNvPr id="58" name="TextBox 57"/>
           <p:cNvSpPr txBox="1"/>
           <p:nvPr/>
         </p:nvSpPr>
@@ -20154,7 +20269,7 @@
       </p:sp>
       <p:sp>
         <p:nvSpPr>
-          <p:cNvPr id="58" name="Rectangle 57"/>
+          <p:cNvPr id="59" name="Rectangle 58"/>
           <p:cNvSpPr/>
           <p:nvPr/>
         </p:nvSpPr>
@@ -20198,7 +20313,7 @@
       </p:sp>
       <p:sp>
         <p:nvSpPr>
-          <p:cNvPr id="59" name="TextBox 58"/>
+          <p:cNvPr id="60" name="TextBox 59"/>
           <p:cNvSpPr txBox="1"/>
           <p:nvPr/>
         </p:nvSpPr>
@@ -20237,7 +20352,7 @@
       </p:sp>
       <p:sp>
         <p:nvSpPr>
-          <p:cNvPr id="60" name="TextBox 59"/>
+          <p:cNvPr id="61" name="TextBox 60"/>
           <p:cNvSpPr txBox="1"/>
           <p:nvPr/>
         </p:nvSpPr>
@@ -20276,7 +20391,7 @@
       </p:sp>
       <p:sp>
         <p:nvSpPr>
-          <p:cNvPr id="61" name="TextBox 60"/>
+          <p:cNvPr id="62" name="TextBox 61"/>
           <p:cNvSpPr txBox="1"/>
           <p:nvPr/>
         </p:nvSpPr>
@@ -20315,7 +20430,7 @@
       </p:sp>
       <p:sp>
         <p:nvSpPr>
-          <p:cNvPr id="62" name="Rounded Rectangle 61"/>
+          <p:cNvPr id="63" name="Rounded Rectangle 62"/>
           <p:cNvSpPr/>
           <p:nvPr/>
         </p:nvSpPr>
@@ -20360,7 +20475,7 @@
       </p:sp>
       <p:sp>
         <p:nvSpPr>
-          <p:cNvPr id="63" name="TextBox 62"/>
+          <p:cNvPr id="64" name="TextBox 63"/>
           <p:cNvSpPr txBox="1"/>
           <p:nvPr/>
         </p:nvSpPr>
@@ -20399,7 +20514,7 @@
       </p:sp>
       <p:sp>
         <p:nvSpPr>
-          <p:cNvPr id="64" name="TextBox 63"/>
+          <p:cNvPr id="65" name="TextBox 64"/>
           <p:cNvSpPr txBox="1"/>
           <p:nvPr/>
         </p:nvSpPr>
@@ -20438,7 +20553,7 @@
       </p:sp>
       <p:sp>
         <p:nvSpPr>
-          <p:cNvPr id="65" name="TextBox 64"/>
+          <p:cNvPr id="66" name="TextBox 65"/>
           <p:cNvSpPr txBox="1"/>
           <p:nvPr/>
         </p:nvSpPr>
@@ -20477,7 +20592,7 @@
       </p:sp>
       <p:sp>
         <p:nvSpPr>
-          <p:cNvPr id="66" name="TextBox 65"/>
+          <p:cNvPr id="67" name="TextBox 66"/>
           <p:cNvSpPr txBox="1"/>
           <p:nvPr/>
         </p:nvSpPr>
@@ -20516,7 +20631,7 @@
       </p:sp>
       <p:sp>
         <p:nvSpPr>
-          <p:cNvPr id="67" name="Rounded Rectangle 66"/>
+          <p:cNvPr id="68" name="Rounded Rectangle 67"/>
           <p:cNvSpPr/>
           <p:nvPr/>
         </p:nvSpPr>
@@ -20561,7 +20676,7 @@
       </p:sp>
       <p:sp>
         <p:nvSpPr>
-          <p:cNvPr id="68" name="TextBox 67"/>
+          <p:cNvPr id="69" name="TextBox 68"/>
           <p:cNvSpPr txBox="1"/>
           <p:nvPr/>
         </p:nvSpPr>
@@ -20600,7 +20715,7 @@
       </p:sp>
       <p:sp>
         <p:nvSpPr>
-          <p:cNvPr id="69" name="Rectangle 68"/>
+          <p:cNvPr id="70" name="Rectangle 69"/>
           <p:cNvSpPr/>
           <p:nvPr/>
         </p:nvSpPr>
@@ -20644,7 +20759,7 @@
       </p:sp>
       <p:sp>
         <p:nvSpPr>
-          <p:cNvPr id="70" name="TextBox 69"/>
+          <p:cNvPr id="71" name="TextBox 70"/>
           <p:cNvSpPr txBox="1"/>
           <p:nvPr/>
         </p:nvSpPr>
@@ -20683,7 +20798,7 @@
       </p:sp>
       <p:sp>
         <p:nvSpPr>
-          <p:cNvPr id="71" name="TextBox 70"/>
+          <p:cNvPr id="72" name="TextBox 71"/>
           <p:cNvSpPr txBox="1"/>
           <p:nvPr/>
         </p:nvSpPr>
@@ -20722,7 +20837,7 @@
       </p:sp>
       <p:sp>
         <p:nvSpPr>
-          <p:cNvPr id="72" name="TextBox 71"/>
+          <p:cNvPr id="73" name="TextBox 72"/>
           <p:cNvSpPr txBox="1"/>
           <p:nvPr/>
         </p:nvSpPr>
@@ -20761,7 +20876,7 @@
       </p:sp>
       <p:sp>
         <p:nvSpPr>
-          <p:cNvPr id="73" name="Rounded Rectangle 72"/>
+          <p:cNvPr id="74" name="Rounded Rectangle 73"/>
           <p:cNvSpPr/>
           <p:nvPr/>
         </p:nvSpPr>
@@ -20806,7 +20921,7 @@
       </p:sp>
       <p:sp>
         <p:nvSpPr>
-          <p:cNvPr id="74" name="TextBox 73"/>
+          <p:cNvPr id="75" name="TextBox 74"/>
           <p:cNvSpPr txBox="1"/>
           <p:nvPr/>
         </p:nvSpPr>
@@ -20845,7 +20960,7 @@
       </p:sp>
       <p:sp>
         <p:nvSpPr>
-          <p:cNvPr id="75" name="TextBox 74"/>
+          <p:cNvPr id="76" name="TextBox 75"/>
           <p:cNvSpPr txBox="1"/>
           <p:nvPr/>
         </p:nvSpPr>
@@ -20884,7 +20999,7 @@
       </p:sp>
       <p:sp>
         <p:nvSpPr>
-          <p:cNvPr id="76" name="TextBox 75"/>
+          <p:cNvPr id="77" name="TextBox 76"/>
           <p:cNvSpPr txBox="1"/>
           <p:nvPr/>
         </p:nvSpPr>
@@ -20923,7 +21038,7 @@
       </p:sp>
       <p:sp>
         <p:nvSpPr>
-          <p:cNvPr id="77" name="TextBox 76"/>
+          <p:cNvPr id="78" name="TextBox 77"/>
           <p:cNvSpPr txBox="1"/>
           <p:nvPr/>
         </p:nvSpPr>
@@ -20962,7 +21077,7 @@
       </p:sp>
       <p:sp>
         <p:nvSpPr>
-          <p:cNvPr id="78" name="Rounded Rectangle 77"/>
+          <p:cNvPr id="79" name="Rounded Rectangle 78"/>
           <p:cNvSpPr/>
           <p:nvPr/>
         </p:nvSpPr>
@@ -21007,7 +21122,7 @@
       </p:sp>
       <p:sp>
         <p:nvSpPr>
-          <p:cNvPr id="79" name="TextBox 78"/>
+          <p:cNvPr id="80" name="TextBox 79"/>
           <p:cNvSpPr txBox="1"/>
           <p:nvPr/>
         </p:nvSpPr>
@@ -21046,7 +21161,7 @@
       </p:sp>
       <p:sp>
         <p:nvSpPr>
-          <p:cNvPr id="80" name="Rectangle 79"/>
+          <p:cNvPr id="81" name="Rectangle 80"/>
           <p:cNvSpPr/>
           <p:nvPr/>
         </p:nvSpPr>
@@ -21090,7 +21205,7 @@
       </p:sp>
       <p:sp>
         <p:nvSpPr>
-          <p:cNvPr id="81" name="TextBox 80"/>
+          <p:cNvPr id="82" name="TextBox 81"/>
           <p:cNvSpPr txBox="1"/>
           <p:nvPr/>
         </p:nvSpPr>
@@ -21129,7 +21244,7 @@
       </p:sp>
       <p:sp>
         <p:nvSpPr>
-          <p:cNvPr id="82" name="TextBox 81"/>
+          <p:cNvPr id="83" name="TextBox 82"/>
           <p:cNvSpPr txBox="1"/>
           <p:nvPr/>
         </p:nvSpPr>
@@ -21168,7 +21283,7 @@
       </p:sp>
       <p:sp>
         <p:nvSpPr>
-          <p:cNvPr id="83" name="TextBox 82"/>
+          <p:cNvPr id="84" name="TextBox 83"/>
           <p:cNvSpPr txBox="1"/>
           <p:nvPr/>
         </p:nvSpPr>
@@ -21207,7 +21322,7 @@
       </p:sp>
       <p:sp>
         <p:nvSpPr>
-          <p:cNvPr id="84" name="Rounded Rectangle 83"/>
+          <p:cNvPr id="85" name="Rounded Rectangle 84"/>
           <p:cNvSpPr/>
           <p:nvPr/>
         </p:nvSpPr>
@@ -21252,7 +21367,7 @@
       </p:sp>
       <p:sp>
         <p:nvSpPr>
-          <p:cNvPr id="85" name="TextBox 84"/>
+          <p:cNvPr id="86" name="TextBox 85"/>
           <p:cNvSpPr txBox="1"/>
           <p:nvPr/>
         </p:nvSpPr>
@@ -21291,7 +21406,7 @@
       </p:sp>
       <p:sp>
         <p:nvSpPr>
-          <p:cNvPr id="86" name="TextBox 85"/>
+          <p:cNvPr id="87" name="TextBox 86"/>
           <p:cNvSpPr txBox="1"/>
           <p:nvPr/>
         </p:nvSpPr>
@@ -21330,7 +21445,7 @@
       </p:sp>
       <p:sp>
         <p:nvSpPr>
-          <p:cNvPr id="87" name="TextBox 86"/>
+          <p:cNvPr id="88" name="TextBox 87"/>
           <p:cNvSpPr txBox="1"/>
           <p:nvPr/>
         </p:nvSpPr>
@@ -21369,7 +21484,7 @@
       </p:sp>
       <p:sp>
         <p:nvSpPr>
-          <p:cNvPr id="88" name="TextBox 87"/>
+          <p:cNvPr id="89" name="TextBox 88"/>
           <p:cNvSpPr txBox="1"/>
           <p:nvPr/>
         </p:nvSpPr>
@@ -21408,7 +21523,7 @@
       </p:sp>
       <p:sp>
         <p:nvSpPr>
-          <p:cNvPr id="89" name="Rounded Rectangle 88"/>
+          <p:cNvPr id="90" name="Rounded Rectangle 89"/>
           <p:cNvSpPr/>
           <p:nvPr/>
         </p:nvSpPr>
@@ -21453,7 +21568,7 @@
       </p:sp>
       <p:sp>
         <p:nvSpPr>
-          <p:cNvPr id="90" name="TextBox 89"/>
+          <p:cNvPr id="91" name="TextBox 90"/>
           <p:cNvSpPr txBox="1"/>
           <p:nvPr/>
         </p:nvSpPr>
@@ -21596,16 +21711,40 @@
           </a:p>
         </p:txBody>
       </p:sp>
-      <p:sp>
-        <p:nvSpPr>
-          <p:cNvPr id="4" name="Rectangle 3"/>
+      <p:pic>
+        <p:nvPicPr>
+          <p:cNvPr id="4" name="Picture 3" descr="gigshield-dark.png"/>
+          <p:cNvPicPr>
+            <a:picLocks noChangeAspect="1"/>
+          </p:cNvPicPr>
+          <p:nvPr/>
+        </p:nvPicPr>
+        <p:blipFill>
+          <a:blip r:embed="rId2"/>
+          <a:stretch>
+            <a:fillRect/>
+          </a:stretch>
+        </p:blipFill>
+        <p:spPr>
+          <a:xfrm>
+            <a:off x="320040" y="54864"/>
+            <a:ext cx="443132" cy="411480"/>
+          </a:xfrm>
+          <a:prstGeom prst="rect">
+            <a:avLst/>
+          </a:prstGeom>
+        </p:spPr>
+      </p:pic>
+      <p:sp>
+        <p:nvSpPr>
+          <p:cNvPr id="5" name="Rectangle 4"/>
           <p:cNvSpPr/>
           <p:nvPr/>
         </p:nvSpPr>
         <p:spPr>
           <a:xfrm>
-            <a:off x="411480" y="201168"/>
-            <a:ext cx="91440" cy="91440"/>
+            <a:off x="1691640" y="164592"/>
+            <a:ext cx="18288" cy="182880"/>
           </a:xfrm>
           <a:prstGeom prst="rect">
             <a:avLst/>
@@ -21616,6 +21755,7 @@
           <a:ln>
             <a:noFill/>
           </a:ln>
+          <a:effectLst/>
         </p:spPr>
         <p:style>
           <a:lnRef idx="1">
@@ -21641,13 +21781,13 @@
       </p:sp>
       <p:sp>
         <p:nvSpPr>
-          <p:cNvPr id="5" name="TextBox 4"/>
-          <p:cNvSpPr txBox="1"/>
-          <p:nvPr/>
-        </p:nvSpPr>
-        <p:spPr>
-          <a:xfrm>
-            <a:off x="594360" y="118872"/>
+          <p:cNvPr id="6" name="TextBox 5"/>
+          <p:cNvSpPr txBox="1"/>
+          <p:nvPr/>
+        </p:nvSpPr>
+        <p:spPr>
+          <a:xfrm>
+            <a:off x="1783080" y="118872"/>
             <a:ext cx="7315200" cy="274320"/>
           </a:xfrm>
           <a:prstGeom prst="rect">
@@ -21667,20 +21807,20 @@
               </a:lnSpc>
             </a:pPr>
             <a:r>
-              <a:rPr sz="1200" b="1" i="0">
-                <a:solidFill>
-                  <a:srgbClr val="FFFFFF"/>
-                </a:solidFill>
-                <a:latin typeface="Inter"/>
-              </a:rPr>
-              <a:t>GigShield   |   Phase 3 Final Submission</a:t>
-            </a:r>
-          </a:p>
-        </p:txBody>
-      </p:sp>
-      <p:sp>
-        <p:nvSpPr>
-          <p:cNvPr id="6" name="TextBox 5"/>
+              <a:rPr sz="1100" b="1" i="0">
+                <a:solidFill>
+                  <a:srgbClr val="D8E2F0"/>
+                </a:solidFill>
+                <a:latin typeface="Inter"/>
+              </a:rPr>
+              <a:t>Phase 3 Final Submission   ·   Guidewire DEVTrails 2026</a:t>
+            </a:r>
+          </a:p>
+        </p:txBody>
+      </p:sp>
+      <p:sp>
+        <p:nvSpPr>
+          <p:cNvPr id="7" name="TextBox 6"/>
           <p:cNvSpPr txBox="1"/>
           <p:nvPr/>
         </p:nvSpPr>
@@ -21719,7 +21859,7 @@
       </p:sp>
       <p:sp>
         <p:nvSpPr>
-          <p:cNvPr id="7" name="Rectangle 6"/>
+          <p:cNvPr id="8" name="Rectangle 7"/>
           <p:cNvSpPr/>
           <p:nvPr/>
         </p:nvSpPr>
@@ -21763,7 +21903,7 @@
       </p:sp>
       <p:sp>
         <p:nvSpPr>
-          <p:cNvPr id="8" name="TextBox 7"/>
+          <p:cNvPr id="9" name="TextBox 8"/>
           <p:cNvSpPr txBox="1"/>
           <p:nvPr/>
         </p:nvSpPr>
@@ -21802,7 +21942,7 @@
       </p:sp>
       <p:sp>
         <p:nvSpPr>
-          <p:cNvPr id="9" name="Rounded Rectangle 8"/>
+          <p:cNvPr id="10" name="Rounded Rectangle 9"/>
           <p:cNvSpPr/>
           <p:nvPr/>
         </p:nvSpPr>
@@ -21847,7 +21987,7 @@
       </p:sp>
       <p:sp>
         <p:nvSpPr>
-          <p:cNvPr id="10" name="TextBox 9"/>
+          <p:cNvPr id="11" name="TextBox 10"/>
           <p:cNvSpPr txBox="1"/>
           <p:nvPr/>
         </p:nvSpPr>
@@ -21886,7 +22026,7 @@
       </p:sp>
       <p:sp>
         <p:nvSpPr>
-          <p:cNvPr id="11" name="Rectangle 10"/>
+          <p:cNvPr id="12" name="Rectangle 11"/>
           <p:cNvSpPr/>
           <p:nvPr/>
         </p:nvSpPr>
@@ -21930,7 +22070,7 @@
       </p:sp>
       <p:sp>
         <p:nvSpPr>
-          <p:cNvPr id="12" name="TextBox 11"/>
+          <p:cNvPr id="13" name="TextBox 12"/>
           <p:cNvSpPr txBox="1"/>
           <p:nvPr/>
         </p:nvSpPr>
@@ -21969,7 +22109,7 @@
       </p:sp>
       <p:sp>
         <p:nvSpPr>
-          <p:cNvPr id="13" name="TextBox 12"/>
+          <p:cNvPr id="14" name="TextBox 13"/>
           <p:cNvSpPr txBox="1"/>
           <p:nvPr/>
         </p:nvSpPr>
@@ -22026,7 +22166,7 @@
       </p:sp>
       <p:sp>
         <p:nvSpPr>
-          <p:cNvPr id="14" name="Rectangle 13"/>
+          <p:cNvPr id="15" name="Rectangle 14"/>
           <p:cNvSpPr/>
           <p:nvPr/>
         </p:nvSpPr>
@@ -22070,7 +22210,7 @@
       </p:sp>
       <p:sp>
         <p:nvSpPr>
-          <p:cNvPr id="15" name="Rectangle 14"/>
+          <p:cNvPr id="16" name="Rectangle 15"/>
           <p:cNvSpPr/>
           <p:nvPr/>
         </p:nvSpPr>
@@ -22116,7 +22256,7 @@
       </p:sp>
       <p:sp>
         <p:nvSpPr>
-          <p:cNvPr id="16" name="Rounded Rectangle 15"/>
+          <p:cNvPr id="17" name="Rounded Rectangle 16"/>
           <p:cNvSpPr/>
           <p:nvPr/>
         </p:nvSpPr>
@@ -22161,7 +22301,7 @@
       </p:sp>
       <p:sp>
         <p:nvSpPr>
-          <p:cNvPr id="17" name="TextBox 16"/>
+          <p:cNvPr id="18" name="TextBox 17"/>
           <p:cNvSpPr txBox="1"/>
           <p:nvPr/>
         </p:nvSpPr>
@@ -22200,7 +22340,7 @@
       </p:sp>
       <p:sp>
         <p:nvSpPr>
-          <p:cNvPr id="18" name="TextBox 17"/>
+          <p:cNvPr id="19" name="TextBox 18"/>
           <p:cNvSpPr txBox="1"/>
           <p:nvPr/>
         </p:nvSpPr>
@@ -22239,7 +22379,7 @@
       </p:sp>
       <p:sp>
         <p:nvSpPr>
-          <p:cNvPr id="19" name="TextBox 18"/>
+          <p:cNvPr id="20" name="TextBox 19"/>
           <p:cNvSpPr txBox="1"/>
           <p:nvPr/>
         </p:nvSpPr>
@@ -22371,7 +22511,7 @@
       </p:sp>
       <p:sp>
         <p:nvSpPr>
-          <p:cNvPr id="20" name="Rectangle 19"/>
+          <p:cNvPr id="21" name="Rectangle 20"/>
           <p:cNvSpPr/>
           <p:nvPr/>
         </p:nvSpPr>
@@ -22415,7 +22555,7 @@
       </p:sp>
       <p:sp>
         <p:nvSpPr>
-          <p:cNvPr id="21" name="Rectangle 20"/>
+          <p:cNvPr id="22" name="Rectangle 21"/>
           <p:cNvSpPr/>
           <p:nvPr/>
         </p:nvSpPr>
@@ -22461,7 +22601,7 @@
       </p:sp>
       <p:sp>
         <p:nvSpPr>
-          <p:cNvPr id="22" name="Rounded Rectangle 21"/>
+          <p:cNvPr id="23" name="Rounded Rectangle 22"/>
           <p:cNvSpPr/>
           <p:nvPr/>
         </p:nvSpPr>
@@ -22506,7 +22646,7 @@
       </p:sp>
       <p:sp>
         <p:nvSpPr>
-          <p:cNvPr id="23" name="TextBox 22"/>
+          <p:cNvPr id="24" name="TextBox 23"/>
           <p:cNvSpPr txBox="1"/>
           <p:nvPr/>
         </p:nvSpPr>
@@ -22545,7 +22685,7 @@
       </p:sp>
       <p:sp>
         <p:nvSpPr>
-          <p:cNvPr id="24" name="TextBox 23"/>
+          <p:cNvPr id="25" name="TextBox 24"/>
           <p:cNvSpPr txBox="1"/>
           <p:nvPr/>
         </p:nvSpPr>
@@ -22584,7 +22724,7 @@
       </p:sp>
       <p:sp>
         <p:nvSpPr>
-          <p:cNvPr id="25" name="TextBox 24"/>
+          <p:cNvPr id="26" name="TextBox 25"/>
           <p:cNvSpPr txBox="1"/>
           <p:nvPr/>
         </p:nvSpPr>
@@ -22716,7 +22856,7 @@
       </p:sp>
       <p:sp>
         <p:nvSpPr>
-          <p:cNvPr id="26" name="Rectangle 25"/>
+          <p:cNvPr id="27" name="Rectangle 26"/>
           <p:cNvSpPr/>
           <p:nvPr/>
         </p:nvSpPr>
@@ -22760,7 +22900,7 @@
       </p:sp>
       <p:sp>
         <p:nvSpPr>
-          <p:cNvPr id="27" name="Rectangle 26"/>
+          <p:cNvPr id="28" name="Rectangle 27"/>
           <p:cNvSpPr/>
           <p:nvPr/>
         </p:nvSpPr>
@@ -22806,7 +22946,7 @@
       </p:sp>
       <p:sp>
         <p:nvSpPr>
-          <p:cNvPr id="28" name="Rounded Rectangle 27"/>
+          <p:cNvPr id="29" name="Rounded Rectangle 28"/>
           <p:cNvSpPr/>
           <p:nvPr/>
         </p:nvSpPr>
@@ -22851,7 +22991,7 @@
       </p:sp>
       <p:sp>
         <p:nvSpPr>
-          <p:cNvPr id="29" name="TextBox 28"/>
+          <p:cNvPr id="30" name="TextBox 29"/>
           <p:cNvSpPr txBox="1"/>
           <p:nvPr/>
         </p:nvSpPr>
@@ -22890,7 +23030,7 @@
       </p:sp>
       <p:sp>
         <p:nvSpPr>
-          <p:cNvPr id="30" name="TextBox 29"/>
+          <p:cNvPr id="31" name="TextBox 30"/>
           <p:cNvSpPr txBox="1"/>
           <p:nvPr/>
         </p:nvSpPr>
@@ -22929,7 +23069,7 @@
       </p:sp>
       <p:sp>
         <p:nvSpPr>
-          <p:cNvPr id="31" name="TextBox 30"/>
+          <p:cNvPr id="32" name="TextBox 31"/>
           <p:cNvSpPr txBox="1"/>
           <p:nvPr/>
         </p:nvSpPr>
@@ -23061,7 +23201,7 @@
       </p:sp>
       <p:sp>
         <p:nvSpPr>
-          <p:cNvPr id="32" name="Rectangle 31"/>
+          <p:cNvPr id="33" name="Rectangle 32"/>
           <p:cNvSpPr/>
           <p:nvPr/>
         </p:nvSpPr>
@@ -23105,7 +23245,7 @@
       </p:sp>
       <p:sp>
         <p:nvSpPr>
-          <p:cNvPr id="33" name="TextBox 32"/>
+          <p:cNvPr id="34" name="TextBox 33"/>
           <p:cNvSpPr txBox="1"/>
           <p:nvPr/>
         </p:nvSpPr>
@@ -23332,15 +23472,39 @@
           </a:p>
         </p:txBody>
       </p:sp>
-      <p:sp>
-        <p:nvSpPr>
-          <p:cNvPr id="6" name="TextBox 5"/>
-          <p:cNvSpPr txBox="1"/>
-          <p:nvPr/>
-        </p:nvSpPr>
-        <p:spPr>
-          <a:xfrm>
-            <a:off x="914400" y="2103120"/>
+      <p:pic>
+        <p:nvPicPr>
+          <p:cNvPr id="6" name="Picture 5" descr="gigshield-dark.png"/>
+          <p:cNvPicPr>
+            <a:picLocks noChangeAspect="1"/>
+          </p:cNvPicPr>
+          <p:nvPr/>
+        </p:nvPicPr>
+        <p:blipFill>
+          <a:blip r:embed="rId2"/>
+          <a:stretch>
+            <a:fillRect/>
+          </a:stretch>
+        </p:blipFill>
+        <p:spPr>
+          <a:xfrm>
+            <a:off x="5431149" y="1005840"/>
+            <a:ext cx="1329397" cy="1234440"/>
+          </a:xfrm>
+          <a:prstGeom prst="rect">
+            <a:avLst/>
+          </a:prstGeom>
+        </p:spPr>
+      </p:pic>
+      <p:sp>
+        <p:nvSpPr>
+          <p:cNvPr id="7" name="TextBox 6"/>
+          <p:cNvSpPr txBox="1"/>
+          <p:nvPr/>
+        </p:nvSpPr>
+        <p:spPr>
+          <a:xfrm>
+            <a:off x="914400" y="2468880"/>
             <a:ext cx="10332720" cy="1371600"/>
           </a:xfrm>
           <a:prstGeom prst="rect">
@@ -23360,7 +23524,7 @@
               </a:lnSpc>
             </a:pPr>
             <a:r>
-              <a:rPr sz="7200" b="1" i="0">
+              <a:rPr sz="6400" b="1" i="0">
                 <a:solidFill>
                   <a:srgbClr val="FFFFFF"/>
                 </a:solidFill>
@@ -23369,7 +23533,7 @@
               <a:t>Thank </a:t>
             </a:r>
             <a:r>
-              <a:rPr sz="7200" b="1" i="0">
+              <a:rPr sz="6400" b="1" i="0">
                 <a:solidFill>
                   <a:srgbClr val="F26522"/>
                 </a:solidFill>
@@ -23378,7 +23542,7 @@
               <a:t>you</a:t>
             </a:r>
             <a:r>
-              <a:rPr sz="7200" b="1" i="0">
+              <a:rPr sz="6400" b="1" i="0">
                 <a:solidFill>
                   <a:srgbClr val="FFFFFF"/>
                 </a:solidFill>
@@ -23391,13 +23555,13 @@
       </p:sp>
       <p:sp>
         <p:nvSpPr>
-          <p:cNvPr id="7" name="TextBox 6"/>
-          <p:cNvSpPr txBox="1"/>
-          <p:nvPr/>
-        </p:nvSpPr>
-        <p:spPr>
-          <a:xfrm>
-            <a:off x="914400" y="3383280"/>
+          <p:cNvPr id="8" name="TextBox 7"/>
+          <p:cNvSpPr txBox="1"/>
+          <p:nvPr/>
+        </p:nvSpPr>
+        <p:spPr>
+          <a:xfrm>
+            <a:off x="914400" y="3657600"/>
             <a:ext cx="10332720" cy="457200"/>
           </a:xfrm>
           <a:prstGeom prst="rect">
@@ -23417,7 +23581,7 @@
               </a:lnSpc>
             </a:pPr>
             <a:r>
-              <a:rPr sz="1900" b="0" i="1">
+              <a:rPr sz="1700" b="0" i="1">
                 <a:solidFill>
                   <a:srgbClr val="D0D8E8"/>
                 </a:solidFill>
@@ -23430,13 +23594,13 @@
       </p:sp>
       <p:sp>
         <p:nvSpPr>
-          <p:cNvPr id="8" name="Rectangle 7"/>
+          <p:cNvPr id="9" name="Rectangle 8"/>
           <p:cNvSpPr/>
           <p:nvPr/>
         </p:nvSpPr>
         <p:spPr>
           <a:xfrm>
-            <a:off x="586587" y="4480560"/>
+            <a:off x="586587" y="4572000"/>
             <a:ext cx="2651760" cy="1188720"/>
           </a:xfrm>
           <a:prstGeom prst="rect">
@@ -23476,13 +23640,13 @@
       </p:sp>
       <p:sp>
         <p:nvSpPr>
-          <p:cNvPr id="9" name="TextBox 8"/>
-          <p:cNvSpPr txBox="1"/>
-          <p:nvPr/>
-        </p:nvSpPr>
-        <p:spPr>
-          <a:xfrm>
-            <a:off x="815187" y="4709160"/>
+          <p:cNvPr id="10" name="TextBox 9"/>
+          <p:cNvSpPr txBox="1"/>
+          <p:nvPr/>
+        </p:nvSpPr>
+        <p:spPr>
+          <a:xfrm>
+            <a:off x="815187" y="4800600"/>
             <a:ext cx="2194560" cy="274320"/>
           </a:xfrm>
           <a:prstGeom prst="rect">
@@ -23515,13 +23679,13 @@
       </p:sp>
       <p:sp>
         <p:nvSpPr>
-          <p:cNvPr id="10" name="TextBox 9"/>
-          <p:cNvSpPr txBox="1"/>
-          <p:nvPr/>
-        </p:nvSpPr>
-        <p:spPr>
-          <a:xfrm>
-            <a:off x="815187" y="4983480"/>
+          <p:cNvPr id="11" name="TextBox 10"/>
+          <p:cNvSpPr txBox="1"/>
+          <p:nvPr/>
+        </p:nvSpPr>
+        <p:spPr>
+          <a:xfrm>
+            <a:off x="815187" y="5074920"/>
             <a:ext cx="2194560" cy="640080"/>
           </a:xfrm>
           <a:prstGeom prst="rect">
@@ -23554,13 +23718,13 @@
       </p:sp>
       <p:sp>
         <p:nvSpPr>
-          <p:cNvPr id="11" name="Rectangle 10"/>
+          <p:cNvPr id="12" name="Rectangle 11"/>
           <p:cNvSpPr/>
           <p:nvPr/>
         </p:nvSpPr>
         <p:spPr>
           <a:xfrm>
-            <a:off x="3375507" y="4480560"/>
+            <a:off x="3375507" y="4572000"/>
             <a:ext cx="2651760" cy="1188720"/>
           </a:xfrm>
           <a:prstGeom prst="rect">
@@ -23600,13 +23764,13 @@
       </p:sp>
       <p:sp>
         <p:nvSpPr>
-          <p:cNvPr id="12" name="TextBox 11"/>
-          <p:cNvSpPr txBox="1"/>
-          <p:nvPr/>
-        </p:nvSpPr>
-        <p:spPr>
-          <a:xfrm>
-            <a:off x="3604107" y="4709160"/>
+          <p:cNvPr id="13" name="TextBox 12"/>
+          <p:cNvSpPr txBox="1"/>
+          <p:nvPr/>
+        </p:nvSpPr>
+        <p:spPr>
+          <a:xfrm>
+            <a:off x="3604107" y="4800600"/>
             <a:ext cx="2194560" cy="274320"/>
           </a:xfrm>
           <a:prstGeom prst="rect">
@@ -23639,13 +23803,13 @@
       </p:sp>
       <p:sp>
         <p:nvSpPr>
-          <p:cNvPr id="13" name="TextBox 12"/>
-          <p:cNvSpPr txBox="1"/>
-          <p:nvPr/>
-        </p:nvSpPr>
-        <p:spPr>
-          <a:xfrm>
-            <a:off x="3604107" y="4983480"/>
+          <p:cNvPr id="14" name="TextBox 13"/>
+          <p:cNvSpPr txBox="1"/>
+          <p:nvPr/>
+        </p:nvSpPr>
+        <p:spPr>
+          <a:xfrm>
+            <a:off x="3604107" y="5074920"/>
             <a:ext cx="2194560" cy="640080"/>
           </a:xfrm>
           <a:prstGeom prst="rect">
@@ -23678,13 +23842,13 @@
       </p:sp>
       <p:sp>
         <p:nvSpPr>
-          <p:cNvPr id="14" name="Rectangle 13"/>
+          <p:cNvPr id="15" name="Rectangle 14"/>
           <p:cNvSpPr/>
           <p:nvPr/>
         </p:nvSpPr>
         <p:spPr>
           <a:xfrm>
-            <a:off x="6164427" y="4480560"/>
+            <a:off x="6164427" y="4572000"/>
             <a:ext cx="2651760" cy="1188720"/>
           </a:xfrm>
           <a:prstGeom prst="rect">
@@ -23724,13 +23888,13 @@
       </p:sp>
       <p:sp>
         <p:nvSpPr>
-          <p:cNvPr id="15" name="TextBox 14"/>
-          <p:cNvSpPr txBox="1"/>
-          <p:nvPr/>
-        </p:nvSpPr>
-        <p:spPr>
-          <a:xfrm>
-            <a:off x="6393027" y="4709160"/>
+          <p:cNvPr id="16" name="TextBox 15"/>
+          <p:cNvSpPr txBox="1"/>
+          <p:nvPr/>
+        </p:nvSpPr>
+        <p:spPr>
+          <a:xfrm>
+            <a:off x="6393027" y="4800600"/>
             <a:ext cx="2194560" cy="274320"/>
           </a:xfrm>
           <a:prstGeom prst="rect">
@@ -23763,13 +23927,13 @@
       </p:sp>
       <p:sp>
         <p:nvSpPr>
-          <p:cNvPr id="16" name="TextBox 15"/>
-          <p:cNvSpPr txBox="1"/>
-          <p:nvPr/>
-        </p:nvSpPr>
-        <p:spPr>
-          <a:xfrm>
-            <a:off x="6393027" y="4983480"/>
+          <p:cNvPr id="17" name="TextBox 16"/>
+          <p:cNvSpPr txBox="1"/>
+          <p:nvPr/>
+        </p:nvSpPr>
+        <p:spPr>
+          <a:xfrm>
+            <a:off x="6393027" y="5074920"/>
             <a:ext cx="2194560" cy="640080"/>
           </a:xfrm>
           <a:prstGeom prst="rect">
@@ -23818,13 +23982,13 @@
       </p:sp>
       <p:sp>
         <p:nvSpPr>
-          <p:cNvPr id="17" name="Rectangle 16"/>
+          <p:cNvPr id="18" name="Rectangle 17"/>
           <p:cNvSpPr/>
           <p:nvPr/>
         </p:nvSpPr>
         <p:spPr>
           <a:xfrm>
-            <a:off x="8953347" y="4480560"/>
+            <a:off x="8953347" y="4572000"/>
             <a:ext cx="2651760" cy="1188720"/>
           </a:xfrm>
           <a:prstGeom prst="rect">
@@ -23864,13 +24028,13 @@
       </p:sp>
       <p:sp>
         <p:nvSpPr>
-          <p:cNvPr id="18" name="TextBox 17"/>
-          <p:cNvSpPr txBox="1"/>
-          <p:nvPr/>
-        </p:nvSpPr>
-        <p:spPr>
-          <a:xfrm>
-            <a:off x="9181947" y="4709160"/>
+          <p:cNvPr id="19" name="TextBox 18"/>
+          <p:cNvSpPr txBox="1"/>
+          <p:nvPr/>
+        </p:nvSpPr>
+        <p:spPr>
+          <a:xfrm>
+            <a:off x="9181947" y="4800600"/>
             <a:ext cx="2194560" cy="274320"/>
           </a:xfrm>
           <a:prstGeom prst="rect">
@@ -23903,13 +24067,13 @@
       </p:sp>
       <p:sp>
         <p:nvSpPr>
-          <p:cNvPr id="19" name="TextBox 18"/>
-          <p:cNvSpPr txBox="1"/>
-          <p:nvPr/>
-        </p:nvSpPr>
-        <p:spPr>
-          <a:xfrm>
-            <a:off x="9181947" y="4983480"/>
+          <p:cNvPr id="20" name="TextBox 19"/>
+          <p:cNvSpPr txBox="1"/>
+          <p:nvPr/>
+        </p:nvSpPr>
+        <p:spPr>
+          <a:xfrm>
+            <a:off x="9181947" y="5074920"/>
             <a:ext cx="2194560" cy="640080"/>
           </a:xfrm>
           <a:prstGeom prst="rect">
@@ -23942,7 +24106,7 @@
       </p:sp>
       <p:sp>
         <p:nvSpPr>
-          <p:cNvPr id="20" name="TextBox 19"/>
+          <p:cNvPr id="21" name="TextBox 20"/>
           <p:cNvSpPr txBox="1"/>
           <p:nvPr/>
         </p:nvSpPr>
@@ -24085,16 +24249,40 @@
           </a:p>
         </p:txBody>
       </p:sp>
-      <p:sp>
-        <p:nvSpPr>
-          <p:cNvPr id="4" name="Rectangle 3"/>
+      <p:pic>
+        <p:nvPicPr>
+          <p:cNvPr id="4" name="Picture 3" descr="gigshield-dark.png"/>
+          <p:cNvPicPr>
+            <a:picLocks noChangeAspect="1"/>
+          </p:cNvPicPr>
+          <p:nvPr/>
+        </p:nvPicPr>
+        <p:blipFill>
+          <a:blip r:embed="rId2"/>
+          <a:stretch>
+            <a:fillRect/>
+          </a:stretch>
+        </p:blipFill>
+        <p:spPr>
+          <a:xfrm>
+            <a:off x="320040" y="54864"/>
+            <a:ext cx="443132" cy="411480"/>
+          </a:xfrm>
+          <a:prstGeom prst="rect">
+            <a:avLst/>
+          </a:prstGeom>
+        </p:spPr>
+      </p:pic>
+      <p:sp>
+        <p:nvSpPr>
+          <p:cNvPr id="5" name="Rectangle 4"/>
           <p:cNvSpPr/>
           <p:nvPr/>
         </p:nvSpPr>
         <p:spPr>
           <a:xfrm>
-            <a:off x="411480" y="201168"/>
-            <a:ext cx="91440" cy="91440"/>
+            <a:off x="1691640" y="164592"/>
+            <a:ext cx="18288" cy="182880"/>
           </a:xfrm>
           <a:prstGeom prst="rect">
             <a:avLst/>
@@ -24105,6 +24293,7 @@
           <a:ln>
             <a:noFill/>
           </a:ln>
+          <a:effectLst/>
         </p:spPr>
         <p:style>
           <a:lnRef idx="1">
@@ -24130,13 +24319,13 @@
       </p:sp>
       <p:sp>
         <p:nvSpPr>
-          <p:cNvPr id="5" name="TextBox 4"/>
-          <p:cNvSpPr txBox="1"/>
-          <p:nvPr/>
-        </p:nvSpPr>
-        <p:spPr>
-          <a:xfrm>
-            <a:off x="594360" y="118872"/>
+          <p:cNvPr id="6" name="TextBox 5"/>
+          <p:cNvSpPr txBox="1"/>
+          <p:nvPr/>
+        </p:nvSpPr>
+        <p:spPr>
+          <a:xfrm>
+            <a:off x="1783080" y="118872"/>
             <a:ext cx="7315200" cy="274320"/>
           </a:xfrm>
           <a:prstGeom prst="rect">
@@ -24156,20 +24345,20 @@
               </a:lnSpc>
             </a:pPr>
             <a:r>
-              <a:rPr sz="1200" b="1" i="0">
-                <a:solidFill>
-                  <a:srgbClr val="FFFFFF"/>
-                </a:solidFill>
-                <a:latin typeface="Inter"/>
-              </a:rPr>
-              <a:t>GigShield   |   Phase 3 Final Submission</a:t>
-            </a:r>
-          </a:p>
-        </p:txBody>
-      </p:sp>
-      <p:sp>
-        <p:nvSpPr>
-          <p:cNvPr id="6" name="TextBox 5"/>
+              <a:rPr sz="1100" b="1" i="0">
+                <a:solidFill>
+                  <a:srgbClr val="D8E2F0"/>
+                </a:solidFill>
+                <a:latin typeface="Inter"/>
+              </a:rPr>
+              <a:t>Phase 3 Final Submission   ·   Guidewire DEVTrails 2026</a:t>
+            </a:r>
+          </a:p>
+        </p:txBody>
+      </p:sp>
+      <p:sp>
+        <p:nvSpPr>
+          <p:cNvPr id="7" name="TextBox 6"/>
           <p:cNvSpPr txBox="1"/>
           <p:nvPr/>
         </p:nvSpPr>
@@ -24208,7 +24397,7 @@
       </p:sp>
       <p:sp>
         <p:nvSpPr>
-          <p:cNvPr id="7" name="Rectangle 6"/>
+          <p:cNvPr id="8" name="Rectangle 7"/>
           <p:cNvSpPr/>
           <p:nvPr/>
         </p:nvSpPr>
@@ -24252,7 +24441,7 @@
       </p:sp>
       <p:sp>
         <p:nvSpPr>
-          <p:cNvPr id="8" name="TextBox 7"/>
+          <p:cNvPr id="9" name="TextBox 8"/>
           <p:cNvSpPr txBox="1"/>
           <p:nvPr/>
         </p:nvSpPr>
@@ -24291,7 +24480,7 @@
       </p:sp>
       <p:sp>
         <p:nvSpPr>
-          <p:cNvPr id="9" name="Rounded Rectangle 8"/>
+          <p:cNvPr id="10" name="Rounded Rectangle 9"/>
           <p:cNvSpPr/>
           <p:nvPr/>
         </p:nvSpPr>
@@ -24336,7 +24525,7 @@
       </p:sp>
       <p:sp>
         <p:nvSpPr>
-          <p:cNvPr id="10" name="TextBox 9"/>
+          <p:cNvPr id="11" name="TextBox 10"/>
           <p:cNvSpPr txBox="1"/>
           <p:nvPr/>
         </p:nvSpPr>
@@ -24375,7 +24564,7 @@
       </p:sp>
       <p:sp>
         <p:nvSpPr>
-          <p:cNvPr id="11" name="Rectangle 10"/>
+          <p:cNvPr id="12" name="Rectangle 11"/>
           <p:cNvSpPr/>
           <p:nvPr/>
         </p:nvSpPr>
@@ -24419,7 +24608,7 @@
       </p:sp>
       <p:sp>
         <p:nvSpPr>
-          <p:cNvPr id="12" name="TextBox 11"/>
+          <p:cNvPr id="13" name="TextBox 12"/>
           <p:cNvSpPr txBox="1"/>
           <p:nvPr/>
         </p:nvSpPr>
@@ -24458,7 +24647,7 @@
       </p:sp>
       <p:sp>
         <p:nvSpPr>
-          <p:cNvPr id="13" name="TextBox 12"/>
+          <p:cNvPr id="14" name="TextBox 13"/>
           <p:cNvSpPr txBox="1"/>
           <p:nvPr/>
         </p:nvSpPr>
@@ -24515,7 +24704,7 @@
       </p:sp>
       <p:sp>
         <p:nvSpPr>
-          <p:cNvPr id="14" name="TextBox 13"/>
+          <p:cNvPr id="15" name="TextBox 14"/>
           <p:cNvSpPr txBox="1"/>
           <p:nvPr/>
         </p:nvSpPr>
@@ -24554,7 +24743,7 @@
       </p:sp>
       <p:sp>
         <p:nvSpPr>
-          <p:cNvPr id="15" name="Rectangle 14"/>
+          <p:cNvPr id="16" name="Rectangle 15"/>
           <p:cNvSpPr/>
           <p:nvPr/>
         </p:nvSpPr>
@@ -24598,7 +24787,7 @@
       </p:sp>
       <p:sp>
         <p:nvSpPr>
-          <p:cNvPr id="16" name="Rectangle 15"/>
+          <p:cNvPr id="17" name="Rectangle 16"/>
           <p:cNvSpPr/>
           <p:nvPr/>
         </p:nvSpPr>
@@ -24642,7 +24831,7 @@
       </p:sp>
       <p:sp>
         <p:nvSpPr>
-          <p:cNvPr id="17" name="TextBox 16"/>
+          <p:cNvPr id="18" name="TextBox 17"/>
           <p:cNvSpPr txBox="1"/>
           <p:nvPr/>
         </p:nvSpPr>
@@ -24681,7 +24870,7 @@
       </p:sp>
       <p:sp>
         <p:nvSpPr>
-          <p:cNvPr id="18" name="TextBox 17"/>
+          <p:cNvPr id="19" name="TextBox 18"/>
           <p:cNvSpPr txBox="1"/>
           <p:nvPr/>
         </p:nvSpPr>
@@ -24720,7 +24909,7 @@
       </p:sp>
       <p:sp>
         <p:nvSpPr>
-          <p:cNvPr id="19" name="Rectangle 18"/>
+          <p:cNvPr id="20" name="Rectangle 19"/>
           <p:cNvSpPr/>
           <p:nvPr/>
         </p:nvSpPr>
@@ -24764,7 +24953,7 @@
       </p:sp>
       <p:sp>
         <p:nvSpPr>
-          <p:cNvPr id="20" name="Rectangle 19"/>
+          <p:cNvPr id="21" name="Rectangle 20"/>
           <p:cNvSpPr/>
           <p:nvPr/>
         </p:nvSpPr>
@@ -24810,7 +24999,7 @@
       </p:sp>
       <p:sp>
         <p:nvSpPr>
-          <p:cNvPr id="21" name="TextBox 20"/>
+          <p:cNvPr id="22" name="TextBox 21"/>
           <p:cNvSpPr txBox="1"/>
           <p:nvPr/>
         </p:nvSpPr>
@@ -24858,7 +25047,7 @@
       </p:sp>
       <p:sp>
         <p:nvSpPr>
-          <p:cNvPr id="22" name="TextBox 21"/>
+          <p:cNvPr id="23" name="TextBox 22"/>
           <p:cNvSpPr txBox="1"/>
           <p:nvPr/>
         </p:nvSpPr>
@@ -24897,7 +25086,7 @@
       </p:sp>
       <p:sp>
         <p:nvSpPr>
-          <p:cNvPr id="23" name="TextBox 22"/>
+          <p:cNvPr id="24" name="TextBox 23"/>
           <p:cNvSpPr txBox="1"/>
           <p:nvPr/>
         </p:nvSpPr>
@@ -24936,7 +25125,7 @@
       </p:sp>
       <p:sp>
         <p:nvSpPr>
-          <p:cNvPr id="24" name="Rectangle 23"/>
+          <p:cNvPr id="25" name="Rectangle 24"/>
           <p:cNvSpPr/>
           <p:nvPr/>
         </p:nvSpPr>
@@ -24980,7 +25169,7 @@
       </p:sp>
       <p:sp>
         <p:nvSpPr>
-          <p:cNvPr id="25" name="Rectangle 24"/>
+          <p:cNvPr id="26" name="Rectangle 25"/>
           <p:cNvSpPr/>
           <p:nvPr/>
         </p:nvSpPr>
@@ -25026,7 +25215,7 @@
       </p:sp>
       <p:sp>
         <p:nvSpPr>
-          <p:cNvPr id="26" name="TextBox 25"/>
+          <p:cNvPr id="27" name="TextBox 26"/>
           <p:cNvSpPr txBox="1"/>
           <p:nvPr/>
         </p:nvSpPr>
@@ -25074,7 +25263,7 @@
       </p:sp>
       <p:sp>
         <p:nvSpPr>
-          <p:cNvPr id="27" name="TextBox 26"/>
+          <p:cNvPr id="28" name="TextBox 27"/>
           <p:cNvSpPr txBox="1"/>
           <p:nvPr/>
         </p:nvSpPr>
@@ -25113,7 +25302,7 @@
       </p:sp>
       <p:sp>
         <p:nvSpPr>
-          <p:cNvPr id="28" name="TextBox 27"/>
+          <p:cNvPr id="29" name="TextBox 28"/>
           <p:cNvSpPr txBox="1"/>
           <p:nvPr/>
         </p:nvSpPr>
@@ -25152,7 +25341,7 @@
       </p:sp>
       <p:sp>
         <p:nvSpPr>
-          <p:cNvPr id="29" name="Rectangle 28"/>
+          <p:cNvPr id="30" name="Rectangle 29"/>
           <p:cNvSpPr/>
           <p:nvPr/>
         </p:nvSpPr>
@@ -25196,7 +25385,7 @@
       </p:sp>
       <p:sp>
         <p:nvSpPr>
-          <p:cNvPr id="30" name="Rectangle 29"/>
+          <p:cNvPr id="31" name="Rectangle 30"/>
           <p:cNvSpPr/>
           <p:nvPr/>
         </p:nvSpPr>
@@ -25242,7 +25431,7 @@
       </p:sp>
       <p:sp>
         <p:nvSpPr>
-          <p:cNvPr id="31" name="TextBox 30"/>
+          <p:cNvPr id="32" name="TextBox 31"/>
           <p:cNvSpPr txBox="1"/>
           <p:nvPr/>
         </p:nvSpPr>
@@ -25290,7 +25479,7 @@
       </p:sp>
       <p:sp>
         <p:nvSpPr>
-          <p:cNvPr id="32" name="TextBox 31"/>
+          <p:cNvPr id="33" name="TextBox 32"/>
           <p:cNvSpPr txBox="1"/>
           <p:nvPr/>
         </p:nvSpPr>
@@ -25329,7 +25518,7 @@
       </p:sp>
       <p:sp>
         <p:nvSpPr>
-          <p:cNvPr id="33" name="TextBox 32"/>
+          <p:cNvPr id="34" name="TextBox 33"/>
           <p:cNvSpPr txBox="1"/>
           <p:nvPr/>
         </p:nvSpPr>
@@ -25368,7 +25557,7 @@
       </p:sp>
       <p:sp>
         <p:nvSpPr>
-          <p:cNvPr id="34" name="Rectangle 33"/>
+          <p:cNvPr id="35" name="Rectangle 34"/>
           <p:cNvSpPr/>
           <p:nvPr/>
         </p:nvSpPr>
@@ -25412,7 +25601,7 @@
       </p:sp>
       <p:sp>
         <p:nvSpPr>
-          <p:cNvPr id="35" name="Rectangle 34"/>
+          <p:cNvPr id="36" name="Rectangle 35"/>
           <p:cNvSpPr/>
           <p:nvPr/>
         </p:nvSpPr>
@@ -25458,7 +25647,7 @@
       </p:sp>
       <p:sp>
         <p:nvSpPr>
-          <p:cNvPr id="36" name="TextBox 35"/>
+          <p:cNvPr id="37" name="TextBox 36"/>
           <p:cNvSpPr txBox="1"/>
           <p:nvPr/>
         </p:nvSpPr>
@@ -25506,7 +25695,7 @@
       </p:sp>
       <p:sp>
         <p:nvSpPr>
-          <p:cNvPr id="37" name="TextBox 36"/>
+          <p:cNvPr id="38" name="TextBox 37"/>
           <p:cNvSpPr txBox="1"/>
           <p:nvPr/>
         </p:nvSpPr>
@@ -25545,7 +25734,7 @@
       </p:sp>
       <p:sp>
         <p:nvSpPr>
-          <p:cNvPr id="38" name="TextBox 37"/>
+          <p:cNvPr id="39" name="TextBox 38"/>
           <p:cNvSpPr txBox="1"/>
           <p:nvPr/>
         </p:nvSpPr>
@@ -25688,16 +25877,40 @@
           </a:p>
         </p:txBody>
       </p:sp>
-      <p:sp>
-        <p:nvSpPr>
-          <p:cNvPr id="4" name="Rectangle 3"/>
+      <p:pic>
+        <p:nvPicPr>
+          <p:cNvPr id="4" name="Picture 3" descr="gigshield-dark.png"/>
+          <p:cNvPicPr>
+            <a:picLocks noChangeAspect="1"/>
+          </p:cNvPicPr>
+          <p:nvPr/>
+        </p:nvPicPr>
+        <p:blipFill>
+          <a:blip r:embed="rId2"/>
+          <a:stretch>
+            <a:fillRect/>
+          </a:stretch>
+        </p:blipFill>
+        <p:spPr>
+          <a:xfrm>
+            <a:off x="320040" y="54864"/>
+            <a:ext cx="443132" cy="411480"/>
+          </a:xfrm>
+          <a:prstGeom prst="rect">
+            <a:avLst/>
+          </a:prstGeom>
+        </p:spPr>
+      </p:pic>
+      <p:sp>
+        <p:nvSpPr>
+          <p:cNvPr id="5" name="Rectangle 4"/>
           <p:cNvSpPr/>
           <p:nvPr/>
         </p:nvSpPr>
         <p:spPr>
           <a:xfrm>
-            <a:off x="411480" y="201168"/>
-            <a:ext cx="91440" cy="91440"/>
+            <a:off x="1691640" y="164592"/>
+            <a:ext cx="18288" cy="182880"/>
           </a:xfrm>
           <a:prstGeom prst="rect">
             <a:avLst/>
@@ -25708,6 +25921,7 @@
           <a:ln>
             <a:noFill/>
           </a:ln>
+          <a:effectLst/>
         </p:spPr>
         <p:style>
           <a:lnRef idx="1">
@@ -25733,13 +25947,13 @@
       </p:sp>
       <p:sp>
         <p:nvSpPr>
-          <p:cNvPr id="5" name="TextBox 4"/>
-          <p:cNvSpPr txBox="1"/>
-          <p:nvPr/>
-        </p:nvSpPr>
-        <p:spPr>
-          <a:xfrm>
-            <a:off x="594360" y="118872"/>
+          <p:cNvPr id="6" name="TextBox 5"/>
+          <p:cNvSpPr txBox="1"/>
+          <p:nvPr/>
+        </p:nvSpPr>
+        <p:spPr>
+          <a:xfrm>
+            <a:off x="1783080" y="118872"/>
             <a:ext cx="7315200" cy="274320"/>
           </a:xfrm>
           <a:prstGeom prst="rect">
@@ -25759,20 +25973,20 @@
               </a:lnSpc>
             </a:pPr>
             <a:r>
-              <a:rPr sz="1200" b="1" i="0">
-                <a:solidFill>
-                  <a:srgbClr val="FFFFFF"/>
-                </a:solidFill>
-                <a:latin typeface="Inter"/>
-              </a:rPr>
-              <a:t>GigShield   |   Phase 3 Final Submission</a:t>
-            </a:r>
-          </a:p>
-        </p:txBody>
-      </p:sp>
-      <p:sp>
-        <p:nvSpPr>
-          <p:cNvPr id="6" name="TextBox 5"/>
+              <a:rPr sz="1100" b="1" i="0">
+                <a:solidFill>
+                  <a:srgbClr val="D8E2F0"/>
+                </a:solidFill>
+                <a:latin typeface="Inter"/>
+              </a:rPr>
+              <a:t>Phase 3 Final Submission   ·   Guidewire DEVTrails 2026</a:t>
+            </a:r>
+          </a:p>
+        </p:txBody>
+      </p:sp>
+      <p:sp>
+        <p:nvSpPr>
+          <p:cNvPr id="7" name="TextBox 6"/>
           <p:cNvSpPr txBox="1"/>
           <p:nvPr/>
         </p:nvSpPr>
@@ -25811,7 +26025,7 @@
       </p:sp>
       <p:sp>
         <p:nvSpPr>
-          <p:cNvPr id="7" name="Rectangle 6"/>
+          <p:cNvPr id="8" name="Rectangle 7"/>
           <p:cNvSpPr/>
           <p:nvPr/>
         </p:nvSpPr>
@@ -25855,7 +26069,7 @@
       </p:sp>
       <p:sp>
         <p:nvSpPr>
-          <p:cNvPr id="8" name="TextBox 7"/>
+          <p:cNvPr id="9" name="TextBox 8"/>
           <p:cNvSpPr txBox="1"/>
           <p:nvPr/>
         </p:nvSpPr>
@@ -25894,7 +26108,7 @@
       </p:sp>
       <p:sp>
         <p:nvSpPr>
-          <p:cNvPr id="9" name="Rounded Rectangle 8"/>
+          <p:cNvPr id="10" name="Rounded Rectangle 9"/>
           <p:cNvSpPr/>
           <p:nvPr/>
         </p:nvSpPr>
@@ -25939,7 +26153,7 @@
       </p:sp>
       <p:sp>
         <p:nvSpPr>
-          <p:cNvPr id="10" name="TextBox 9"/>
+          <p:cNvPr id="11" name="TextBox 10"/>
           <p:cNvSpPr txBox="1"/>
           <p:nvPr/>
         </p:nvSpPr>
@@ -25978,7 +26192,7 @@
       </p:sp>
       <p:sp>
         <p:nvSpPr>
-          <p:cNvPr id="11" name="Rectangle 10"/>
+          <p:cNvPr id="12" name="Rectangle 11"/>
           <p:cNvSpPr/>
           <p:nvPr/>
         </p:nvSpPr>
@@ -26022,7 +26236,7 @@
       </p:sp>
       <p:sp>
         <p:nvSpPr>
-          <p:cNvPr id="12" name="TextBox 11"/>
+          <p:cNvPr id="13" name="TextBox 12"/>
           <p:cNvSpPr txBox="1"/>
           <p:nvPr/>
         </p:nvSpPr>
@@ -26061,7 +26275,7 @@
       </p:sp>
       <p:sp>
         <p:nvSpPr>
-          <p:cNvPr id="13" name="TextBox 12"/>
+          <p:cNvPr id="14" name="TextBox 13"/>
           <p:cNvSpPr txBox="1"/>
           <p:nvPr/>
         </p:nvSpPr>
@@ -26118,7 +26332,7 @@
       </p:sp>
       <p:sp>
         <p:nvSpPr>
-          <p:cNvPr id="14" name="TextBox 13"/>
+          <p:cNvPr id="15" name="TextBox 14"/>
           <p:cNvSpPr txBox="1"/>
           <p:nvPr/>
         </p:nvSpPr>
@@ -26157,7 +26371,7 @@
       </p:sp>
       <p:sp>
         <p:nvSpPr>
-          <p:cNvPr id="15" name="Rectangle 14"/>
+          <p:cNvPr id="16" name="Rectangle 15"/>
           <p:cNvSpPr/>
           <p:nvPr/>
         </p:nvSpPr>
@@ -26203,7 +26417,7 @@
       </p:sp>
       <p:sp>
         <p:nvSpPr>
-          <p:cNvPr id="16" name="TextBox 15"/>
+          <p:cNvPr id="17" name="TextBox 16"/>
           <p:cNvSpPr txBox="1"/>
           <p:nvPr/>
         </p:nvSpPr>
@@ -26251,7 +26465,7 @@
       </p:sp>
       <p:sp>
         <p:nvSpPr>
-          <p:cNvPr id="17" name="TextBox 16"/>
+          <p:cNvPr id="18" name="TextBox 17"/>
           <p:cNvSpPr txBox="1"/>
           <p:nvPr/>
         </p:nvSpPr>
@@ -26290,7 +26504,7 @@
       </p:sp>
       <p:sp>
         <p:nvSpPr>
-          <p:cNvPr id="18" name="Rectangle 17"/>
+          <p:cNvPr id="19" name="Rectangle 18"/>
           <p:cNvSpPr/>
           <p:nvPr/>
         </p:nvSpPr>
@@ -26336,7 +26550,7 @@
       </p:sp>
       <p:sp>
         <p:nvSpPr>
-          <p:cNvPr id="19" name="TextBox 18"/>
+          <p:cNvPr id="20" name="TextBox 19"/>
           <p:cNvSpPr txBox="1"/>
           <p:nvPr/>
         </p:nvSpPr>
@@ -26384,7 +26598,7 @@
       </p:sp>
       <p:sp>
         <p:nvSpPr>
-          <p:cNvPr id="20" name="TextBox 19"/>
+          <p:cNvPr id="21" name="TextBox 20"/>
           <p:cNvSpPr txBox="1"/>
           <p:nvPr/>
         </p:nvSpPr>
@@ -26423,7 +26637,7 @@
       </p:sp>
       <p:sp>
         <p:nvSpPr>
-          <p:cNvPr id="21" name="Rectangle 20"/>
+          <p:cNvPr id="22" name="Rectangle 21"/>
           <p:cNvSpPr/>
           <p:nvPr/>
         </p:nvSpPr>
@@ -26469,7 +26683,7 @@
       </p:sp>
       <p:sp>
         <p:nvSpPr>
-          <p:cNvPr id="22" name="TextBox 21"/>
+          <p:cNvPr id="23" name="TextBox 22"/>
           <p:cNvSpPr txBox="1"/>
           <p:nvPr/>
         </p:nvSpPr>
@@ -26517,7 +26731,7 @@
       </p:sp>
       <p:sp>
         <p:nvSpPr>
-          <p:cNvPr id="23" name="TextBox 22"/>
+          <p:cNvPr id="24" name="TextBox 23"/>
           <p:cNvSpPr txBox="1"/>
           <p:nvPr/>
         </p:nvSpPr>
@@ -26556,7 +26770,7 @@
       </p:sp>
       <p:sp>
         <p:nvSpPr>
-          <p:cNvPr id="24" name="Rectangle 23"/>
+          <p:cNvPr id="25" name="Rectangle 24"/>
           <p:cNvSpPr/>
           <p:nvPr/>
         </p:nvSpPr>
@@ -26602,7 +26816,7 @@
       </p:sp>
       <p:sp>
         <p:nvSpPr>
-          <p:cNvPr id="25" name="TextBox 24"/>
+          <p:cNvPr id="26" name="TextBox 25"/>
           <p:cNvSpPr txBox="1"/>
           <p:nvPr/>
         </p:nvSpPr>
@@ -26650,7 +26864,7 @@
       </p:sp>
       <p:sp>
         <p:nvSpPr>
-          <p:cNvPr id="26" name="TextBox 25"/>
+          <p:cNvPr id="27" name="TextBox 26"/>
           <p:cNvSpPr txBox="1"/>
           <p:nvPr/>
         </p:nvSpPr>
@@ -26689,7 +26903,7 @@
       </p:sp>
       <p:sp>
         <p:nvSpPr>
-          <p:cNvPr id="27" name="TextBox 26"/>
+          <p:cNvPr id="28" name="TextBox 27"/>
           <p:cNvSpPr txBox="1"/>
           <p:nvPr/>
         </p:nvSpPr>
@@ -26728,7 +26942,7 @@
       </p:sp>
       <p:sp>
         <p:nvSpPr>
-          <p:cNvPr id="28" name="TextBox 27"/>
+          <p:cNvPr id="29" name="TextBox 28"/>
           <p:cNvSpPr txBox="1"/>
           <p:nvPr/>
         </p:nvSpPr>
@@ -26860,7 +27074,7 @@
       </p:sp>
       <p:sp>
         <p:nvSpPr>
-          <p:cNvPr id="29" name="TextBox 28"/>
+          <p:cNvPr id="30" name="TextBox 29"/>
           <p:cNvSpPr txBox="1"/>
           <p:nvPr/>
         </p:nvSpPr>
@@ -26899,7 +27113,7 @@
       </p:sp>
       <p:sp>
         <p:nvSpPr>
-          <p:cNvPr id="30" name="TextBox 29"/>
+          <p:cNvPr id="31" name="TextBox 30"/>
           <p:cNvSpPr txBox="1"/>
           <p:nvPr/>
         </p:nvSpPr>
@@ -27135,16 +27349,40 @@
           </a:p>
         </p:txBody>
       </p:sp>
-      <p:sp>
-        <p:nvSpPr>
-          <p:cNvPr id="4" name="Rectangle 3"/>
+      <p:pic>
+        <p:nvPicPr>
+          <p:cNvPr id="4" name="Picture 3" descr="gigshield-dark.png"/>
+          <p:cNvPicPr>
+            <a:picLocks noChangeAspect="1"/>
+          </p:cNvPicPr>
+          <p:nvPr/>
+        </p:nvPicPr>
+        <p:blipFill>
+          <a:blip r:embed="rId2"/>
+          <a:stretch>
+            <a:fillRect/>
+          </a:stretch>
+        </p:blipFill>
+        <p:spPr>
+          <a:xfrm>
+            <a:off x="320040" y="54864"/>
+            <a:ext cx="443132" cy="411480"/>
+          </a:xfrm>
+          <a:prstGeom prst="rect">
+            <a:avLst/>
+          </a:prstGeom>
+        </p:spPr>
+      </p:pic>
+      <p:sp>
+        <p:nvSpPr>
+          <p:cNvPr id="5" name="Rectangle 4"/>
           <p:cNvSpPr/>
           <p:nvPr/>
         </p:nvSpPr>
         <p:spPr>
           <a:xfrm>
-            <a:off x="411480" y="201168"/>
-            <a:ext cx="91440" cy="91440"/>
+            <a:off x="1691640" y="164592"/>
+            <a:ext cx="18288" cy="182880"/>
           </a:xfrm>
           <a:prstGeom prst="rect">
             <a:avLst/>
@@ -27155,6 +27393,7 @@
           <a:ln>
             <a:noFill/>
           </a:ln>
+          <a:effectLst/>
         </p:spPr>
         <p:style>
           <a:lnRef idx="1">
@@ -27180,13 +27419,13 @@
       </p:sp>
       <p:sp>
         <p:nvSpPr>
-          <p:cNvPr id="5" name="TextBox 4"/>
-          <p:cNvSpPr txBox="1"/>
-          <p:nvPr/>
-        </p:nvSpPr>
-        <p:spPr>
-          <a:xfrm>
-            <a:off x="594360" y="118872"/>
+          <p:cNvPr id="6" name="TextBox 5"/>
+          <p:cNvSpPr txBox="1"/>
+          <p:nvPr/>
+        </p:nvSpPr>
+        <p:spPr>
+          <a:xfrm>
+            <a:off x="1783080" y="118872"/>
             <a:ext cx="7315200" cy="274320"/>
           </a:xfrm>
           <a:prstGeom prst="rect">
@@ -27206,20 +27445,20 @@
               </a:lnSpc>
             </a:pPr>
             <a:r>
-              <a:rPr sz="1200" b="1" i="0">
-                <a:solidFill>
-                  <a:srgbClr val="FFFFFF"/>
-                </a:solidFill>
-                <a:latin typeface="Inter"/>
-              </a:rPr>
-              <a:t>GigShield   |   Phase 3 Final Submission</a:t>
-            </a:r>
-          </a:p>
-        </p:txBody>
-      </p:sp>
-      <p:sp>
-        <p:nvSpPr>
-          <p:cNvPr id="6" name="TextBox 5"/>
+              <a:rPr sz="1100" b="1" i="0">
+                <a:solidFill>
+                  <a:srgbClr val="D8E2F0"/>
+                </a:solidFill>
+                <a:latin typeface="Inter"/>
+              </a:rPr>
+              <a:t>Phase 3 Final Submission   ·   Guidewire DEVTrails 2026</a:t>
+            </a:r>
+          </a:p>
+        </p:txBody>
+      </p:sp>
+      <p:sp>
+        <p:nvSpPr>
+          <p:cNvPr id="7" name="TextBox 6"/>
           <p:cNvSpPr txBox="1"/>
           <p:nvPr/>
         </p:nvSpPr>
@@ -27258,7 +27497,7 @@
       </p:sp>
       <p:sp>
         <p:nvSpPr>
-          <p:cNvPr id="7" name="Rectangle 6"/>
+          <p:cNvPr id="8" name="Rectangle 7"/>
           <p:cNvSpPr/>
           <p:nvPr/>
         </p:nvSpPr>
@@ -27302,7 +27541,7 @@
       </p:sp>
       <p:sp>
         <p:nvSpPr>
-          <p:cNvPr id="8" name="TextBox 7"/>
+          <p:cNvPr id="9" name="TextBox 8"/>
           <p:cNvSpPr txBox="1"/>
           <p:nvPr/>
         </p:nvSpPr>
@@ -27341,7 +27580,7 @@
       </p:sp>
       <p:sp>
         <p:nvSpPr>
-          <p:cNvPr id="9" name="Rounded Rectangle 8"/>
+          <p:cNvPr id="10" name="Rounded Rectangle 9"/>
           <p:cNvSpPr/>
           <p:nvPr/>
         </p:nvSpPr>
@@ -27386,7 +27625,7 @@
       </p:sp>
       <p:sp>
         <p:nvSpPr>
-          <p:cNvPr id="10" name="TextBox 9"/>
+          <p:cNvPr id="11" name="TextBox 10"/>
           <p:cNvSpPr txBox="1"/>
           <p:nvPr/>
         </p:nvSpPr>
@@ -27425,7 +27664,7 @@
       </p:sp>
       <p:sp>
         <p:nvSpPr>
-          <p:cNvPr id="11" name="Rectangle 10"/>
+          <p:cNvPr id="12" name="Rectangle 11"/>
           <p:cNvSpPr/>
           <p:nvPr/>
         </p:nvSpPr>
@@ -27469,7 +27708,7 @@
       </p:sp>
       <p:sp>
         <p:nvSpPr>
-          <p:cNvPr id="12" name="TextBox 11"/>
+          <p:cNvPr id="13" name="TextBox 12"/>
           <p:cNvSpPr txBox="1"/>
           <p:nvPr/>
         </p:nvSpPr>
@@ -27508,7 +27747,7 @@
       </p:sp>
       <p:sp>
         <p:nvSpPr>
-          <p:cNvPr id="13" name="TextBox 12"/>
+          <p:cNvPr id="14" name="TextBox 13"/>
           <p:cNvSpPr txBox="1"/>
           <p:nvPr/>
         </p:nvSpPr>
@@ -27608,7 +27847,7 @@
       </p:sp>
       <p:sp>
         <p:nvSpPr>
-          <p:cNvPr id="14" name="Rectangle 13"/>
+          <p:cNvPr id="15" name="Rectangle 14"/>
           <p:cNvSpPr/>
           <p:nvPr/>
         </p:nvSpPr>
@@ -27652,7 +27891,7 @@
       </p:sp>
       <p:sp>
         <p:nvSpPr>
-          <p:cNvPr id="15" name="Rectangle 14"/>
+          <p:cNvPr id="16" name="Rectangle 15"/>
           <p:cNvSpPr/>
           <p:nvPr/>
         </p:nvSpPr>
@@ -27696,7 +27935,7 @@
       </p:sp>
       <p:sp>
         <p:nvSpPr>
-          <p:cNvPr id="16" name="Rounded Rectangle 15"/>
+          <p:cNvPr id="17" name="Rounded Rectangle 16"/>
           <p:cNvSpPr/>
           <p:nvPr/>
         </p:nvSpPr>
@@ -27741,7 +27980,7 @@
       </p:sp>
       <p:sp>
         <p:nvSpPr>
-          <p:cNvPr id="17" name="TextBox 16"/>
+          <p:cNvPr id="18" name="TextBox 17"/>
           <p:cNvSpPr txBox="1"/>
           <p:nvPr/>
         </p:nvSpPr>
@@ -27780,7 +28019,7 @@
       </p:sp>
       <p:sp>
         <p:nvSpPr>
-          <p:cNvPr id="18" name="TextBox 17"/>
+          <p:cNvPr id="19" name="TextBox 18"/>
           <p:cNvSpPr txBox="1"/>
           <p:nvPr/>
         </p:nvSpPr>
@@ -27819,7 +28058,7 @@
       </p:sp>
       <p:sp>
         <p:nvSpPr>
-          <p:cNvPr id="19" name="TextBox 18"/>
+          <p:cNvPr id="20" name="TextBox 19"/>
           <p:cNvSpPr txBox="1"/>
           <p:nvPr/>
         </p:nvSpPr>
@@ -27951,7 +28190,7 @@
       </p:sp>
       <p:sp>
         <p:nvSpPr>
-          <p:cNvPr id="20" name="Rectangle 19"/>
+          <p:cNvPr id="21" name="Rectangle 20"/>
           <p:cNvSpPr/>
           <p:nvPr/>
         </p:nvSpPr>
@@ -27995,7 +28234,7 @@
       </p:sp>
       <p:sp>
         <p:nvSpPr>
-          <p:cNvPr id="21" name="Rectangle 20"/>
+          <p:cNvPr id="22" name="Rectangle 21"/>
           <p:cNvSpPr/>
           <p:nvPr/>
         </p:nvSpPr>
@@ -28041,7 +28280,7 @@
       </p:sp>
       <p:sp>
         <p:nvSpPr>
-          <p:cNvPr id="22" name="Rounded Rectangle 21"/>
+          <p:cNvPr id="23" name="Rounded Rectangle 22"/>
           <p:cNvSpPr/>
           <p:nvPr/>
         </p:nvSpPr>
@@ -28086,7 +28325,7 @@
       </p:sp>
       <p:sp>
         <p:nvSpPr>
-          <p:cNvPr id="23" name="TextBox 22"/>
+          <p:cNvPr id="24" name="TextBox 23"/>
           <p:cNvSpPr txBox="1"/>
           <p:nvPr/>
         </p:nvSpPr>
@@ -28125,7 +28364,7 @@
       </p:sp>
       <p:sp>
         <p:nvSpPr>
-          <p:cNvPr id="24" name="TextBox 23"/>
+          <p:cNvPr id="25" name="TextBox 24"/>
           <p:cNvSpPr txBox="1"/>
           <p:nvPr/>
         </p:nvSpPr>
@@ -28164,7 +28403,7 @@
       </p:sp>
       <p:sp>
         <p:nvSpPr>
-          <p:cNvPr id="25" name="TextBox 24"/>
+          <p:cNvPr id="26" name="TextBox 25"/>
           <p:cNvSpPr txBox="1"/>
           <p:nvPr/>
         </p:nvSpPr>
@@ -28296,7 +28535,7 @@
       </p:sp>
       <p:sp>
         <p:nvSpPr>
-          <p:cNvPr id="26" name="Rectangle 25"/>
+          <p:cNvPr id="27" name="Rectangle 26"/>
           <p:cNvSpPr/>
           <p:nvPr/>
         </p:nvSpPr>
@@ -28340,7 +28579,7 @@
       </p:sp>
       <p:sp>
         <p:nvSpPr>
-          <p:cNvPr id="27" name="TextBox 26"/>
+          <p:cNvPr id="28" name="TextBox 27"/>
           <p:cNvSpPr txBox="1"/>
           <p:nvPr/>
         </p:nvSpPr>
@@ -28483,16 +28722,40 @@
           </a:p>
         </p:txBody>
       </p:sp>
-      <p:sp>
-        <p:nvSpPr>
-          <p:cNvPr id="4" name="Rectangle 3"/>
+      <p:pic>
+        <p:nvPicPr>
+          <p:cNvPr id="4" name="Picture 3" descr="gigshield-dark.png"/>
+          <p:cNvPicPr>
+            <a:picLocks noChangeAspect="1"/>
+          </p:cNvPicPr>
+          <p:nvPr/>
+        </p:nvPicPr>
+        <p:blipFill>
+          <a:blip r:embed="rId2"/>
+          <a:stretch>
+            <a:fillRect/>
+          </a:stretch>
+        </p:blipFill>
+        <p:spPr>
+          <a:xfrm>
+            <a:off x="320040" y="54864"/>
+            <a:ext cx="443132" cy="411480"/>
+          </a:xfrm>
+          <a:prstGeom prst="rect">
+            <a:avLst/>
+          </a:prstGeom>
+        </p:spPr>
+      </p:pic>
+      <p:sp>
+        <p:nvSpPr>
+          <p:cNvPr id="5" name="Rectangle 4"/>
           <p:cNvSpPr/>
           <p:nvPr/>
         </p:nvSpPr>
         <p:spPr>
           <a:xfrm>
-            <a:off x="411480" y="201168"/>
-            <a:ext cx="91440" cy="91440"/>
+            <a:off x="1691640" y="164592"/>
+            <a:ext cx="18288" cy="182880"/>
           </a:xfrm>
           <a:prstGeom prst="rect">
             <a:avLst/>
@@ -28503,6 +28766,7 @@
           <a:ln>
             <a:noFill/>
           </a:ln>
+          <a:effectLst/>
         </p:spPr>
         <p:style>
           <a:lnRef idx="1">
@@ -28528,13 +28792,13 @@
       </p:sp>
       <p:sp>
         <p:nvSpPr>
-          <p:cNvPr id="5" name="TextBox 4"/>
-          <p:cNvSpPr txBox="1"/>
-          <p:nvPr/>
-        </p:nvSpPr>
-        <p:spPr>
-          <a:xfrm>
-            <a:off x="594360" y="118872"/>
+          <p:cNvPr id="6" name="TextBox 5"/>
+          <p:cNvSpPr txBox="1"/>
+          <p:nvPr/>
+        </p:nvSpPr>
+        <p:spPr>
+          <a:xfrm>
+            <a:off x="1783080" y="118872"/>
             <a:ext cx="7315200" cy="274320"/>
           </a:xfrm>
           <a:prstGeom prst="rect">
@@ -28554,20 +28818,20 @@
               </a:lnSpc>
             </a:pPr>
             <a:r>
-              <a:rPr sz="1200" b="1" i="0">
-                <a:solidFill>
-                  <a:srgbClr val="FFFFFF"/>
-                </a:solidFill>
-                <a:latin typeface="Inter"/>
-              </a:rPr>
-              <a:t>GigShield   |   Phase 3 Final Submission</a:t>
-            </a:r>
-          </a:p>
-        </p:txBody>
-      </p:sp>
-      <p:sp>
-        <p:nvSpPr>
-          <p:cNvPr id="6" name="TextBox 5"/>
+              <a:rPr sz="1100" b="1" i="0">
+                <a:solidFill>
+                  <a:srgbClr val="D8E2F0"/>
+                </a:solidFill>
+                <a:latin typeface="Inter"/>
+              </a:rPr>
+              <a:t>Phase 3 Final Submission   ·   Guidewire DEVTrails 2026</a:t>
+            </a:r>
+          </a:p>
+        </p:txBody>
+      </p:sp>
+      <p:sp>
+        <p:nvSpPr>
+          <p:cNvPr id="7" name="TextBox 6"/>
           <p:cNvSpPr txBox="1"/>
           <p:nvPr/>
         </p:nvSpPr>
@@ -28606,7 +28870,7 @@
       </p:sp>
       <p:sp>
         <p:nvSpPr>
-          <p:cNvPr id="7" name="Rectangle 6"/>
+          <p:cNvPr id="8" name="Rectangle 7"/>
           <p:cNvSpPr/>
           <p:nvPr/>
         </p:nvSpPr>
@@ -28650,7 +28914,7 @@
       </p:sp>
       <p:sp>
         <p:nvSpPr>
-          <p:cNvPr id="8" name="TextBox 7"/>
+          <p:cNvPr id="9" name="TextBox 8"/>
           <p:cNvSpPr txBox="1"/>
           <p:nvPr/>
         </p:nvSpPr>
@@ -28689,7 +28953,7 @@
       </p:sp>
       <p:sp>
         <p:nvSpPr>
-          <p:cNvPr id="9" name="Rounded Rectangle 8"/>
+          <p:cNvPr id="10" name="Rounded Rectangle 9"/>
           <p:cNvSpPr/>
           <p:nvPr/>
         </p:nvSpPr>
@@ -28734,7 +28998,7 @@
       </p:sp>
       <p:sp>
         <p:nvSpPr>
-          <p:cNvPr id="10" name="TextBox 9"/>
+          <p:cNvPr id="11" name="TextBox 10"/>
           <p:cNvSpPr txBox="1"/>
           <p:nvPr/>
         </p:nvSpPr>
@@ -28773,7 +29037,7 @@
       </p:sp>
       <p:sp>
         <p:nvSpPr>
-          <p:cNvPr id="11" name="Rectangle 10"/>
+          <p:cNvPr id="12" name="Rectangle 11"/>
           <p:cNvSpPr/>
           <p:nvPr/>
         </p:nvSpPr>
@@ -28817,7 +29081,7 @@
       </p:sp>
       <p:sp>
         <p:nvSpPr>
-          <p:cNvPr id="12" name="TextBox 11"/>
+          <p:cNvPr id="13" name="TextBox 12"/>
           <p:cNvSpPr txBox="1"/>
           <p:nvPr/>
         </p:nvSpPr>
@@ -28856,7 +29120,7 @@
       </p:sp>
       <p:sp>
         <p:nvSpPr>
-          <p:cNvPr id="13" name="TextBox 12"/>
+          <p:cNvPr id="14" name="TextBox 13"/>
           <p:cNvSpPr txBox="1"/>
           <p:nvPr/>
         </p:nvSpPr>
@@ -28913,7 +29177,7 @@
       </p:sp>
       <p:sp>
         <p:nvSpPr>
-          <p:cNvPr id="14" name="Rectangle 13"/>
+          <p:cNvPr id="15" name="Rectangle 14"/>
           <p:cNvSpPr/>
           <p:nvPr/>
         </p:nvSpPr>
@@ -28959,7 +29223,7 @@
       </p:sp>
       <p:sp>
         <p:nvSpPr>
-          <p:cNvPr id="15" name="Oval 14"/>
+          <p:cNvPr id="16" name="Oval 15"/>
           <p:cNvSpPr/>
           <p:nvPr/>
         </p:nvSpPr>
@@ -29002,7 +29266,7 @@
       </p:sp>
       <p:sp>
         <p:nvSpPr>
-          <p:cNvPr id="16" name="TextBox 15"/>
+          <p:cNvPr id="17" name="TextBox 16"/>
           <p:cNvSpPr txBox="1"/>
           <p:nvPr/>
         </p:nvSpPr>
@@ -29041,7 +29305,7 @@
       </p:sp>
       <p:sp>
         <p:nvSpPr>
-          <p:cNvPr id="17" name="TextBox 16"/>
+          <p:cNvPr id="18" name="TextBox 17"/>
           <p:cNvSpPr txBox="1"/>
           <p:nvPr/>
         </p:nvSpPr>
@@ -29080,7 +29344,7 @@
       </p:sp>
       <p:sp>
         <p:nvSpPr>
-          <p:cNvPr id="18" name="TextBox 17"/>
+          <p:cNvPr id="19" name="TextBox 18"/>
           <p:cNvSpPr txBox="1"/>
           <p:nvPr/>
         </p:nvSpPr>
@@ -29119,7 +29383,7 @@
       </p:sp>
       <p:sp>
         <p:nvSpPr>
-          <p:cNvPr id="19" name="TextBox 18"/>
+          <p:cNvPr id="20" name="TextBox 19"/>
           <p:cNvSpPr txBox="1"/>
           <p:nvPr/>
         </p:nvSpPr>
@@ -29158,7 +29422,7 @@
       </p:sp>
       <p:sp>
         <p:nvSpPr>
-          <p:cNvPr id="20" name="Rectangle 19"/>
+          <p:cNvPr id="21" name="Rectangle 20"/>
           <p:cNvSpPr/>
           <p:nvPr/>
         </p:nvSpPr>
@@ -29204,7 +29468,7 @@
       </p:sp>
       <p:sp>
         <p:nvSpPr>
-          <p:cNvPr id="21" name="Oval 20"/>
+          <p:cNvPr id="22" name="Oval 21"/>
           <p:cNvSpPr/>
           <p:nvPr/>
         </p:nvSpPr>
@@ -29247,7 +29511,7 @@
       </p:sp>
       <p:sp>
         <p:nvSpPr>
-          <p:cNvPr id="22" name="TextBox 21"/>
+          <p:cNvPr id="23" name="TextBox 22"/>
           <p:cNvSpPr txBox="1"/>
           <p:nvPr/>
         </p:nvSpPr>
@@ -29286,7 +29550,7 @@
       </p:sp>
       <p:sp>
         <p:nvSpPr>
-          <p:cNvPr id="23" name="TextBox 22"/>
+          <p:cNvPr id="24" name="TextBox 23"/>
           <p:cNvSpPr txBox="1"/>
           <p:nvPr/>
         </p:nvSpPr>
@@ -29325,7 +29589,7 @@
       </p:sp>
       <p:sp>
         <p:nvSpPr>
-          <p:cNvPr id="24" name="TextBox 23"/>
+          <p:cNvPr id="25" name="TextBox 24"/>
           <p:cNvSpPr txBox="1"/>
           <p:nvPr/>
         </p:nvSpPr>
@@ -29364,7 +29628,7 @@
       </p:sp>
       <p:sp>
         <p:nvSpPr>
-          <p:cNvPr id="25" name="TextBox 24"/>
+          <p:cNvPr id="26" name="TextBox 25"/>
           <p:cNvSpPr txBox="1"/>
           <p:nvPr/>
         </p:nvSpPr>
@@ -29403,7 +29667,7 @@
       </p:sp>
       <p:sp>
         <p:nvSpPr>
-          <p:cNvPr id="26" name="Rectangle 25"/>
+          <p:cNvPr id="27" name="Rectangle 26"/>
           <p:cNvSpPr/>
           <p:nvPr/>
         </p:nvSpPr>
@@ -29449,7 +29713,7 @@
       </p:sp>
       <p:sp>
         <p:nvSpPr>
-          <p:cNvPr id="27" name="Oval 26"/>
+          <p:cNvPr id="28" name="Oval 27"/>
           <p:cNvSpPr/>
           <p:nvPr/>
         </p:nvSpPr>
@@ -29492,7 +29756,7 @@
       </p:sp>
       <p:sp>
         <p:nvSpPr>
-          <p:cNvPr id="28" name="TextBox 27"/>
+          <p:cNvPr id="29" name="TextBox 28"/>
           <p:cNvSpPr txBox="1"/>
           <p:nvPr/>
         </p:nvSpPr>
@@ -29531,7 +29795,7 @@
       </p:sp>
       <p:sp>
         <p:nvSpPr>
-          <p:cNvPr id="29" name="TextBox 28"/>
+          <p:cNvPr id="30" name="TextBox 29"/>
           <p:cNvSpPr txBox="1"/>
           <p:nvPr/>
         </p:nvSpPr>
@@ -29570,7 +29834,7 @@
       </p:sp>
       <p:sp>
         <p:nvSpPr>
-          <p:cNvPr id="30" name="TextBox 29"/>
+          <p:cNvPr id="31" name="TextBox 30"/>
           <p:cNvSpPr txBox="1"/>
           <p:nvPr/>
         </p:nvSpPr>
@@ -29609,7 +29873,7 @@
       </p:sp>
       <p:sp>
         <p:nvSpPr>
-          <p:cNvPr id="31" name="TextBox 30"/>
+          <p:cNvPr id="32" name="TextBox 31"/>
           <p:cNvSpPr txBox="1"/>
           <p:nvPr/>
         </p:nvSpPr>
@@ -29648,7 +29912,7 @@
       </p:sp>
       <p:sp>
         <p:nvSpPr>
-          <p:cNvPr id="32" name="Rectangle 31"/>
+          <p:cNvPr id="33" name="Rectangle 32"/>
           <p:cNvSpPr/>
           <p:nvPr/>
         </p:nvSpPr>
@@ -29694,7 +29958,7 @@
       </p:sp>
       <p:sp>
         <p:nvSpPr>
-          <p:cNvPr id="33" name="Oval 32"/>
+          <p:cNvPr id="34" name="Oval 33"/>
           <p:cNvSpPr/>
           <p:nvPr/>
         </p:nvSpPr>
@@ -29737,7 +30001,7 @@
       </p:sp>
       <p:sp>
         <p:nvSpPr>
-          <p:cNvPr id="34" name="TextBox 33"/>
+          <p:cNvPr id="35" name="TextBox 34"/>
           <p:cNvSpPr txBox="1"/>
           <p:nvPr/>
         </p:nvSpPr>
@@ -29776,7 +30040,7 @@
       </p:sp>
       <p:sp>
         <p:nvSpPr>
-          <p:cNvPr id="35" name="TextBox 34"/>
+          <p:cNvPr id="36" name="TextBox 35"/>
           <p:cNvSpPr txBox="1"/>
           <p:nvPr/>
         </p:nvSpPr>
@@ -29815,7 +30079,7 @@
       </p:sp>
       <p:sp>
         <p:nvSpPr>
-          <p:cNvPr id="36" name="TextBox 35"/>
+          <p:cNvPr id="37" name="TextBox 36"/>
           <p:cNvSpPr txBox="1"/>
           <p:nvPr/>
         </p:nvSpPr>
@@ -29854,7 +30118,7 @@
       </p:sp>
       <p:sp>
         <p:nvSpPr>
-          <p:cNvPr id="37" name="Rectangle 36"/>
+          <p:cNvPr id="38" name="Rectangle 37"/>
           <p:cNvSpPr/>
           <p:nvPr/>
         </p:nvSpPr>
@@ -29898,7 +30162,7 @@
       </p:sp>
       <p:sp>
         <p:nvSpPr>
-          <p:cNvPr id="38" name="Rectangle 37"/>
+          <p:cNvPr id="39" name="Rectangle 38"/>
           <p:cNvSpPr/>
           <p:nvPr/>
         </p:nvSpPr>
@@ -29944,7 +30208,7 @@
       </p:sp>
       <p:sp>
         <p:nvSpPr>
-          <p:cNvPr id="39" name="Rounded Rectangle 38"/>
+          <p:cNvPr id="40" name="Rounded Rectangle 39"/>
           <p:cNvSpPr/>
           <p:nvPr/>
         </p:nvSpPr>
@@ -29989,7 +30253,7 @@
       </p:sp>
       <p:sp>
         <p:nvSpPr>
-          <p:cNvPr id="40" name="TextBox 39"/>
+          <p:cNvPr id="41" name="TextBox 40"/>
           <p:cNvSpPr txBox="1"/>
           <p:nvPr/>
         </p:nvSpPr>
@@ -30028,7 +30292,7 @@
       </p:sp>
       <p:sp>
         <p:nvSpPr>
-          <p:cNvPr id="41" name="TextBox 40"/>
+          <p:cNvPr id="42" name="TextBox 41"/>
           <p:cNvSpPr txBox="1"/>
           <p:nvPr/>
         </p:nvSpPr>
@@ -30067,7 +30331,7 @@
       </p:sp>
       <p:sp>
         <p:nvSpPr>
-          <p:cNvPr id="42" name="TextBox 41"/>
+          <p:cNvPr id="43" name="TextBox 42"/>
           <p:cNvSpPr txBox="1"/>
           <p:nvPr/>
         </p:nvSpPr>
@@ -30106,7 +30370,7 @@
       </p:sp>
       <p:sp>
         <p:nvSpPr>
-          <p:cNvPr id="43" name="Rectangle 42"/>
+          <p:cNvPr id="44" name="Rectangle 43"/>
           <p:cNvSpPr/>
           <p:nvPr/>
         </p:nvSpPr>
@@ -30150,7 +30414,7 @@
       </p:sp>
       <p:sp>
         <p:nvSpPr>
-          <p:cNvPr id="44" name="Rectangle 43"/>
+          <p:cNvPr id="45" name="Rectangle 44"/>
           <p:cNvSpPr/>
           <p:nvPr/>
         </p:nvSpPr>
@@ -30196,7 +30460,7 @@
       </p:sp>
       <p:sp>
         <p:nvSpPr>
-          <p:cNvPr id="45" name="Rounded Rectangle 44"/>
+          <p:cNvPr id="46" name="Rounded Rectangle 45"/>
           <p:cNvSpPr/>
           <p:nvPr/>
         </p:nvSpPr>
@@ -30241,7 +30505,7 @@
       </p:sp>
       <p:sp>
         <p:nvSpPr>
-          <p:cNvPr id="46" name="TextBox 45"/>
+          <p:cNvPr id="47" name="TextBox 46"/>
           <p:cNvSpPr txBox="1"/>
           <p:nvPr/>
         </p:nvSpPr>
@@ -30280,7 +30544,7 @@
       </p:sp>
       <p:sp>
         <p:nvSpPr>
-          <p:cNvPr id="47" name="TextBox 46"/>
+          <p:cNvPr id="48" name="TextBox 47"/>
           <p:cNvSpPr txBox="1"/>
           <p:nvPr/>
         </p:nvSpPr>
@@ -30319,7 +30583,7 @@
       </p:sp>
       <p:sp>
         <p:nvSpPr>
-          <p:cNvPr id="48" name="TextBox 47"/>
+          <p:cNvPr id="49" name="TextBox 48"/>
           <p:cNvSpPr txBox="1"/>
           <p:nvPr/>
         </p:nvSpPr>
@@ -30358,7 +30622,7 @@
       </p:sp>
       <p:sp>
         <p:nvSpPr>
-          <p:cNvPr id="49" name="Rectangle 48"/>
+          <p:cNvPr id="50" name="Rectangle 49"/>
           <p:cNvSpPr/>
           <p:nvPr/>
         </p:nvSpPr>
@@ -30402,7 +30666,7 @@
       </p:sp>
       <p:sp>
         <p:nvSpPr>
-          <p:cNvPr id="50" name="Rectangle 49"/>
+          <p:cNvPr id="51" name="Rectangle 50"/>
           <p:cNvSpPr/>
           <p:nvPr/>
         </p:nvSpPr>
@@ -30448,7 +30712,7 @@
       </p:sp>
       <p:sp>
         <p:nvSpPr>
-          <p:cNvPr id="51" name="Rounded Rectangle 50"/>
+          <p:cNvPr id="52" name="Rounded Rectangle 51"/>
           <p:cNvSpPr/>
           <p:nvPr/>
         </p:nvSpPr>
@@ -30493,7 +30757,7 @@
       </p:sp>
       <p:sp>
         <p:nvSpPr>
-          <p:cNvPr id="52" name="TextBox 51"/>
+          <p:cNvPr id="53" name="TextBox 52"/>
           <p:cNvSpPr txBox="1"/>
           <p:nvPr/>
         </p:nvSpPr>
@@ -30532,7 +30796,7 @@
       </p:sp>
       <p:sp>
         <p:nvSpPr>
-          <p:cNvPr id="53" name="TextBox 52"/>
+          <p:cNvPr id="54" name="TextBox 53"/>
           <p:cNvSpPr txBox="1"/>
           <p:nvPr/>
         </p:nvSpPr>
@@ -30571,7 +30835,7 @@
       </p:sp>
       <p:sp>
         <p:nvSpPr>
-          <p:cNvPr id="54" name="TextBox 53"/>
+          <p:cNvPr id="55" name="TextBox 54"/>
           <p:cNvSpPr txBox="1"/>
           <p:nvPr/>
         </p:nvSpPr>
@@ -30610,7 +30874,7 @@
       </p:sp>
       <p:sp>
         <p:nvSpPr>
-          <p:cNvPr id="55" name="Rectangle 54"/>
+          <p:cNvPr id="56" name="Rectangle 55"/>
           <p:cNvSpPr/>
           <p:nvPr/>
         </p:nvSpPr>
@@ -30654,7 +30918,7 @@
       </p:sp>
       <p:sp>
         <p:nvSpPr>
-          <p:cNvPr id="56" name="Rectangle 55"/>
+          <p:cNvPr id="57" name="Rectangle 56"/>
           <p:cNvSpPr/>
           <p:nvPr/>
         </p:nvSpPr>
@@ -30700,7 +30964,7 @@
       </p:sp>
       <p:sp>
         <p:nvSpPr>
-          <p:cNvPr id="57" name="Rounded Rectangle 56"/>
+          <p:cNvPr id="58" name="Rounded Rectangle 57"/>
           <p:cNvSpPr/>
           <p:nvPr/>
         </p:nvSpPr>
@@ -30745,7 +31009,7 @@
       </p:sp>
       <p:sp>
         <p:nvSpPr>
-          <p:cNvPr id="58" name="TextBox 57"/>
+          <p:cNvPr id="59" name="TextBox 58"/>
           <p:cNvSpPr txBox="1"/>
           <p:nvPr/>
         </p:nvSpPr>
@@ -30784,7 +31048,7 @@
       </p:sp>
       <p:sp>
         <p:nvSpPr>
-          <p:cNvPr id="59" name="TextBox 58"/>
+          <p:cNvPr id="60" name="TextBox 59"/>
           <p:cNvSpPr txBox="1"/>
           <p:nvPr/>
         </p:nvSpPr>
@@ -30823,7 +31087,7 @@
       </p:sp>
       <p:sp>
         <p:nvSpPr>
-          <p:cNvPr id="60" name="TextBox 59"/>
+          <p:cNvPr id="61" name="TextBox 60"/>
           <p:cNvSpPr txBox="1"/>
           <p:nvPr/>
         </p:nvSpPr>
@@ -30966,16 +31230,40 @@
           </a:p>
         </p:txBody>
       </p:sp>
-      <p:sp>
-        <p:nvSpPr>
-          <p:cNvPr id="4" name="Rectangle 3"/>
+      <p:pic>
+        <p:nvPicPr>
+          <p:cNvPr id="4" name="Picture 3" descr="gigshield-dark.png"/>
+          <p:cNvPicPr>
+            <a:picLocks noChangeAspect="1"/>
+          </p:cNvPicPr>
+          <p:nvPr/>
+        </p:nvPicPr>
+        <p:blipFill>
+          <a:blip r:embed="rId2"/>
+          <a:stretch>
+            <a:fillRect/>
+          </a:stretch>
+        </p:blipFill>
+        <p:spPr>
+          <a:xfrm>
+            <a:off x="320040" y="54864"/>
+            <a:ext cx="443132" cy="411480"/>
+          </a:xfrm>
+          <a:prstGeom prst="rect">
+            <a:avLst/>
+          </a:prstGeom>
+        </p:spPr>
+      </p:pic>
+      <p:sp>
+        <p:nvSpPr>
+          <p:cNvPr id="5" name="Rectangle 4"/>
           <p:cNvSpPr/>
           <p:nvPr/>
         </p:nvSpPr>
         <p:spPr>
           <a:xfrm>
-            <a:off x="411480" y="201168"/>
-            <a:ext cx="91440" cy="91440"/>
+            <a:off x="1691640" y="164592"/>
+            <a:ext cx="18288" cy="182880"/>
           </a:xfrm>
           <a:prstGeom prst="rect">
             <a:avLst/>
@@ -30986,6 +31274,7 @@
           <a:ln>
             <a:noFill/>
           </a:ln>
+          <a:effectLst/>
         </p:spPr>
         <p:style>
           <a:lnRef idx="1">
@@ -31011,13 +31300,13 @@
       </p:sp>
       <p:sp>
         <p:nvSpPr>
-          <p:cNvPr id="5" name="TextBox 4"/>
-          <p:cNvSpPr txBox="1"/>
-          <p:nvPr/>
-        </p:nvSpPr>
-        <p:spPr>
-          <a:xfrm>
-            <a:off x="594360" y="118872"/>
+          <p:cNvPr id="6" name="TextBox 5"/>
+          <p:cNvSpPr txBox="1"/>
+          <p:nvPr/>
+        </p:nvSpPr>
+        <p:spPr>
+          <a:xfrm>
+            <a:off x="1783080" y="118872"/>
             <a:ext cx="7315200" cy="274320"/>
           </a:xfrm>
           <a:prstGeom prst="rect">
@@ -31037,20 +31326,20 @@
               </a:lnSpc>
             </a:pPr>
             <a:r>
-              <a:rPr sz="1200" b="1" i="0">
-                <a:solidFill>
-                  <a:srgbClr val="FFFFFF"/>
-                </a:solidFill>
-                <a:latin typeface="Inter"/>
-              </a:rPr>
-              <a:t>GigShield   |   Phase 3 Final Submission</a:t>
-            </a:r>
-          </a:p>
-        </p:txBody>
-      </p:sp>
-      <p:sp>
-        <p:nvSpPr>
-          <p:cNvPr id="6" name="TextBox 5"/>
+              <a:rPr sz="1100" b="1" i="0">
+                <a:solidFill>
+                  <a:srgbClr val="D8E2F0"/>
+                </a:solidFill>
+                <a:latin typeface="Inter"/>
+              </a:rPr>
+              <a:t>Phase 3 Final Submission   ·   Guidewire DEVTrails 2026</a:t>
+            </a:r>
+          </a:p>
+        </p:txBody>
+      </p:sp>
+      <p:sp>
+        <p:nvSpPr>
+          <p:cNvPr id="7" name="TextBox 6"/>
           <p:cNvSpPr txBox="1"/>
           <p:nvPr/>
         </p:nvSpPr>
@@ -31089,7 +31378,7 @@
       </p:sp>
       <p:sp>
         <p:nvSpPr>
-          <p:cNvPr id="7" name="Rectangle 6"/>
+          <p:cNvPr id="8" name="Rectangle 7"/>
           <p:cNvSpPr/>
           <p:nvPr/>
         </p:nvSpPr>
@@ -31133,7 +31422,7 @@
       </p:sp>
       <p:sp>
         <p:nvSpPr>
-          <p:cNvPr id="8" name="TextBox 7"/>
+          <p:cNvPr id="9" name="TextBox 8"/>
           <p:cNvSpPr txBox="1"/>
           <p:nvPr/>
         </p:nvSpPr>
@@ -31172,7 +31461,7 @@
       </p:sp>
       <p:sp>
         <p:nvSpPr>
-          <p:cNvPr id="9" name="Rounded Rectangle 8"/>
+          <p:cNvPr id="10" name="Rounded Rectangle 9"/>
           <p:cNvSpPr/>
           <p:nvPr/>
         </p:nvSpPr>
@@ -31217,7 +31506,7 @@
       </p:sp>
       <p:sp>
         <p:nvSpPr>
-          <p:cNvPr id="10" name="TextBox 9"/>
+          <p:cNvPr id="11" name="TextBox 10"/>
           <p:cNvSpPr txBox="1"/>
           <p:nvPr/>
         </p:nvSpPr>
@@ -31256,7 +31545,7 @@
       </p:sp>
       <p:sp>
         <p:nvSpPr>
-          <p:cNvPr id="11" name="Rectangle 10"/>
+          <p:cNvPr id="12" name="Rectangle 11"/>
           <p:cNvSpPr/>
           <p:nvPr/>
         </p:nvSpPr>
@@ -31300,7 +31589,7 @@
       </p:sp>
       <p:sp>
         <p:nvSpPr>
-          <p:cNvPr id="12" name="TextBox 11"/>
+          <p:cNvPr id="13" name="TextBox 12"/>
           <p:cNvSpPr txBox="1"/>
           <p:nvPr/>
         </p:nvSpPr>
@@ -31339,7 +31628,7 @@
       </p:sp>
       <p:sp>
         <p:nvSpPr>
-          <p:cNvPr id="13" name="TextBox 12"/>
+          <p:cNvPr id="14" name="TextBox 13"/>
           <p:cNvSpPr txBox="1"/>
           <p:nvPr/>
         </p:nvSpPr>
@@ -31396,7 +31685,7 @@
       </p:sp>
       <p:sp>
         <p:nvSpPr>
-          <p:cNvPr id="14" name="Rectangle 13"/>
+          <p:cNvPr id="15" name="Rectangle 14"/>
           <p:cNvSpPr/>
           <p:nvPr/>
         </p:nvSpPr>
@@ -31440,7 +31729,7 @@
       </p:sp>
       <p:sp>
         <p:nvSpPr>
-          <p:cNvPr id="15" name="Rectangle 14"/>
+          <p:cNvPr id="16" name="Rectangle 15"/>
           <p:cNvSpPr/>
           <p:nvPr/>
         </p:nvSpPr>
@@ -31486,7 +31775,7 @@
       </p:sp>
       <p:sp>
         <p:nvSpPr>
-          <p:cNvPr id="16" name="Rounded Rectangle 15"/>
+          <p:cNvPr id="17" name="Rounded Rectangle 16"/>
           <p:cNvSpPr/>
           <p:nvPr/>
         </p:nvSpPr>
@@ -31531,7 +31820,7 @@
       </p:sp>
       <p:sp>
         <p:nvSpPr>
-          <p:cNvPr id="17" name="TextBox 16"/>
+          <p:cNvPr id="18" name="TextBox 17"/>
           <p:cNvSpPr txBox="1"/>
           <p:nvPr/>
         </p:nvSpPr>
@@ -31570,7 +31859,7 @@
       </p:sp>
       <p:sp>
         <p:nvSpPr>
-          <p:cNvPr id="18" name="TextBox 17"/>
+          <p:cNvPr id="19" name="TextBox 18"/>
           <p:cNvSpPr txBox="1"/>
           <p:nvPr/>
         </p:nvSpPr>
@@ -31609,7 +31898,7 @@
       </p:sp>
       <p:sp>
         <p:nvSpPr>
-          <p:cNvPr id="19" name="TextBox 18"/>
+          <p:cNvPr id="20" name="TextBox 19"/>
           <p:cNvSpPr txBox="1"/>
           <p:nvPr/>
         </p:nvSpPr>
@@ -31648,7 +31937,7 @@
       </p:sp>
       <p:sp>
         <p:nvSpPr>
-          <p:cNvPr id="20" name="TextBox 19"/>
+          <p:cNvPr id="21" name="TextBox 20"/>
           <p:cNvSpPr txBox="1"/>
           <p:nvPr/>
         </p:nvSpPr>
@@ -31687,7 +31976,7 @@
       </p:sp>
       <p:sp>
         <p:nvSpPr>
-          <p:cNvPr id="21" name="Rectangle 20"/>
+          <p:cNvPr id="22" name="Rectangle 21"/>
           <p:cNvSpPr/>
           <p:nvPr/>
         </p:nvSpPr>
@@ -31731,7 +32020,7 @@
       </p:sp>
       <p:sp>
         <p:nvSpPr>
-          <p:cNvPr id="22" name="Rectangle 21"/>
+          <p:cNvPr id="23" name="Rectangle 22"/>
           <p:cNvSpPr/>
           <p:nvPr/>
         </p:nvSpPr>
@@ -31777,7 +32066,7 @@
       </p:sp>
       <p:sp>
         <p:nvSpPr>
-          <p:cNvPr id="23" name="Rounded Rectangle 22"/>
+          <p:cNvPr id="24" name="Rounded Rectangle 23"/>
           <p:cNvSpPr/>
           <p:nvPr/>
         </p:nvSpPr>
@@ -31822,7 +32111,7 @@
       </p:sp>
       <p:sp>
         <p:nvSpPr>
-          <p:cNvPr id="24" name="TextBox 23"/>
+          <p:cNvPr id="25" name="TextBox 24"/>
           <p:cNvSpPr txBox="1"/>
           <p:nvPr/>
         </p:nvSpPr>
@@ -31861,7 +32150,7 @@
       </p:sp>
       <p:sp>
         <p:nvSpPr>
-          <p:cNvPr id="25" name="TextBox 24"/>
+          <p:cNvPr id="26" name="TextBox 25"/>
           <p:cNvSpPr txBox="1"/>
           <p:nvPr/>
         </p:nvSpPr>
@@ -31900,7 +32189,7 @@
       </p:sp>
       <p:sp>
         <p:nvSpPr>
-          <p:cNvPr id="26" name="TextBox 25"/>
+          <p:cNvPr id="27" name="TextBox 26"/>
           <p:cNvSpPr txBox="1"/>
           <p:nvPr/>
         </p:nvSpPr>
@@ -31939,7 +32228,7 @@
       </p:sp>
       <p:sp>
         <p:nvSpPr>
-          <p:cNvPr id="27" name="TextBox 26"/>
+          <p:cNvPr id="28" name="TextBox 27"/>
           <p:cNvSpPr txBox="1"/>
           <p:nvPr/>
         </p:nvSpPr>
@@ -31978,7 +32267,7 @@
       </p:sp>
       <p:sp>
         <p:nvSpPr>
-          <p:cNvPr id="28" name="Rectangle 27"/>
+          <p:cNvPr id="29" name="Rectangle 28"/>
           <p:cNvSpPr/>
           <p:nvPr/>
         </p:nvSpPr>
@@ -32022,7 +32311,7 @@
       </p:sp>
       <p:sp>
         <p:nvSpPr>
-          <p:cNvPr id="29" name="Rectangle 28"/>
+          <p:cNvPr id="30" name="Rectangle 29"/>
           <p:cNvSpPr/>
           <p:nvPr/>
         </p:nvSpPr>
@@ -32068,7 +32357,7 @@
       </p:sp>
       <p:sp>
         <p:nvSpPr>
-          <p:cNvPr id="30" name="Rounded Rectangle 29"/>
+          <p:cNvPr id="31" name="Rounded Rectangle 30"/>
           <p:cNvSpPr/>
           <p:nvPr/>
         </p:nvSpPr>
@@ -32113,7 +32402,7 @@
       </p:sp>
       <p:sp>
         <p:nvSpPr>
-          <p:cNvPr id="31" name="TextBox 30"/>
+          <p:cNvPr id="32" name="TextBox 31"/>
           <p:cNvSpPr txBox="1"/>
           <p:nvPr/>
         </p:nvSpPr>
@@ -32152,7 +32441,7 @@
       </p:sp>
       <p:sp>
         <p:nvSpPr>
-          <p:cNvPr id="32" name="TextBox 31"/>
+          <p:cNvPr id="33" name="TextBox 32"/>
           <p:cNvSpPr txBox="1"/>
           <p:nvPr/>
         </p:nvSpPr>
@@ -32191,7 +32480,7 @@
       </p:sp>
       <p:sp>
         <p:nvSpPr>
-          <p:cNvPr id="33" name="TextBox 32"/>
+          <p:cNvPr id="34" name="TextBox 33"/>
           <p:cNvSpPr txBox="1"/>
           <p:nvPr/>
         </p:nvSpPr>
@@ -32230,7 +32519,7 @@
       </p:sp>
       <p:sp>
         <p:nvSpPr>
-          <p:cNvPr id="34" name="TextBox 33"/>
+          <p:cNvPr id="35" name="TextBox 34"/>
           <p:cNvSpPr txBox="1"/>
           <p:nvPr/>
         </p:nvSpPr>
@@ -32269,7 +32558,7 @@
       </p:sp>
       <p:sp>
         <p:nvSpPr>
-          <p:cNvPr id="35" name="Rectangle 34"/>
+          <p:cNvPr id="36" name="Rectangle 35"/>
           <p:cNvSpPr/>
           <p:nvPr/>
         </p:nvSpPr>
@@ -32313,7 +32602,7 @@
       </p:sp>
       <p:sp>
         <p:nvSpPr>
-          <p:cNvPr id="36" name="Rectangle 35"/>
+          <p:cNvPr id="37" name="Rectangle 36"/>
           <p:cNvSpPr/>
           <p:nvPr/>
         </p:nvSpPr>
@@ -32357,7 +32646,7 @@
       </p:sp>
       <p:sp>
         <p:nvSpPr>
-          <p:cNvPr id="37" name="TextBox 36"/>
+          <p:cNvPr id="38" name="TextBox 37"/>
           <p:cNvSpPr txBox="1"/>
           <p:nvPr/>
         </p:nvSpPr>
@@ -32396,7 +32685,7 @@
       </p:sp>
       <p:sp>
         <p:nvSpPr>
-          <p:cNvPr id="38" name="TextBox 37"/>
+          <p:cNvPr id="39" name="TextBox 38"/>
           <p:cNvSpPr txBox="1"/>
           <p:nvPr/>
         </p:nvSpPr>
@@ -32555,16 +32844,40 @@
           </a:p>
         </p:txBody>
       </p:sp>
-      <p:sp>
-        <p:nvSpPr>
-          <p:cNvPr id="4" name="Rectangle 3"/>
+      <p:pic>
+        <p:nvPicPr>
+          <p:cNvPr id="4" name="Picture 3" descr="gigshield-dark.png"/>
+          <p:cNvPicPr>
+            <a:picLocks noChangeAspect="1"/>
+          </p:cNvPicPr>
+          <p:nvPr/>
+        </p:nvPicPr>
+        <p:blipFill>
+          <a:blip r:embed="rId2"/>
+          <a:stretch>
+            <a:fillRect/>
+          </a:stretch>
+        </p:blipFill>
+        <p:spPr>
+          <a:xfrm>
+            <a:off x="320040" y="54864"/>
+            <a:ext cx="443132" cy="411480"/>
+          </a:xfrm>
+          <a:prstGeom prst="rect">
+            <a:avLst/>
+          </a:prstGeom>
+        </p:spPr>
+      </p:pic>
+      <p:sp>
+        <p:nvSpPr>
+          <p:cNvPr id="5" name="Rectangle 4"/>
           <p:cNvSpPr/>
           <p:nvPr/>
         </p:nvSpPr>
         <p:spPr>
           <a:xfrm>
-            <a:off x="411480" y="201168"/>
-            <a:ext cx="91440" cy="91440"/>
+            <a:off x="1691640" y="164592"/>
+            <a:ext cx="18288" cy="182880"/>
           </a:xfrm>
           <a:prstGeom prst="rect">
             <a:avLst/>
@@ -32575,6 +32888,7 @@
           <a:ln>
             <a:noFill/>
           </a:ln>
+          <a:effectLst/>
         </p:spPr>
         <p:style>
           <a:lnRef idx="1">
@@ -32600,13 +32914,13 @@
       </p:sp>
       <p:sp>
         <p:nvSpPr>
-          <p:cNvPr id="5" name="TextBox 4"/>
-          <p:cNvSpPr txBox="1"/>
-          <p:nvPr/>
-        </p:nvSpPr>
-        <p:spPr>
-          <a:xfrm>
-            <a:off x="594360" y="118872"/>
+          <p:cNvPr id="6" name="TextBox 5"/>
+          <p:cNvSpPr txBox="1"/>
+          <p:nvPr/>
+        </p:nvSpPr>
+        <p:spPr>
+          <a:xfrm>
+            <a:off x="1783080" y="118872"/>
             <a:ext cx="7315200" cy="274320"/>
           </a:xfrm>
           <a:prstGeom prst="rect">
@@ -32626,20 +32940,20 @@
               </a:lnSpc>
             </a:pPr>
             <a:r>
-              <a:rPr sz="1200" b="1" i="0">
-                <a:solidFill>
-                  <a:srgbClr val="FFFFFF"/>
-                </a:solidFill>
-                <a:latin typeface="Inter"/>
-              </a:rPr>
-              <a:t>GigShield   |   Phase 3 Final Submission</a:t>
-            </a:r>
-          </a:p>
-        </p:txBody>
-      </p:sp>
-      <p:sp>
-        <p:nvSpPr>
-          <p:cNvPr id="6" name="TextBox 5"/>
+              <a:rPr sz="1100" b="1" i="0">
+                <a:solidFill>
+                  <a:srgbClr val="D8E2F0"/>
+                </a:solidFill>
+                <a:latin typeface="Inter"/>
+              </a:rPr>
+              <a:t>Phase 3 Final Submission   ·   Guidewire DEVTrails 2026</a:t>
+            </a:r>
+          </a:p>
+        </p:txBody>
+      </p:sp>
+      <p:sp>
+        <p:nvSpPr>
+          <p:cNvPr id="7" name="TextBox 6"/>
           <p:cNvSpPr txBox="1"/>
           <p:nvPr/>
         </p:nvSpPr>
@@ -32678,7 +32992,7 @@
       </p:sp>
       <p:sp>
         <p:nvSpPr>
-          <p:cNvPr id="7" name="Rectangle 6"/>
+          <p:cNvPr id="8" name="Rectangle 7"/>
           <p:cNvSpPr/>
           <p:nvPr/>
         </p:nvSpPr>
@@ -32722,7 +33036,7 @@
       </p:sp>
       <p:sp>
         <p:nvSpPr>
-          <p:cNvPr id="8" name="TextBox 7"/>
+          <p:cNvPr id="9" name="TextBox 8"/>
           <p:cNvSpPr txBox="1"/>
           <p:nvPr/>
         </p:nvSpPr>
@@ -32761,7 +33075,7 @@
       </p:sp>
       <p:sp>
         <p:nvSpPr>
-          <p:cNvPr id="9" name="Rounded Rectangle 8"/>
+          <p:cNvPr id="10" name="Rounded Rectangle 9"/>
           <p:cNvSpPr/>
           <p:nvPr/>
         </p:nvSpPr>
@@ -32806,7 +33120,7 @@
       </p:sp>
       <p:sp>
         <p:nvSpPr>
-          <p:cNvPr id="10" name="TextBox 9"/>
+          <p:cNvPr id="11" name="TextBox 10"/>
           <p:cNvSpPr txBox="1"/>
           <p:nvPr/>
         </p:nvSpPr>
@@ -32845,7 +33159,7 @@
       </p:sp>
       <p:sp>
         <p:nvSpPr>
-          <p:cNvPr id="11" name="Rectangle 10"/>
+          <p:cNvPr id="12" name="Rectangle 11"/>
           <p:cNvSpPr/>
           <p:nvPr/>
         </p:nvSpPr>
@@ -32889,7 +33203,7 @@
       </p:sp>
       <p:sp>
         <p:nvSpPr>
-          <p:cNvPr id="12" name="TextBox 11"/>
+          <p:cNvPr id="13" name="TextBox 12"/>
           <p:cNvSpPr txBox="1"/>
           <p:nvPr/>
         </p:nvSpPr>
@@ -32928,7 +33242,7 @@
       </p:sp>
       <p:sp>
         <p:nvSpPr>
-          <p:cNvPr id="13" name="TextBox 12"/>
+          <p:cNvPr id="14" name="TextBox 13"/>
           <p:cNvSpPr txBox="1"/>
           <p:nvPr/>
         </p:nvSpPr>
@@ -32985,7 +33299,7 @@
       </p:sp>
       <p:sp>
         <p:nvSpPr>
-          <p:cNvPr id="14" name="Rectangle 13"/>
+          <p:cNvPr id="15" name="Rectangle 14"/>
           <p:cNvSpPr/>
           <p:nvPr/>
         </p:nvSpPr>
@@ -33031,7 +33345,7 @@
       </p:sp>
       <p:sp>
         <p:nvSpPr>
-          <p:cNvPr id="15" name="TextBox 14"/>
+          <p:cNvPr id="16" name="TextBox 15"/>
           <p:cNvSpPr txBox="1"/>
           <p:nvPr/>
         </p:nvSpPr>
@@ -33422,7 +33736,7 @@
       </p:sp>
       <p:sp>
         <p:nvSpPr>
-          <p:cNvPr id="16" name="Rectangle 15"/>
+          <p:cNvPr id="17" name="Rectangle 16"/>
           <p:cNvSpPr/>
           <p:nvPr/>
         </p:nvSpPr>
@@ -33466,7 +33780,7 @@
       </p:sp>
       <p:sp>
         <p:nvSpPr>
-          <p:cNvPr id="17" name="Rectangle 16"/>
+          <p:cNvPr id="18" name="Rectangle 17"/>
           <p:cNvSpPr/>
           <p:nvPr/>
         </p:nvSpPr>
@@ -33512,7 +33826,7 @@
       </p:sp>
       <p:sp>
         <p:nvSpPr>
-          <p:cNvPr id="18" name="TextBox 17"/>
+          <p:cNvPr id="19" name="TextBox 18"/>
           <p:cNvSpPr txBox="1"/>
           <p:nvPr/>
         </p:nvSpPr>
@@ -33560,7 +33874,7 @@
       </p:sp>
       <p:sp>
         <p:nvSpPr>
-          <p:cNvPr id="19" name="TextBox 18"/>
+          <p:cNvPr id="20" name="TextBox 19"/>
           <p:cNvSpPr txBox="1"/>
           <p:nvPr/>
         </p:nvSpPr>
@@ -33599,7 +33913,7 @@
       </p:sp>
       <p:sp>
         <p:nvSpPr>
-          <p:cNvPr id="20" name="Rectangle 19"/>
+          <p:cNvPr id="21" name="Rectangle 20"/>
           <p:cNvSpPr/>
           <p:nvPr/>
         </p:nvSpPr>
@@ -33643,7 +33957,7 @@
       </p:sp>
       <p:sp>
         <p:nvSpPr>
-          <p:cNvPr id="21" name="Rectangle 20"/>
+          <p:cNvPr id="22" name="Rectangle 21"/>
           <p:cNvSpPr/>
           <p:nvPr/>
         </p:nvSpPr>
@@ -33689,7 +34003,7 @@
       </p:sp>
       <p:sp>
         <p:nvSpPr>
-          <p:cNvPr id="22" name="TextBox 21"/>
+          <p:cNvPr id="23" name="TextBox 22"/>
           <p:cNvSpPr txBox="1"/>
           <p:nvPr/>
         </p:nvSpPr>
@@ -33737,7 +34051,7 @@
       </p:sp>
       <p:sp>
         <p:nvSpPr>
-          <p:cNvPr id="23" name="TextBox 22"/>
+          <p:cNvPr id="24" name="TextBox 23"/>
           <p:cNvSpPr txBox="1"/>
           <p:nvPr/>
         </p:nvSpPr>
@@ -33776,7 +34090,7 @@
       </p:sp>
       <p:sp>
         <p:nvSpPr>
-          <p:cNvPr id="24" name="Rectangle 23"/>
+          <p:cNvPr id="25" name="Rectangle 24"/>
           <p:cNvSpPr/>
           <p:nvPr/>
         </p:nvSpPr>
@@ -33820,7 +34134,7 @@
       </p:sp>
       <p:sp>
         <p:nvSpPr>
-          <p:cNvPr id="25" name="Rectangle 24"/>
+          <p:cNvPr id="26" name="Rectangle 25"/>
           <p:cNvSpPr/>
           <p:nvPr/>
         </p:nvSpPr>
@@ -33866,7 +34180,7 @@
       </p:sp>
       <p:sp>
         <p:nvSpPr>
-          <p:cNvPr id="26" name="TextBox 25"/>
+          <p:cNvPr id="27" name="TextBox 26"/>
           <p:cNvSpPr txBox="1"/>
           <p:nvPr/>
         </p:nvSpPr>
@@ -33914,7 +34228,7 @@
       </p:sp>
       <p:sp>
         <p:nvSpPr>
-          <p:cNvPr id="27" name="TextBox 26"/>
+          <p:cNvPr id="28" name="TextBox 27"/>
           <p:cNvSpPr txBox="1"/>
           <p:nvPr/>
         </p:nvSpPr>
@@ -33953,7 +34267,7 @@
       </p:sp>
       <p:sp>
         <p:nvSpPr>
-          <p:cNvPr id="28" name="Rectangle 27"/>
+          <p:cNvPr id="29" name="Rectangle 28"/>
           <p:cNvSpPr/>
           <p:nvPr/>
         </p:nvSpPr>
@@ -33997,7 +34311,7 @@
       </p:sp>
       <p:sp>
         <p:nvSpPr>
-          <p:cNvPr id="29" name="Rectangle 28"/>
+          <p:cNvPr id="30" name="Rectangle 29"/>
           <p:cNvSpPr/>
           <p:nvPr/>
         </p:nvSpPr>
@@ -34043,7 +34357,7 @@
       </p:sp>
       <p:sp>
         <p:nvSpPr>
-          <p:cNvPr id="30" name="TextBox 29"/>
+          <p:cNvPr id="31" name="TextBox 30"/>
           <p:cNvSpPr txBox="1"/>
           <p:nvPr/>
         </p:nvSpPr>
@@ -34091,7 +34405,7 @@
       </p:sp>
       <p:sp>
         <p:nvSpPr>
-          <p:cNvPr id="31" name="TextBox 30"/>
+          <p:cNvPr id="32" name="TextBox 31"/>
           <p:cNvSpPr txBox="1"/>
           <p:nvPr/>
         </p:nvSpPr>
@@ -34234,16 +34548,40 @@
           </a:p>
         </p:txBody>
       </p:sp>
-      <p:sp>
-        <p:nvSpPr>
-          <p:cNvPr id="4" name="Rectangle 3"/>
+      <p:pic>
+        <p:nvPicPr>
+          <p:cNvPr id="4" name="Picture 3" descr="gigshield-dark.png"/>
+          <p:cNvPicPr>
+            <a:picLocks noChangeAspect="1"/>
+          </p:cNvPicPr>
+          <p:nvPr/>
+        </p:nvPicPr>
+        <p:blipFill>
+          <a:blip r:embed="rId2"/>
+          <a:stretch>
+            <a:fillRect/>
+          </a:stretch>
+        </p:blipFill>
+        <p:spPr>
+          <a:xfrm>
+            <a:off x="320040" y="54864"/>
+            <a:ext cx="443132" cy="411480"/>
+          </a:xfrm>
+          <a:prstGeom prst="rect">
+            <a:avLst/>
+          </a:prstGeom>
+        </p:spPr>
+      </p:pic>
+      <p:sp>
+        <p:nvSpPr>
+          <p:cNvPr id="5" name="Rectangle 4"/>
           <p:cNvSpPr/>
           <p:nvPr/>
         </p:nvSpPr>
         <p:spPr>
           <a:xfrm>
-            <a:off x="411480" y="201168"/>
-            <a:ext cx="91440" cy="91440"/>
+            <a:off x="1691640" y="164592"/>
+            <a:ext cx="18288" cy="182880"/>
           </a:xfrm>
           <a:prstGeom prst="rect">
             <a:avLst/>
@@ -34254,6 +34592,7 @@
           <a:ln>
             <a:noFill/>
           </a:ln>
+          <a:effectLst/>
         </p:spPr>
         <p:style>
           <a:lnRef idx="1">
@@ -34279,13 +34618,13 @@
       </p:sp>
       <p:sp>
         <p:nvSpPr>
-          <p:cNvPr id="5" name="TextBox 4"/>
-          <p:cNvSpPr txBox="1"/>
-          <p:nvPr/>
-        </p:nvSpPr>
-        <p:spPr>
-          <a:xfrm>
-            <a:off x="594360" y="118872"/>
+          <p:cNvPr id="6" name="TextBox 5"/>
+          <p:cNvSpPr txBox="1"/>
+          <p:nvPr/>
+        </p:nvSpPr>
+        <p:spPr>
+          <a:xfrm>
+            <a:off x="1783080" y="118872"/>
             <a:ext cx="7315200" cy="274320"/>
           </a:xfrm>
           <a:prstGeom prst="rect">
@@ -34305,20 +34644,20 @@
               </a:lnSpc>
             </a:pPr>
             <a:r>
-              <a:rPr sz="1200" b="1" i="0">
-                <a:solidFill>
-                  <a:srgbClr val="FFFFFF"/>
-                </a:solidFill>
-                <a:latin typeface="Inter"/>
-              </a:rPr>
-              <a:t>GigShield   |   Phase 3 Final Submission</a:t>
-            </a:r>
-          </a:p>
-        </p:txBody>
-      </p:sp>
-      <p:sp>
-        <p:nvSpPr>
-          <p:cNvPr id="6" name="TextBox 5"/>
+              <a:rPr sz="1100" b="1" i="0">
+                <a:solidFill>
+                  <a:srgbClr val="D8E2F0"/>
+                </a:solidFill>
+                <a:latin typeface="Inter"/>
+              </a:rPr>
+              <a:t>Phase 3 Final Submission   ·   Guidewire DEVTrails 2026</a:t>
+            </a:r>
+          </a:p>
+        </p:txBody>
+      </p:sp>
+      <p:sp>
+        <p:nvSpPr>
+          <p:cNvPr id="7" name="TextBox 6"/>
           <p:cNvSpPr txBox="1"/>
           <p:nvPr/>
         </p:nvSpPr>
@@ -34357,7 +34696,7 @@
       </p:sp>
       <p:sp>
         <p:nvSpPr>
-          <p:cNvPr id="7" name="Rectangle 6"/>
+          <p:cNvPr id="8" name="Rectangle 7"/>
           <p:cNvSpPr/>
           <p:nvPr/>
         </p:nvSpPr>
@@ -34401,7 +34740,7 @@
       </p:sp>
       <p:sp>
         <p:nvSpPr>
-          <p:cNvPr id="8" name="TextBox 7"/>
+          <p:cNvPr id="9" name="TextBox 8"/>
           <p:cNvSpPr txBox="1"/>
           <p:nvPr/>
         </p:nvSpPr>
@@ -34440,7 +34779,7 @@
       </p:sp>
       <p:sp>
         <p:nvSpPr>
-          <p:cNvPr id="9" name="Rounded Rectangle 8"/>
+          <p:cNvPr id="10" name="Rounded Rectangle 9"/>
           <p:cNvSpPr/>
           <p:nvPr/>
         </p:nvSpPr>
@@ -34485,7 +34824,7 @@
       </p:sp>
       <p:sp>
         <p:nvSpPr>
-          <p:cNvPr id="10" name="TextBox 9"/>
+          <p:cNvPr id="11" name="TextBox 10"/>
           <p:cNvSpPr txBox="1"/>
           <p:nvPr/>
         </p:nvSpPr>
@@ -34524,7 +34863,7 @@
       </p:sp>
       <p:sp>
         <p:nvSpPr>
-          <p:cNvPr id="11" name="Rectangle 10"/>
+          <p:cNvPr id="12" name="Rectangle 11"/>
           <p:cNvSpPr/>
           <p:nvPr/>
         </p:nvSpPr>
@@ -34568,7 +34907,7 @@
       </p:sp>
       <p:sp>
         <p:nvSpPr>
-          <p:cNvPr id="12" name="TextBox 11"/>
+          <p:cNvPr id="13" name="TextBox 12"/>
           <p:cNvSpPr txBox="1"/>
           <p:nvPr/>
         </p:nvSpPr>
@@ -34607,7 +34946,7 @@
       </p:sp>
       <p:sp>
         <p:nvSpPr>
-          <p:cNvPr id="13" name="TextBox 12"/>
+          <p:cNvPr id="14" name="TextBox 13"/>
           <p:cNvSpPr txBox="1"/>
           <p:nvPr/>
         </p:nvSpPr>
@@ -34664,7 +35003,7 @@
       </p:sp>
       <p:sp>
         <p:nvSpPr>
-          <p:cNvPr id="14" name="TextBox 13"/>
+          <p:cNvPr id="15" name="TextBox 14"/>
           <p:cNvSpPr txBox="1"/>
           <p:nvPr/>
         </p:nvSpPr>
@@ -34703,7 +35042,7 @@
       </p:sp>
       <p:sp>
         <p:nvSpPr>
-          <p:cNvPr id="15" name="Rectangle 14"/>
+          <p:cNvPr id="16" name="Rectangle 15"/>
           <p:cNvSpPr/>
           <p:nvPr/>
         </p:nvSpPr>
@@ -34747,7 +35086,7 @@
       </p:sp>
       <p:sp>
         <p:nvSpPr>
-          <p:cNvPr id="16" name="TextBox 15"/>
+          <p:cNvPr id="17" name="TextBox 16"/>
           <p:cNvSpPr txBox="1"/>
           <p:nvPr/>
         </p:nvSpPr>
@@ -34786,7 +35125,7 @@
       </p:sp>
       <p:sp>
         <p:nvSpPr>
-          <p:cNvPr id="17" name="Rectangle 16"/>
+          <p:cNvPr id="18" name="Rectangle 17"/>
           <p:cNvSpPr/>
           <p:nvPr/>
         </p:nvSpPr>
@@ -34830,7 +35169,7 @@
       </p:sp>
       <p:sp>
         <p:nvSpPr>
-          <p:cNvPr id="18" name="TextBox 17"/>
+          <p:cNvPr id="19" name="TextBox 18"/>
           <p:cNvSpPr txBox="1"/>
           <p:nvPr/>
         </p:nvSpPr>
@@ -34869,7 +35208,7 @@
       </p:sp>
       <p:sp>
         <p:nvSpPr>
-          <p:cNvPr id="19" name="TextBox 18"/>
+          <p:cNvPr id="20" name="TextBox 19"/>
           <p:cNvSpPr txBox="1"/>
           <p:nvPr/>
         </p:nvSpPr>
@@ -34908,7 +35247,7 @@
       </p:sp>
       <p:sp>
         <p:nvSpPr>
-          <p:cNvPr id="20" name="TextBox 19"/>
+          <p:cNvPr id="21" name="TextBox 20"/>
           <p:cNvSpPr txBox="1"/>
           <p:nvPr/>
         </p:nvSpPr>
@@ -34947,7 +35286,7 @@
       </p:sp>
       <p:sp>
         <p:nvSpPr>
-          <p:cNvPr id="21" name="TextBox 20"/>
+          <p:cNvPr id="22" name="TextBox 21"/>
           <p:cNvSpPr txBox="1"/>
           <p:nvPr/>
         </p:nvSpPr>
@@ -34986,7 +35325,7 @@
       </p:sp>
       <p:sp>
         <p:nvSpPr>
-          <p:cNvPr id="22" name="Rectangle 21"/>
+          <p:cNvPr id="23" name="Rectangle 22"/>
           <p:cNvSpPr/>
           <p:nvPr/>
         </p:nvSpPr>
@@ -35030,7 +35369,7 @@
       </p:sp>
       <p:sp>
         <p:nvSpPr>
-          <p:cNvPr id="23" name="TextBox 22"/>
+          <p:cNvPr id="24" name="TextBox 23"/>
           <p:cNvSpPr txBox="1"/>
           <p:nvPr/>
         </p:nvSpPr>
@@ -35069,7 +35408,7 @@
       </p:sp>
       <p:sp>
         <p:nvSpPr>
-          <p:cNvPr id="24" name="TextBox 23"/>
+          <p:cNvPr id="25" name="TextBox 24"/>
           <p:cNvSpPr txBox="1"/>
           <p:nvPr/>
         </p:nvSpPr>
@@ -35108,7 +35447,7 @@
       </p:sp>
       <p:sp>
         <p:nvSpPr>
-          <p:cNvPr id="25" name="TextBox 24"/>
+          <p:cNvPr id="26" name="TextBox 25"/>
           <p:cNvSpPr txBox="1"/>
           <p:nvPr/>
         </p:nvSpPr>
@@ -35147,7 +35486,7 @@
       </p:sp>
       <p:sp>
         <p:nvSpPr>
-          <p:cNvPr id="26" name="TextBox 25"/>
+          <p:cNvPr id="27" name="TextBox 26"/>
           <p:cNvSpPr txBox="1"/>
           <p:nvPr/>
         </p:nvSpPr>
@@ -35186,7 +35525,7 @@
       </p:sp>
       <p:sp>
         <p:nvSpPr>
-          <p:cNvPr id="27" name="TextBox 26"/>
+          <p:cNvPr id="28" name="TextBox 27"/>
           <p:cNvSpPr txBox="1"/>
           <p:nvPr/>
         </p:nvSpPr>
@@ -35225,7 +35564,7 @@
       </p:sp>
       <p:sp>
         <p:nvSpPr>
-          <p:cNvPr id="28" name="TextBox 27"/>
+          <p:cNvPr id="29" name="TextBox 28"/>
           <p:cNvSpPr txBox="1"/>
           <p:nvPr/>
         </p:nvSpPr>
@@ -35264,7 +35603,7 @@
       </p:sp>
       <p:sp>
         <p:nvSpPr>
-          <p:cNvPr id="29" name="TextBox 28"/>
+          <p:cNvPr id="30" name="TextBox 29"/>
           <p:cNvSpPr txBox="1"/>
           <p:nvPr/>
         </p:nvSpPr>
@@ -35303,7 +35642,7 @@
       </p:sp>
       <p:sp>
         <p:nvSpPr>
-          <p:cNvPr id="30" name="TextBox 29"/>
+          <p:cNvPr id="31" name="TextBox 30"/>
           <p:cNvSpPr txBox="1"/>
           <p:nvPr/>
         </p:nvSpPr>
@@ -35342,7 +35681,7 @@
       </p:sp>
       <p:sp>
         <p:nvSpPr>
-          <p:cNvPr id="31" name="Rectangle 30"/>
+          <p:cNvPr id="32" name="Rectangle 31"/>
           <p:cNvSpPr/>
           <p:nvPr/>
         </p:nvSpPr>
@@ -35386,7 +35725,7 @@
       </p:sp>
       <p:sp>
         <p:nvSpPr>
-          <p:cNvPr id="32" name="TextBox 31"/>
+          <p:cNvPr id="33" name="TextBox 32"/>
           <p:cNvSpPr txBox="1"/>
           <p:nvPr/>
         </p:nvSpPr>
@@ -35425,7 +35764,7 @@
       </p:sp>
       <p:sp>
         <p:nvSpPr>
-          <p:cNvPr id="33" name="TextBox 32"/>
+          <p:cNvPr id="34" name="TextBox 33"/>
           <p:cNvSpPr txBox="1"/>
           <p:nvPr/>
         </p:nvSpPr>
@@ -35464,7 +35803,7 @@
       </p:sp>
       <p:sp>
         <p:nvSpPr>
-          <p:cNvPr id="34" name="TextBox 33"/>
+          <p:cNvPr id="35" name="TextBox 34"/>
           <p:cNvSpPr txBox="1"/>
           <p:nvPr/>
         </p:nvSpPr>
@@ -35503,7 +35842,7 @@
       </p:sp>
       <p:sp>
         <p:nvSpPr>
-          <p:cNvPr id="35" name="TextBox 34"/>
+          <p:cNvPr id="36" name="TextBox 35"/>
           <p:cNvSpPr txBox="1"/>
           <p:nvPr/>
         </p:nvSpPr>
@@ -35542,7 +35881,7 @@
       </p:sp>
       <p:sp>
         <p:nvSpPr>
-          <p:cNvPr id="36" name="TextBox 35"/>
+          <p:cNvPr id="37" name="TextBox 36"/>
           <p:cNvSpPr txBox="1"/>
           <p:nvPr/>
         </p:nvSpPr>
@@ -35581,7 +35920,7 @@
       </p:sp>
       <p:sp>
         <p:nvSpPr>
-          <p:cNvPr id="37" name="TextBox 36"/>
+          <p:cNvPr id="38" name="TextBox 37"/>
           <p:cNvSpPr txBox="1"/>
           <p:nvPr/>
         </p:nvSpPr>
@@ -35620,7 +35959,7 @@
       </p:sp>
       <p:sp>
         <p:nvSpPr>
-          <p:cNvPr id="38" name="TextBox 37"/>
+          <p:cNvPr id="39" name="TextBox 38"/>
           <p:cNvSpPr txBox="1"/>
           <p:nvPr/>
         </p:nvSpPr>
@@ -35659,7 +35998,7 @@
       </p:sp>
       <p:sp>
         <p:nvSpPr>
-          <p:cNvPr id="39" name="TextBox 38"/>
+          <p:cNvPr id="40" name="TextBox 39"/>
           <p:cNvSpPr txBox="1"/>
           <p:nvPr/>
         </p:nvSpPr>
@@ -35698,7 +36037,7 @@
       </p:sp>
       <p:sp>
         <p:nvSpPr>
-          <p:cNvPr id="40" name="Rectangle 39"/>
+          <p:cNvPr id="41" name="Rectangle 40"/>
           <p:cNvSpPr/>
           <p:nvPr/>
         </p:nvSpPr>
@@ -35742,7 +36081,7 @@
       </p:sp>
       <p:sp>
         <p:nvSpPr>
-          <p:cNvPr id="41" name="TextBox 40"/>
+          <p:cNvPr id="42" name="TextBox 41"/>
           <p:cNvSpPr txBox="1"/>
           <p:nvPr/>
         </p:nvSpPr>
@@ -35781,7 +36120,7 @@
       </p:sp>
       <p:sp>
         <p:nvSpPr>
-          <p:cNvPr id="42" name="TextBox 41"/>
+          <p:cNvPr id="43" name="TextBox 42"/>
           <p:cNvSpPr txBox="1"/>
           <p:nvPr/>
         </p:nvSpPr>
@@ -35820,7 +36159,7 @@
       </p:sp>
       <p:sp>
         <p:nvSpPr>
-          <p:cNvPr id="43" name="TextBox 42"/>
+          <p:cNvPr id="44" name="TextBox 43"/>
           <p:cNvSpPr txBox="1"/>
           <p:nvPr/>
         </p:nvSpPr>
@@ -35859,7 +36198,7 @@
       </p:sp>
       <p:sp>
         <p:nvSpPr>
-          <p:cNvPr id="44" name="TextBox 43"/>
+          <p:cNvPr id="45" name="TextBox 44"/>
           <p:cNvSpPr txBox="1"/>
           <p:nvPr/>
         </p:nvSpPr>
@@ -35898,7 +36237,7 @@
       </p:sp>
       <p:sp>
         <p:nvSpPr>
-          <p:cNvPr id="45" name="TextBox 44"/>
+          <p:cNvPr id="46" name="TextBox 45"/>
           <p:cNvSpPr txBox="1"/>
           <p:nvPr/>
         </p:nvSpPr>
@@ -35937,7 +36276,7 @@
       </p:sp>
       <p:sp>
         <p:nvSpPr>
-          <p:cNvPr id="46" name="TextBox 45"/>
+          <p:cNvPr id="47" name="TextBox 46"/>
           <p:cNvSpPr txBox="1"/>
           <p:nvPr/>
         </p:nvSpPr>
@@ -35976,7 +36315,7 @@
       </p:sp>
       <p:sp>
         <p:nvSpPr>
-          <p:cNvPr id="47" name="TextBox 46"/>
+          <p:cNvPr id="48" name="TextBox 47"/>
           <p:cNvSpPr txBox="1"/>
           <p:nvPr/>
         </p:nvSpPr>
@@ -36015,7 +36354,7 @@
       </p:sp>
       <p:sp>
         <p:nvSpPr>
-          <p:cNvPr id="48" name="TextBox 47"/>
+          <p:cNvPr id="49" name="TextBox 48"/>
           <p:cNvSpPr txBox="1"/>
           <p:nvPr/>
         </p:nvSpPr>
@@ -36054,7 +36393,7 @@
       </p:sp>
       <p:sp>
         <p:nvSpPr>
-          <p:cNvPr id="49" name="Rectangle 48"/>
+          <p:cNvPr id="50" name="Rectangle 49"/>
           <p:cNvSpPr/>
           <p:nvPr/>
         </p:nvSpPr>
@@ -36098,7 +36437,7 @@
       </p:sp>
       <p:sp>
         <p:nvSpPr>
-          <p:cNvPr id="50" name="TextBox 49"/>
+          <p:cNvPr id="51" name="TextBox 50"/>
           <p:cNvSpPr txBox="1"/>
           <p:nvPr/>
         </p:nvSpPr>
@@ -36137,7 +36476,7 @@
       </p:sp>
       <p:sp>
         <p:nvSpPr>
-          <p:cNvPr id="51" name="TextBox 50"/>
+          <p:cNvPr id="52" name="TextBox 51"/>
           <p:cNvSpPr txBox="1"/>
           <p:nvPr/>
         </p:nvSpPr>
@@ -36176,7 +36515,7 @@
       </p:sp>
       <p:sp>
         <p:nvSpPr>
-          <p:cNvPr id="52" name="TextBox 51"/>
+          <p:cNvPr id="53" name="TextBox 52"/>
           <p:cNvSpPr txBox="1"/>
           <p:nvPr/>
         </p:nvSpPr>
@@ -36215,7 +36554,7 @@
       </p:sp>
       <p:sp>
         <p:nvSpPr>
-          <p:cNvPr id="53" name="TextBox 52"/>
+          <p:cNvPr id="54" name="TextBox 53"/>
           <p:cNvSpPr txBox="1"/>
           <p:nvPr/>
         </p:nvSpPr>
@@ -36254,7 +36593,7 @@
       </p:sp>
       <p:sp>
         <p:nvSpPr>
-          <p:cNvPr id="54" name="TextBox 53"/>
+          <p:cNvPr id="55" name="TextBox 54"/>
           <p:cNvSpPr txBox="1"/>
           <p:nvPr/>
         </p:nvSpPr>
@@ -36293,7 +36632,7 @@
       </p:sp>
       <p:sp>
         <p:nvSpPr>
-          <p:cNvPr id="55" name="TextBox 54"/>
+          <p:cNvPr id="56" name="TextBox 55"/>
           <p:cNvSpPr txBox="1"/>
           <p:nvPr/>
         </p:nvSpPr>
@@ -36332,7 +36671,7 @@
       </p:sp>
       <p:sp>
         <p:nvSpPr>
-          <p:cNvPr id="56" name="TextBox 55"/>
+          <p:cNvPr id="57" name="TextBox 56"/>
           <p:cNvSpPr txBox="1"/>
           <p:nvPr/>
         </p:nvSpPr>
@@ -36371,7 +36710,7 @@
       </p:sp>
       <p:sp>
         <p:nvSpPr>
-          <p:cNvPr id="57" name="TextBox 56"/>
+          <p:cNvPr id="58" name="TextBox 57"/>
           <p:cNvSpPr txBox="1"/>
           <p:nvPr/>
         </p:nvSpPr>
@@ -36410,7 +36749,7 @@
       </p:sp>
       <p:sp>
         <p:nvSpPr>
-          <p:cNvPr id="58" name="Rectangle 57"/>
+          <p:cNvPr id="59" name="Rectangle 58"/>
           <p:cNvSpPr/>
           <p:nvPr/>
         </p:nvSpPr>
@@ -36454,7 +36793,7 @@
       </p:sp>
       <p:sp>
         <p:nvSpPr>
-          <p:cNvPr id="59" name="TextBox 58"/>
+          <p:cNvPr id="60" name="TextBox 59"/>
           <p:cNvSpPr txBox="1"/>
           <p:nvPr/>
         </p:nvSpPr>
@@ -36493,7 +36832,7 @@
       </p:sp>
       <p:sp>
         <p:nvSpPr>
-          <p:cNvPr id="60" name="TextBox 59"/>
+          <p:cNvPr id="61" name="TextBox 60"/>
           <p:cNvSpPr txBox="1"/>
           <p:nvPr/>
         </p:nvSpPr>
@@ -36532,7 +36871,7 @@
       </p:sp>
       <p:sp>
         <p:nvSpPr>
-          <p:cNvPr id="61" name="TextBox 60"/>
+          <p:cNvPr id="62" name="TextBox 61"/>
           <p:cNvSpPr txBox="1"/>
           <p:nvPr/>
         </p:nvSpPr>
@@ -36571,7 +36910,7 @@
       </p:sp>
       <p:sp>
         <p:nvSpPr>
-          <p:cNvPr id="62" name="TextBox 61"/>
+          <p:cNvPr id="63" name="TextBox 62"/>
           <p:cNvSpPr txBox="1"/>
           <p:nvPr/>
         </p:nvSpPr>
@@ -36610,7 +36949,7 @@
       </p:sp>
       <p:sp>
         <p:nvSpPr>
-          <p:cNvPr id="63" name="TextBox 62"/>
+          <p:cNvPr id="64" name="TextBox 63"/>
           <p:cNvSpPr txBox="1"/>
           <p:nvPr/>
         </p:nvSpPr>
@@ -36649,7 +36988,7 @@
       </p:sp>
       <p:sp>
         <p:nvSpPr>
-          <p:cNvPr id="64" name="TextBox 63"/>
+          <p:cNvPr id="65" name="TextBox 64"/>
           <p:cNvSpPr txBox="1"/>
           <p:nvPr/>
         </p:nvSpPr>
@@ -36688,7 +37027,7 @@
       </p:sp>
       <p:sp>
         <p:nvSpPr>
-          <p:cNvPr id="65" name="TextBox 64"/>
+          <p:cNvPr id="66" name="TextBox 65"/>
           <p:cNvSpPr txBox="1"/>
           <p:nvPr/>
         </p:nvSpPr>
@@ -36727,7 +37066,7 @@
       </p:sp>
       <p:sp>
         <p:nvSpPr>
-          <p:cNvPr id="66" name="TextBox 65"/>
+          <p:cNvPr id="67" name="TextBox 66"/>
           <p:cNvSpPr txBox="1"/>
           <p:nvPr/>
         </p:nvSpPr>
@@ -36766,7 +37105,7 @@
       </p:sp>
       <p:sp>
         <p:nvSpPr>
-          <p:cNvPr id="67" name="Rectangle 66"/>
+          <p:cNvPr id="68" name="Rectangle 67"/>
           <p:cNvSpPr/>
           <p:nvPr/>
         </p:nvSpPr>
@@ -36810,7 +37149,7 @@
       </p:sp>
       <p:sp>
         <p:nvSpPr>
-          <p:cNvPr id="68" name="TextBox 67"/>
+          <p:cNvPr id="69" name="TextBox 68"/>
           <p:cNvSpPr txBox="1"/>
           <p:nvPr/>
         </p:nvSpPr>
@@ -36849,7 +37188,7 @@
       </p:sp>
       <p:sp>
         <p:nvSpPr>
-          <p:cNvPr id="69" name="TextBox 68"/>
+          <p:cNvPr id="70" name="TextBox 69"/>
           <p:cNvSpPr txBox="1"/>
           <p:nvPr/>
         </p:nvSpPr>
@@ -36888,7 +37227,7 @@
       </p:sp>
       <p:sp>
         <p:nvSpPr>
-          <p:cNvPr id="70" name="TextBox 69"/>
+          <p:cNvPr id="71" name="TextBox 70"/>
           <p:cNvSpPr txBox="1"/>
           <p:nvPr/>
         </p:nvSpPr>
@@ -36927,7 +37266,7 @@
       </p:sp>
       <p:sp>
         <p:nvSpPr>
-          <p:cNvPr id="71" name="TextBox 70"/>
+          <p:cNvPr id="72" name="TextBox 71"/>
           <p:cNvSpPr txBox="1"/>
           <p:nvPr/>
         </p:nvSpPr>
@@ -37070,16 +37409,40 @@
           </a:p>
         </p:txBody>
       </p:sp>
-      <p:sp>
-        <p:nvSpPr>
-          <p:cNvPr id="4" name="Rectangle 3"/>
+      <p:pic>
+        <p:nvPicPr>
+          <p:cNvPr id="4" name="Picture 3" descr="gigshield-dark.png"/>
+          <p:cNvPicPr>
+            <a:picLocks noChangeAspect="1"/>
+          </p:cNvPicPr>
+          <p:nvPr/>
+        </p:nvPicPr>
+        <p:blipFill>
+          <a:blip r:embed="rId2"/>
+          <a:stretch>
+            <a:fillRect/>
+          </a:stretch>
+        </p:blipFill>
+        <p:spPr>
+          <a:xfrm>
+            <a:off x="320040" y="54864"/>
+            <a:ext cx="443132" cy="411480"/>
+          </a:xfrm>
+          <a:prstGeom prst="rect">
+            <a:avLst/>
+          </a:prstGeom>
+        </p:spPr>
+      </p:pic>
+      <p:sp>
+        <p:nvSpPr>
+          <p:cNvPr id="5" name="Rectangle 4"/>
           <p:cNvSpPr/>
           <p:nvPr/>
         </p:nvSpPr>
         <p:spPr>
           <a:xfrm>
-            <a:off x="411480" y="201168"/>
-            <a:ext cx="91440" cy="91440"/>
+            <a:off x="1691640" y="164592"/>
+            <a:ext cx="18288" cy="182880"/>
           </a:xfrm>
           <a:prstGeom prst="rect">
             <a:avLst/>
@@ -37090,6 +37453,7 @@
           <a:ln>
             <a:noFill/>
           </a:ln>
+          <a:effectLst/>
         </p:spPr>
         <p:style>
           <a:lnRef idx="1">
@@ -37115,13 +37479,13 @@
       </p:sp>
       <p:sp>
         <p:nvSpPr>
-          <p:cNvPr id="5" name="TextBox 4"/>
-          <p:cNvSpPr txBox="1"/>
-          <p:nvPr/>
-        </p:nvSpPr>
-        <p:spPr>
-          <a:xfrm>
-            <a:off x="594360" y="118872"/>
+          <p:cNvPr id="6" name="TextBox 5"/>
+          <p:cNvSpPr txBox="1"/>
+          <p:nvPr/>
+        </p:nvSpPr>
+        <p:spPr>
+          <a:xfrm>
+            <a:off x="1783080" y="118872"/>
             <a:ext cx="7315200" cy="274320"/>
           </a:xfrm>
           <a:prstGeom prst="rect">
@@ -37141,20 +37505,20 @@
               </a:lnSpc>
             </a:pPr>
             <a:r>
-              <a:rPr sz="1200" b="1" i="0">
-                <a:solidFill>
-                  <a:srgbClr val="FFFFFF"/>
-                </a:solidFill>
-                <a:latin typeface="Inter"/>
-              </a:rPr>
-              <a:t>GigShield   |   Phase 3 Final Submission</a:t>
-            </a:r>
-          </a:p>
-        </p:txBody>
-      </p:sp>
-      <p:sp>
-        <p:nvSpPr>
-          <p:cNvPr id="6" name="TextBox 5"/>
+              <a:rPr sz="1100" b="1" i="0">
+                <a:solidFill>
+                  <a:srgbClr val="D8E2F0"/>
+                </a:solidFill>
+                <a:latin typeface="Inter"/>
+              </a:rPr>
+              <a:t>Phase 3 Final Submission   ·   Guidewire DEVTrails 2026</a:t>
+            </a:r>
+          </a:p>
+        </p:txBody>
+      </p:sp>
+      <p:sp>
+        <p:nvSpPr>
+          <p:cNvPr id="7" name="TextBox 6"/>
           <p:cNvSpPr txBox="1"/>
           <p:nvPr/>
         </p:nvSpPr>
@@ -37193,7 +37557,7 @@
       </p:sp>
       <p:sp>
         <p:nvSpPr>
-          <p:cNvPr id="7" name="Rectangle 6"/>
+          <p:cNvPr id="8" name="Rectangle 7"/>
           <p:cNvSpPr/>
           <p:nvPr/>
         </p:nvSpPr>
@@ -37237,7 +37601,7 @@
       </p:sp>
       <p:sp>
         <p:nvSpPr>
-          <p:cNvPr id="8" name="TextBox 7"/>
+          <p:cNvPr id="9" name="TextBox 8"/>
           <p:cNvSpPr txBox="1"/>
           <p:nvPr/>
         </p:nvSpPr>
@@ -37276,7 +37640,7 @@
       </p:sp>
       <p:sp>
         <p:nvSpPr>
-          <p:cNvPr id="9" name="Rounded Rectangle 8"/>
+          <p:cNvPr id="10" name="Rounded Rectangle 9"/>
           <p:cNvSpPr/>
           <p:nvPr/>
         </p:nvSpPr>
@@ -37321,7 +37685,7 @@
       </p:sp>
       <p:sp>
         <p:nvSpPr>
-          <p:cNvPr id="10" name="TextBox 9"/>
+          <p:cNvPr id="11" name="TextBox 10"/>
           <p:cNvSpPr txBox="1"/>
           <p:nvPr/>
         </p:nvSpPr>
@@ -37360,7 +37724,7 @@
       </p:sp>
       <p:sp>
         <p:nvSpPr>
-          <p:cNvPr id="11" name="Rectangle 10"/>
+          <p:cNvPr id="12" name="Rectangle 11"/>
           <p:cNvSpPr/>
           <p:nvPr/>
         </p:nvSpPr>
@@ -37404,7 +37768,7 @@
       </p:sp>
       <p:sp>
         <p:nvSpPr>
-          <p:cNvPr id="12" name="TextBox 11"/>
+          <p:cNvPr id="13" name="TextBox 12"/>
           <p:cNvSpPr txBox="1"/>
           <p:nvPr/>
         </p:nvSpPr>
@@ -37443,7 +37807,7 @@
       </p:sp>
       <p:sp>
         <p:nvSpPr>
-          <p:cNvPr id="13" name="TextBox 12"/>
+          <p:cNvPr id="14" name="TextBox 13"/>
           <p:cNvSpPr txBox="1"/>
           <p:nvPr/>
         </p:nvSpPr>
@@ -37500,7 +37864,7 @@
       </p:sp>
       <p:sp>
         <p:nvSpPr>
-          <p:cNvPr id="14" name="TextBox 13"/>
+          <p:cNvPr id="15" name="TextBox 14"/>
           <p:cNvSpPr txBox="1"/>
           <p:nvPr/>
         </p:nvSpPr>
@@ -37539,7 +37903,7 @@
       </p:sp>
       <p:sp>
         <p:nvSpPr>
-          <p:cNvPr id="15" name="Rectangle 14"/>
+          <p:cNvPr id="16" name="Rectangle 15"/>
           <p:cNvSpPr/>
           <p:nvPr/>
         </p:nvSpPr>
@@ -37583,7 +37947,7 @@
       </p:sp>
       <p:sp>
         <p:nvSpPr>
-          <p:cNvPr id="16" name="Rectangle 15"/>
+          <p:cNvPr id="17" name="Rectangle 16"/>
           <p:cNvSpPr/>
           <p:nvPr/>
         </p:nvSpPr>
@@ -37627,7 +37991,7 @@
       </p:sp>
       <p:sp>
         <p:nvSpPr>
-          <p:cNvPr id="17" name="TextBox 16"/>
+          <p:cNvPr id="18" name="TextBox 17"/>
           <p:cNvSpPr txBox="1"/>
           <p:nvPr/>
         </p:nvSpPr>
@@ -37746,7 +38110,7 @@
       </p:sp>
       <p:sp>
         <p:nvSpPr>
-          <p:cNvPr id="18" name="TextBox 17"/>
+          <p:cNvPr id="19" name="TextBox 18"/>
           <p:cNvSpPr txBox="1"/>
           <p:nvPr/>
         </p:nvSpPr>
@@ -37785,7 +38149,7 @@
       </p:sp>
       <p:sp>
         <p:nvSpPr>
-          <p:cNvPr id="19" name="TextBox 18"/>
+          <p:cNvPr id="20" name="TextBox 19"/>
           <p:cNvSpPr txBox="1"/>
           <p:nvPr/>
         </p:nvSpPr>
@@ -37889,7 +38253,7 @@
       </p:sp>
       <p:sp>
         <p:nvSpPr>
-          <p:cNvPr id="20" name="TextBox 19"/>
+          <p:cNvPr id="21" name="TextBox 20"/>
           <p:cNvSpPr txBox="1"/>
           <p:nvPr/>
         </p:nvSpPr>
@@ -37928,7 +38292,7 @@
       </p:sp>
       <p:sp>
         <p:nvSpPr>
-          <p:cNvPr id="21" name="Rectangle 20"/>
+          <p:cNvPr id="22" name="Rectangle 21"/>
           <p:cNvSpPr/>
           <p:nvPr/>
         </p:nvSpPr>
@@ -37972,7 +38336,7 @@
       </p:sp>
       <p:sp>
         <p:nvSpPr>
-          <p:cNvPr id="22" name="Rectangle 21"/>
+          <p:cNvPr id="23" name="Rectangle 22"/>
           <p:cNvSpPr/>
           <p:nvPr/>
         </p:nvSpPr>
@@ -38016,7 +38380,7 @@
       </p:sp>
       <p:sp>
         <p:nvSpPr>
-          <p:cNvPr id="23" name="TextBox 22"/>
+          <p:cNvPr id="24" name="TextBox 23"/>
           <p:cNvSpPr txBox="1"/>
           <p:nvPr/>
         </p:nvSpPr>
@@ -38279,7 +38643,7 @@
       </p:sp>
       <p:sp>
         <p:nvSpPr>
-          <p:cNvPr id="24" name="Rectangle 23"/>
+          <p:cNvPr id="25" name="Rectangle 24"/>
           <p:cNvSpPr/>
           <p:nvPr/>
         </p:nvSpPr>
@@ -38323,7 +38687,7 @@
       </p:sp>
       <p:sp>
         <p:nvSpPr>
-          <p:cNvPr id="25" name="Rectangle 24"/>
+          <p:cNvPr id="26" name="Rectangle 25"/>
           <p:cNvSpPr/>
           <p:nvPr/>
         </p:nvSpPr>
@@ -38367,7 +38731,7 @@
       </p:sp>
       <p:sp>
         <p:nvSpPr>
-          <p:cNvPr id="26" name="Rounded Rectangle 25"/>
+          <p:cNvPr id="27" name="Rounded Rectangle 26"/>
           <p:cNvSpPr/>
           <p:nvPr/>
         </p:nvSpPr>
@@ -38412,7 +38776,7 @@
       </p:sp>
       <p:sp>
         <p:nvSpPr>
-          <p:cNvPr id="27" name="TextBox 26"/>
+          <p:cNvPr id="28" name="TextBox 27"/>
           <p:cNvSpPr txBox="1"/>
           <p:nvPr/>
         </p:nvSpPr>
@@ -38451,7 +38815,7 @@
       </p:sp>
       <p:sp>
         <p:nvSpPr>
-          <p:cNvPr id="28" name="TextBox 27"/>
+          <p:cNvPr id="29" name="TextBox 28"/>
           <p:cNvSpPr txBox="1"/>
           <p:nvPr/>
         </p:nvSpPr>

--- a/docs/pitch-deck/gigshield-pitch.pptx
+++ b/docs/pitch-deck/gigshield-pitch.pptx
@@ -3642,7 +3642,7 @@
                 </a:solidFill>
                 <a:latin typeface="Inter"/>
               </a:rPr>
-              <a:t>OpenAI GPT-4.1</a:t>
+              <a:t>OpenAI GPT-5.4</a:t>
             </a:r>
           </a:p>
         </p:txBody>
@@ -4672,7 +4672,7 @@
                 </a:solidFill>
                 <a:latin typeface="Inter"/>
               </a:rPr>
-              <a:t>OPENAI GPT-4.1 · THREE USE CASES</a:t>
+              <a:t>OPENAI GPT-5.4 · THREE USE CASES</a:t>
             </a:r>
           </a:p>
         </p:txBody>
@@ -5855,7 +5855,7 @@
                 </a:solidFill>
                 <a:latin typeface="Inter"/>
               </a:rPr>
-              <a:t>Worker BAS breakdown · claim history · zone weather history · device fingerprint · ring-fraud signal output · policy metadata — structured as typed JSON so GPT-4.1 returns bounded, citable reasoning.</a:t>
+              <a:t>Worker BAS breakdown · claim history · zone weather history · device fingerprint · ring-fraud signal output · policy metadata — structured as typed JSON so GPT-5.4 returns bounded, citable reasoning.</a:t>
             </a:r>
           </a:p>
         </p:txBody>
@@ -16838,7 +16838,7 @@
                 </a:solidFill>
                 <a:latin typeface="Inter"/>
               </a:rPr>
-              <a:t>OpenAI GPT-4.1</a:t>
+              <a:t>OpenAI GPT-5.4</a:t>
             </a:r>
           </a:p>
           <a:p>
@@ -32221,7 +32221,7 @@
                 </a:solidFill>
                 <a:latin typeface="Inter"/>
               </a:rPr>
-              <a:t>Live Ops SSE feed, fraud review, GPT-4.1 insights.</a:t>
+              <a:t>Live Ops SSE feed, fraud review, GPT-5.4 insights.</a:t>
             </a:r>
           </a:p>
         </p:txBody>
@@ -33585,7 +33585,7 @@
                 </a:solidFill>
                 <a:latin typeface="Menlo"/>
               </a:rPr>
-              <a:t>         │   │ 11 lang│   │ SSE /events/stream     │ ◀── OpenAI GPT-4.1       │</a:t>
+              <a:t>         │   │ 11 lang│   │ SSE /events/stream     │ ◀── OpenAI GPT-5.4       │</a:t>
             </a:r>
           </a:p>
           <a:p>
